--- a/public/materials/REJU-20-Day-Cohort-Instructions.pptx
+++ b/public/materials/REJU-20-Day-Cohort-Instructions.pptx
@@ -4,6 +4,9 @@
   <p:sldMasterIdLst>
     <p:sldMasterId id="2147483648" r:id="rId1"/>
   </p:sldMasterIdLst>
+  <p:notesMasterIdLst>
+    <p:notesMasterId r:id="rId32"/>
+  </p:notesMasterIdLst>
   <p:sldIdLst>
     <p:sldId id="256" r:id="rId2"/>
     <p:sldId id="257" r:id="rId3"/>
@@ -36,10 +39,7 @@
     <p:sldId id="284" r:id="rId30"/>
     <p:sldId id="285" r:id="rId31"/>
   </p:sldIdLst>
-  <p:notesMasterIdLst>
-    <p:notesMasterId r:id="rId32"/>
-  </p:notesMasterIdLst>
-  <p:sldSz cx="9144000" cy="5143500"/>
+  <p:sldSz cx="9144000" cy="5143500" type="screen16x9"/>
   <p:notesSz cx="5143500" cy="9144000"/>
   <p:defaultTextStyle>
     <a:lvl1pPr marL="0" algn="l" defTabSz="914400" rtl="0" eaLnBrk="1" latinLnBrk="0" hangingPunct="1">
@@ -133,6 +133,11 @@
       </a:defRPr>
     </a:lvl9pPr>
   </p:defaultTextStyle>
+  <p:extLst>
+    <p:ext uri="{EFAFB233-063F-42B5-8137-9DF3F51BA10A}">
+      <p15:sldGuideLst xmlns:p15="http://schemas.microsoft.com/office/powerpoint/2012/main"/>
+    </p:ext>
+  </p:extLst>
 </p:presentation>
 </file>
 
@@ -158,234 +163,10 @@
           <a:chExt cx="0" cy="0"/>
         </a:xfrm>
       </p:grpSpPr>
-      <p:sp>
-        <p:nvSpPr>
-          <p:cNvPr id="2" name="Header Placeholder 1"/>
-          <p:cNvSpPr>
-            <a:spLocks noGrp="1"/>
-          </p:cNvSpPr>
-          <p:nvPr>
-            <p:ph type="hdr" sz="quarter"/>
-          </p:nvPr>
-        </p:nvSpPr>
-        <p:spPr>
-          <a:xfrm>
-            <a:off x="0" y="0"/>
-            <a:ext cx="2971800" cy="458788"/>
-          </a:xfrm>
-          <a:prstGeom prst="rect">
-            <a:avLst/>
-          </a:prstGeom>
-        </p:spPr>
-        <p:txBody>
-          <a:bodyPr vert="horz" lIns="91440" tIns="45720" rIns="91440" bIns="45720" rtlCol="0"/>
-          <a:lstStyle>
-            <a:lvl1pPr algn="l">
-              <a:defRPr sz="1200"/>
-            </a:lvl1pPr>
-          </a:lstStyle>
-          <a:p>
-            <a:endParaRPr lang="en-US"/>
-          </a:p>
-        </p:txBody>
-      </p:sp>
-      <p:sp>
-        <p:nvSpPr>
-          <p:cNvPr id="3" name="Date Placeholder 2"/>
-          <p:cNvSpPr>
-            <a:spLocks noGrp="1"/>
-          </p:cNvSpPr>
-          <p:nvPr>
-            <p:ph type="dt" idx="1"/>
-          </p:nvPr>
-        </p:nvSpPr>
-        <p:spPr>
-          <a:xfrm>
-            <a:off x="3884613" y="0"/>
-            <a:ext cx="2971800" cy="458788"/>
-          </a:xfrm>
-          <a:prstGeom prst="rect">
-            <a:avLst/>
-          </a:prstGeom>
-        </p:spPr>
-        <p:txBody>
-          <a:bodyPr vert="horz" lIns="91440" tIns="45720" rIns="91440" bIns="45720" rtlCol="0"/>
-          <a:lstStyle>
-            <a:lvl1pPr algn="r">
-              <a:defRPr sz="1200"/>
-            </a:lvl1pPr>
-          </a:lstStyle>
-          <a:p>
-            <a:fld id="{5282F153-3F37-0F45-9E97-73ACFA13230C}" type="datetimeFigureOut">
-              <a:rPr lang="en-US"/>
-              <a:t>7/23/19</a:t>
-            </a:fld>
-            <a:endParaRPr lang="en-US"/>
-          </a:p>
-        </p:txBody>
-      </p:sp>
-      <p:sp>
-        <p:nvSpPr>
-          <p:cNvPr id="4" name="Slide Image Placeholder 3"/>
-          <p:cNvSpPr>
-            <a:spLocks noGrp="1" noRot="1" noChangeAspect="1"/>
-          </p:cNvSpPr>
-          <p:nvPr>
-            <p:ph type="sldImg" idx="2"/>
-          </p:nvPr>
-        </p:nvSpPr>
-        <p:spPr>
-          <a:xfrm>
-            <a:off x="685800" y="1143000"/>
-            <a:ext cx="5486400" cy="3086100"/>
-          </a:xfrm>
-          <a:prstGeom prst="rect">
-            <a:avLst/>
-          </a:prstGeom>
-          <a:noFill/>
-          <a:ln w="12700">
-            <a:solidFill>
-              <a:prstClr val="black"/>
-            </a:solidFill>
-          </a:ln>
-        </p:spPr>
-        <p:txBody>
-          <a:bodyPr vert="horz" lIns="91440" tIns="45720" rIns="91440" bIns="45720" rtlCol="0" anchor="ctr"/>
-          <a:lstStyle/>
-          <a:p>
-            <a:endParaRPr lang="en-US"/>
-          </a:p>
-        </p:txBody>
-      </p:sp>
-      <p:sp>
-        <p:nvSpPr>
-          <p:cNvPr id="5" name="Notes Placeholder 4"/>
-          <p:cNvSpPr>
-            <a:spLocks noGrp="1"/>
-          </p:cNvSpPr>
-          <p:nvPr>
-            <p:ph type="body" sz="quarter" idx="3"/>
-          </p:nvPr>
-        </p:nvSpPr>
-        <p:spPr>
-          <a:xfrm>
-            <a:off x="685800" y="4400550"/>
-            <a:ext cx="5486400" cy="3600450"/>
-          </a:xfrm>
-          <a:prstGeom prst="rect">
-            <a:avLst/>
-          </a:prstGeom>
-        </p:spPr>
-        <p:txBody>
-          <a:bodyPr vert="horz" lIns="91440" tIns="45720" rIns="91440" bIns="45720" rtlCol="0"/>
-          <a:lstStyle/>
-          <a:p>
-            <a:pPr lvl="0"/>
-            <a:r>
-              <a:rPr lang="en-US"/>
-              <a:t>Click to edit Master text styles</a:t>
-            </a:r>
-          </a:p>
-          <a:p>
-            <a:pPr lvl="1"/>
-            <a:r>
-              <a:rPr lang="en-US"/>
-              <a:t>Second level</a:t>
-            </a:r>
-          </a:p>
-          <a:p>
-            <a:pPr lvl="2"/>
-            <a:r>
-              <a:rPr lang="en-US"/>
-              <a:t>Third level</a:t>
-            </a:r>
-          </a:p>
-          <a:p>
-            <a:pPr lvl="3"/>
-            <a:r>
-              <a:rPr lang="en-US"/>
-              <a:t>Fourth level</a:t>
-            </a:r>
-          </a:p>
-          <a:p>
-            <a:pPr lvl="4"/>
-            <a:r>
-              <a:rPr lang="en-US"/>
-              <a:t>Fifth level</a:t>
-            </a:r>
-          </a:p>
-        </p:txBody>
-      </p:sp>
-      <p:sp>
-        <p:nvSpPr>
-          <p:cNvPr id="6" name="Footer Placeholder 5"/>
-          <p:cNvSpPr>
-            <a:spLocks noGrp="1"/>
-          </p:cNvSpPr>
-          <p:nvPr>
-            <p:ph type="ftr" sz="quarter" idx="4"/>
-          </p:nvPr>
-        </p:nvSpPr>
-        <p:spPr>
-          <a:xfrm>
-            <a:off x="0" y="8685213"/>
-            <a:ext cx="2971800" cy="458787"/>
-          </a:xfrm>
-          <a:prstGeom prst="rect">
-            <a:avLst/>
-          </a:prstGeom>
-        </p:spPr>
-        <p:txBody>
-          <a:bodyPr vert="horz" lIns="91440" tIns="45720" rIns="91440" bIns="45720" rtlCol="0" anchor="b"/>
-          <a:lstStyle>
-            <a:lvl1pPr algn="l">
-              <a:defRPr sz="1200"/>
-            </a:lvl1pPr>
-          </a:lstStyle>
-          <a:p>
-            <a:endParaRPr lang="en-US"/>
-          </a:p>
-        </p:txBody>
-      </p:sp>
-      <p:sp>
-        <p:nvSpPr>
-          <p:cNvPr id="7" name="Slide Number Placeholder 6"/>
-          <p:cNvSpPr>
-            <a:spLocks noGrp="1"/>
-          </p:cNvSpPr>
-          <p:nvPr>
-            <p:ph type="sldNum" sz="quarter" idx="5"/>
-          </p:nvPr>
-        </p:nvSpPr>
-        <p:spPr>
-          <a:xfrm>
-            <a:off x="3884613" y="8685213"/>
-            <a:ext cx="2971800" cy="458787"/>
-          </a:xfrm>
-          <a:prstGeom prst="rect">
-            <a:avLst/>
-          </a:prstGeom>
-        </p:spPr>
-        <p:txBody>
-          <a:bodyPr vert="horz" lIns="91440" tIns="45720" rIns="91440" bIns="45720" rtlCol="0" anchor="b"/>
-          <a:lstStyle>
-            <a:lvl1pPr algn="r">
-              <a:defRPr sz="1200"/>
-            </a:lvl1pPr>
-          </a:lstStyle>
-          <a:p>
-            <a:fld id="{CE5E9CC1-C706-0F49-92D6-E571CC5EEA8F}" type="slidenum">
-              <a:rPr lang="en-US"/>
-              <a:t>‹#›</a:t>
-            </a:fld>
-            <a:endParaRPr lang="en-US"/>
-          </a:p>
-        </p:txBody>
-      </p:sp>
     </p:spTree>
     <p:extLst>
       <p:ext uri="{BB962C8B-B14F-4D97-AF65-F5344CB8AC3E}">
-        <p14:creationId xmlns:p14="http://schemas.microsoft.com/office/powerpoint/2010/main" val="1024086991"/>
+        <p14:creationId xmlns:p14="http://schemas.microsoft.com/office/powerpoint/2010/main" val="1268031419"/>
       </p:ext>
     </p:extLst>
   </p:cSld>
@@ -529,10 +310,6 @@
           <a:bodyPr/>
           <a:lstStyle/>
           <a:p>
-            <a:r>
-              <a:rPr lang="en-US" dirty="0"/>
-              <a:t/>
-            </a:r>
             <a:endParaRPr lang="en-US" dirty="0"/>
           </a:p>
         </p:txBody>
@@ -617,10 +394,6 @@
           <a:bodyPr/>
           <a:lstStyle/>
           <a:p>
-            <a:r>
-              <a:rPr lang="en-US" dirty="0"/>
-              <a:t/>
-            </a:r>
             <a:endParaRPr lang="en-US" dirty="0"/>
           </a:p>
         </p:txBody>
@@ -705,10 +478,6 @@
           <a:bodyPr/>
           <a:lstStyle/>
           <a:p>
-            <a:r>
-              <a:rPr lang="en-US" dirty="0"/>
-              <a:t/>
-            </a:r>
             <a:endParaRPr lang="en-US" dirty="0"/>
           </a:p>
         </p:txBody>
@@ -793,10 +562,6 @@
           <a:bodyPr/>
           <a:lstStyle/>
           <a:p>
-            <a:r>
-              <a:rPr lang="en-US" dirty="0"/>
-              <a:t/>
-            </a:r>
             <a:endParaRPr lang="en-US" dirty="0"/>
           </a:p>
         </p:txBody>
@@ -881,10 +646,6 @@
           <a:bodyPr/>
           <a:lstStyle/>
           <a:p>
-            <a:r>
-              <a:rPr lang="en-US" dirty="0"/>
-              <a:t/>
-            </a:r>
             <a:endParaRPr lang="en-US" dirty="0"/>
           </a:p>
         </p:txBody>
@@ -969,10 +730,6 @@
           <a:bodyPr/>
           <a:lstStyle/>
           <a:p>
-            <a:r>
-              <a:rPr lang="en-US" dirty="0"/>
-              <a:t/>
-            </a:r>
             <a:endParaRPr lang="en-US" dirty="0"/>
           </a:p>
         </p:txBody>
@@ -1057,10 +814,6 @@
           <a:bodyPr/>
           <a:lstStyle/>
           <a:p>
-            <a:r>
-              <a:rPr lang="en-US" dirty="0"/>
-              <a:t/>
-            </a:r>
             <a:endParaRPr lang="en-US" dirty="0"/>
           </a:p>
         </p:txBody>
@@ -1145,10 +898,6 @@
           <a:bodyPr/>
           <a:lstStyle/>
           <a:p>
-            <a:r>
-              <a:rPr lang="en-US" dirty="0"/>
-              <a:t/>
-            </a:r>
             <a:endParaRPr lang="en-US" dirty="0"/>
           </a:p>
         </p:txBody>
@@ -1233,10 +982,6 @@
           <a:bodyPr/>
           <a:lstStyle/>
           <a:p>
-            <a:r>
-              <a:rPr lang="en-US" dirty="0"/>
-              <a:t/>
-            </a:r>
             <a:endParaRPr lang="en-US" dirty="0"/>
           </a:p>
         </p:txBody>
@@ -1321,10 +1066,6 @@
           <a:bodyPr/>
           <a:lstStyle/>
           <a:p>
-            <a:r>
-              <a:rPr lang="en-US" dirty="0"/>
-              <a:t/>
-            </a:r>
             <a:endParaRPr lang="en-US" dirty="0"/>
           </a:p>
         </p:txBody>
@@ -1409,10 +1150,6 @@
           <a:bodyPr/>
           <a:lstStyle/>
           <a:p>
-            <a:r>
-              <a:rPr lang="en-US" dirty="0"/>
-              <a:t/>
-            </a:r>
             <a:endParaRPr lang="en-US" dirty="0"/>
           </a:p>
         </p:txBody>
@@ -1497,10 +1234,6 @@
           <a:bodyPr/>
           <a:lstStyle/>
           <a:p>
-            <a:r>
-              <a:rPr lang="en-US" dirty="0"/>
-              <a:t/>
-            </a:r>
             <a:endParaRPr lang="en-US" dirty="0"/>
           </a:p>
         </p:txBody>
@@ -1585,10 +1318,6 @@
           <a:bodyPr/>
           <a:lstStyle/>
           <a:p>
-            <a:r>
-              <a:rPr lang="en-US" dirty="0"/>
-              <a:t/>
-            </a:r>
             <a:endParaRPr lang="en-US" dirty="0"/>
           </a:p>
         </p:txBody>
@@ -1673,10 +1402,6 @@
           <a:bodyPr/>
           <a:lstStyle/>
           <a:p>
-            <a:r>
-              <a:rPr lang="en-US" dirty="0"/>
-              <a:t/>
-            </a:r>
             <a:endParaRPr lang="en-US" dirty="0"/>
           </a:p>
         </p:txBody>
@@ -1761,10 +1486,6 @@
           <a:bodyPr/>
           <a:lstStyle/>
           <a:p>
-            <a:r>
-              <a:rPr lang="en-US" dirty="0"/>
-              <a:t/>
-            </a:r>
             <a:endParaRPr lang="en-US" dirty="0"/>
           </a:p>
         </p:txBody>
@@ -1849,10 +1570,6 @@
           <a:bodyPr/>
           <a:lstStyle/>
           <a:p>
-            <a:r>
-              <a:rPr lang="en-US" dirty="0"/>
-              <a:t/>
-            </a:r>
             <a:endParaRPr lang="en-US" dirty="0"/>
           </a:p>
         </p:txBody>
@@ -1937,10 +1654,6 @@
           <a:bodyPr/>
           <a:lstStyle/>
           <a:p>
-            <a:r>
-              <a:rPr lang="en-US" dirty="0"/>
-              <a:t/>
-            </a:r>
             <a:endParaRPr lang="en-US" dirty="0"/>
           </a:p>
         </p:txBody>
@@ -2025,10 +1738,6 @@
           <a:bodyPr/>
           <a:lstStyle/>
           <a:p>
-            <a:r>
-              <a:rPr lang="en-US" dirty="0"/>
-              <a:t/>
-            </a:r>
             <a:endParaRPr lang="en-US" dirty="0"/>
           </a:p>
         </p:txBody>
@@ -2113,10 +1822,6 @@
           <a:bodyPr/>
           <a:lstStyle/>
           <a:p>
-            <a:r>
-              <a:rPr lang="en-US" dirty="0"/>
-              <a:t/>
-            </a:r>
             <a:endParaRPr lang="en-US" dirty="0"/>
           </a:p>
         </p:txBody>
@@ -2201,10 +1906,6 @@
           <a:bodyPr/>
           <a:lstStyle/>
           <a:p>
-            <a:r>
-              <a:rPr lang="en-US" dirty="0"/>
-              <a:t/>
-            </a:r>
             <a:endParaRPr lang="en-US" dirty="0"/>
           </a:p>
         </p:txBody>
@@ -2289,10 +1990,6 @@
           <a:bodyPr/>
           <a:lstStyle/>
           <a:p>
-            <a:r>
-              <a:rPr lang="en-US" dirty="0"/>
-              <a:t/>
-            </a:r>
             <a:endParaRPr lang="en-US" dirty="0"/>
           </a:p>
         </p:txBody>
@@ -2377,10 +2074,6 @@
           <a:bodyPr/>
           <a:lstStyle/>
           <a:p>
-            <a:r>
-              <a:rPr lang="en-US" dirty="0"/>
-              <a:t/>
-            </a:r>
             <a:endParaRPr lang="en-US" dirty="0"/>
           </a:p>
         </p:txBody>
@@ -2465,10 +2158,6 @@
           <a:bodyPr/>
           <a:lstStyle/>
           <a:p>
-            <a:r>
-              <a:rPr lang="en-US" dirty="0"/>
-              <a:t/>
-            </a:r>
             <a:endParaRPr lang="en-US" dirty="0"/>
           </a:p>
         </p:txBody>
@@ -2553,10 +2242,6 @@
           <a:bodyPr/>
           <a:lstStyle/>
           <a:p>
-            <a:r>
-              <a:rPr lang="en-US" dirty="0"/>
-              <a:t/>
-            </a:r>
             <a:endParaRPr lang="en-US" dirty="0"/>
           </a:p>
         </p:txBody>
@@ -2641,10 +2326,6 @@
           <a:bodyPr/>
           <a:lstStyle/>
           <a:p>
-            <a:r>
-              <a:rPr lang="en-US" dirty="0"/>
-              <a:t/>
-            </a:r>
             <a:endParaRPr lang="en-US" dirty="0"/>
           </a:p>
         </p:txBody>
@@ -2729,10 +2410,6 @@
           <a:bodyPr/>
           <a:lstStyle/>
           <a:p>
-            <a:r>
-              <a:rPr lang="en-US" dirty="0"/>
-              <a:t/>
-            </a:r>
             <a:endParaRPr lang="en-US" dirty="0"/>
           </a:p>
         </p:txBody>
@@ -2817,10 +2494,6 @@
           <a:bodyPr/>
           <a:lstStyle/>
           <a:p>
-            <a:r>
-              <a:rPr lang="en-US" dirty="0"/>
-              <a:t/>
-            </a:r>
             <a:endParaRPr lang="en-US" dirty="0"/>
           </a:p>
         </p:txBody>
@@ -2905,10 +2578,6 @@
           <a:bodyPr/>
           <a:lstStyle/>
           <a:p>
-            <a:r>
-              <a:rPr lang="en-US" dirty="0"/>
-              <a:t/>
-            </a:r>
             <a:endParaRPr lang="en-US" dirty="0"/>
           </a:p>
         </p:txBody>
@@ -2993,10 +2662,6 @@
           <a:bodyPr/>
           <a:lstStyle/>
           <a:p>
-            <a:r>
-              <a:rPr lang="en-US" dirty="0"/>
-              <a:t/>
-            </a:r>
             <a:endParaRPr lang="en-US" dirty="0"/>
           </a:p>
         </p:txBody>
@@ -3081,10 +2746,6 @@
           <a:bodyPr/>
           <a:lstStyle/>
           <a:p>
-            <a:r>
-              <a:rPr lang="en-US" dirty="0"/>
-              <a:t/>
-            </a:r>
             <a:endParaRPr lang="en-US" dirty="0"/>
           </a:p>
         </p:txBody>
@@ -3158,6 +2819,11 @@
 <file path=ppt/slideMasters/slideMaster1.xml><?xml version="1.0" encoding="utf-8"?>
 <p:sldMaster xmlns:a="http://schemas.openxmlformats.org/drawingml/2006/main" xmlns:r="http://schemas.openxmlformats.org/officeDocument/2006/relationships" xmlns:p="http://schemas.openxmlformats.org/presentationml/2006/main">
   <p:cSld>
+    <p:bg>
+      <p:bgRef idx="1001">
+        <a:schemeClr val="bg1"/>
+      </p:bgRef>
+    </p:bg>
     <p:spTree>
       <p:nvGrpSpPr>
         <p:cNvPr id="1" name=""/>
@@ -3473,6 +3139,13 @@
             <a:prstDash val="solid"/>
           </a:ln>
         </p:spPr>
+        <p:txBody>
+          <a:bodyPr/>
+          <a:lstStyle/>
+          <a:p>
+            <a:endParaRPr lang="en-US"/>
+          </a:p>
+        </p:txBody>
       </p:sp>
       <p:sp>
         <p:nvSpPr>
@@ -3498,6 +3171,13 @@
             <a:prstDash val="solid"/>
           </a:ln>
         </p:spPr>
+        <p:txBody>
+          <a:bodyPr/>
+          <a:lstStyle/>
+          <a:p>
+            <a:endParaRPr lang="en-US"/>
+          </a:p>
+        </p:txBody>
       </p:sp>
       <p:sp>
         <p:nvSpPr>
@@ -3523,6 +3203,13 @@
             <a:prstDash val="solid"/>
           </a:ln>
         </p:spPr>
+        <p:txBody>
+          <a:bodyPr/>
+          <a:lstStyle/>
+          <a:p>
+            <a:endParaRPr lang="en-US"/>
+          </a:p>
+        </p:txBody>
       </p:sp>
       <p:sp>
         <p:nvSpPr>
@@ -3550,6 +3237,13 @@
             <a:prstDash val="solid"/>
           </a:ln>
         </p:spPr>
+        <p:txBody>
+          <a:bodyPr/>
+          <a:lstStyle/>
+          <a:p>
+            <a:endParaRPr lang="en-US"/>
+          </a:p>
+        </p:txBody>
       </p:sp>
       <p:sp>
         <p:nvSpPr>
@@ -3577,18 +3271,25 @@
             <a:prstDash val="solid"/>
           </a:ln>
         </p:spPr>
+        <p:txBody>
+          <a:bodyPr/>
+          <a:lstStyle/>
+          <a:p>
+            <a:endParaRPr lang="en-US"/>
+          </a:p>
+        </p:txBody>
       </p:sp>
       <p:pic>
         <p:nvPicPr>
-          <p:cNvPr id="7" name="Image 0" descr="C:\Users\wifis\reju-site\public\logo.png">    </p:cNvPr>
+          <p:cNvPr id="7" name="Image 0" descr="C:\Users\wifis\reju-site\public\logo.png"/>
           <p:cNvPicPr>
             <a:picLocks noChangeAspect="1"/>
           </p:cNvPicPr>
           <p:nvPr/>
         </p:nvPicPr>
         <p:blipFill>
-          <a:blip r:embed="rId1"/>
-          <a:srcRect l="0" r="0" t="0" b="0"/>
+          <a:blip r:embed="rId3"/>
+          <a:srcRect/>
           <a:stretch/>
         </p:blipFill>
         <p:spPr>
@@ -3622,11 +3323,11 @@
           <a:bodyPr wrap="square" lIns="0" tIns="0" rIns="0" bIns="0" rtlCol="0" anchor="ctr"/>
           <a:lstStyle/>
           <a:p>
-            <a:pPr algn="ctr" indent="0" marL="0">
+            <a:pPr marL="0" indent="0" algn="ctr">
               <a:buNone/>
             </a:pPr>
             <a:r>
-              <a:rPr lang="en-US" sz="1400" b="1" spc="400" kern="0" dirty="0">
+              <a:rPr lang="en-US" sz="1400" b="1" kern="0" spc="400" dirty="0">
                 <a:solidFill>
                   <a:srgbClr val="F5C26B"/>
                 </a:solidFill>
@@ -3661,7 +3362,7 @@
           <a:bodyPr wrap="square" lIns="0" tIns="0" rIns="0" bIns="0" rtlCol="0" anchor="ctr"/>
           <a:lstStyle/>
           <a:p>
-            <a:pPr algn="ctr" indent="0" marL="0">
+            <a:pPr marL="0" indent="0" algn="ctr">
               <a:buNone/>
             </a:pPr>
             <a:r>
@@ -3678,7 +3379,7 @@
             <a:endParaRPr lang="en-US" sz="4000" dirty="0"/>
           </a:p>
           <a:p>
-            <a:pPr algn="ctr" indent="0" marL="0">
+            <a:pPr marL="0" indent="0" algn="ctr">
               <a:buNone/>
             </a:pPr>
             <a:r>
@@ -3717,7 +3418,7 @@
           <a:bodyPr wrap="square" lIns="0" tIns="0" rIns="0" bIns="0" rtlCol="0" anchor="ctr"/>
           <a:lstStyle/>
           <a:p>
-            <a:pPr algn="ctr" indent="0" marL="0">
+            <a:pPr marL="0" indent="0" algn="ctr">
               <a:buNone/>
             </a:pPr>
             <a:r>
@@ -3756,7 +3457,7 @@
           <a:bodyPr wrap="square" lIns="0" tIns="0" rIns="0" bIns="0" rtlCol="0" anchor="ctr"/>
           <a:lstStyle/>
           <a:p>
-            <a:pPr algn="ctr" indent="0" marL="0">
+            <a:pPr marL="0" indent="0" algn="ctr">
               <a:buNone/>
             </a:pPr>
             <a:r>
@@ -3797,6 +3498,13 @@
             <a:prstDash val="solid"/>
           </a:ln>
         </p:spPr>
+        <p:txBody>
+          <a:bodyPr/>
+          <a:lstStyle/>
+          <a:p>
+            <a:endParaRPr lang="en-US"/>
+          </a:p>
+        </p:txBody>
       </p:sp>
       <p:sp>
         <p:nvSpPr>
@@ -3819,7 +3527,7 @@
           <a:bodyPr wrap="square" lIns="0" tIns="0" rIns="0" bIns="0" rtlCol="0" anchor="ctr"/>
           <a:lstStyle/>
           <a:p>
-            <a:pPr algn="ctr" indent="0" marL="0">
+            <a:pPr marL="0" indent="0" algn="ctr">
               <a:buNone/>
             </a:pPr>
             <a:r>
@@ -3883,6 +3591,13 @@
             <a:prstDash val="solid"/>
           </a:ln>
         </p:spPr>
+        <p:txBody>
+          <a:bodyPr/>
+          <a:lstStyle/>
+          <a:p>
+            <a:endParaRPr lang="en-US"/>
+          </a:p>
+        </p:txBody>
       </p:sp>
       <p:sp>
         <p:nvSpPr>
@@ -3908,6 +3623,13 @@
             <a:prstDash val="solid"/>
           </a:ln>
         </p:spPr>
+        <p:txBody>
+          <a:bodyPr/>
+          <a:lstStyle/>
+          <a:p>
+            <a:endParaRPr lang="en-US"/>
+          </a:p>
+        </p:txBody>
       </p:sp>
       <p:sp>
         <p:nvSpPr>
@@ -3933,6 +3655,13 @@
             <a:prstDash val="solid"/>
           </a:ln>
         </p:spPr>
+        <p:txBody>
+          <a:bodyPr/>
+          <a:lstStyle/>
+          <a:p>
+            <a:endParaRPr lang="en-US"/>
+          </a:p>
+        </p:txBody>
       </p:sp>
       <p:sp>
         <p:nvSpPr>
@@ -3960,6 +3689,13 @@
             <a:prstDash val="solid"/>
           </a:ln>
         </p:spPr>
+        <p:txBody>
+          <a:bodyPr/>
+          <a:lstStyle/>
+          <a:p>
+            <a:endParaRPr lang="en-US"/>
+          </a:p>
+        </p:txBody>
       </p:sp>
       <p:sp>
         <p:nvSpPr>
@@ -3987,6 +3723,13 @@
             <a:prstDash val="solid"/>
           </a:ln>
         </p:spPr>
+        <p:txBody>
+          <a:bodyPr/>
+          <a:lstStyle/>
+          <a:p>
+            <a:endParaRPr lang="en-US"/>
+          </a:p>
+        </p:txBody>
       </p:sp>
       <p:sp>
         <p:nvSpPr>
@@ -4009,7 +3752,7 @@
           <a:bodyPr wrap="square" lIns="0" tIns="0" rIns="0" bIns="0" rtlCol="0" anchor="ctr"/>
           <a:lstStyle/>
           <a:p>
-            <a:pPr algn="ctr" indent="0" marL="0">
+            <a:pPr marL="0" indent="0" algn="ctr">
               <a:buNone/>
             </a:pPr>
             <a:r>
@@ -4048,7 +3791,7 @@
           <a:bodyPr wrap="square" lIns="0" tIns="0" rIns="0" bIns="0" rtlCol="0" anchor="ctr"/>
           <a:lstStyle/>
           <a:p>
-            <a:pPr algn="ctr" indent="0" marL="0">
+            <a:pPr marL="0" indent="0" algn="ctr">
               <a:buNone/>
             </a:pPr>
             <a:r>
@@ -4085,6 +3828,13 @@
             <a:prstDash val="solid"/>
           </a:ln>
         </p:spPr>
+        <p:txBody>
+          <a:bodyPr/>
+          <a:lstStyle/>
+          <a:p>
+            <a:endParaRPr lang="en-US"/>
+          </a:p>
+        </p:txBody>
       </p:sp>
     </p:spTree>
   </p:cSld>
@@ -4135,6 +3885,13 @@
             <a:prstDash val="solid"/>
           </a:ln>
         </p:spPr>
+        <p:txBody>
+          <a:bodyPr/>
+          <a:lstStyle/>
+          <a:p>
+            <a:endParaRPr lang="en-US"/>
+          </a:p>
+        </p:txBody>
       </p:sp>
       <p:sp>
         <p:nvSpPr>
@@ -4160,6 +3917,13 @@
             <a:prstDash val="solid"/>
           </a:ln>
         </p:spPr>
+        <p:txBody>
+          <a:bodyPr/>
+          <a:lstStyle/>
+          <a:p>
+            <a:endParaRPr lang="en-US"/>
+          </a:p>
+        </p:txBody>
       </p:sp>
       <p:sp>
         <p:nvSpPr>
@@ -4185,6 +3949,13 @@
             <a:prstDash val="solid"/>
           </a:ln>
         </p:spPr>
+        <p:txBody>
+          <a:bodyPr/>
+          <a:lstStyle/>
+          <a:p>
+            <a:endParaRPr lang="en-US"/>
+          </a:p>
+        </p:txBody>
       </p:sp>
       <p:sp>
         <p:nvSpPr>
@@ -4212,6 +3983,13 @@
             <a:prstDash val="solid"/>
           </a:ln>
         </p:spPr>
+        <p:txBody>
+          <a:bodyPr/>
+          <a:lstStyle/>
+          <a:p>
+            <a:endParaRPr lang="en-US"/>
+          </a:p>
+        </p:txBody>
       </p:sp>
       <p:sp>
         <p:nvSpPr>
@@ -4239,6 +4017,13 @@
             <a:prstDash val="solid"/>
           </a:ln>
         </p:spPr>
+        <p:txBody>
+          <a:bodyPr/>
+          <a:lstStyle/>
+          <a:p>
+            <a:endParaRPr lang="en-US"/>
+          </a:p>
+        </p:txBody>
       </p:sp>
       <p:sp>
         <p:nvSpPr>
@@ -4264,6 +4049,13 @@
             <a:prstDash val="solid"/>
           </a:ln>
         </p:spPr>
+        <p:txBody>
+          <a:bodyPr/>
+          <a:lstStyle/>
+          <a:p>
+            <a:endParaRPr lang="en-US"/>
+          </a:p>
+        </p:txBody>
       </p:sp>
       <p:sp>
         <p:nvSpPr>
@@ -4286,7 +4078,7 @@
           <a:bodyPr wrap="square" lIns="0" tIns="0" rIns="0" bIns="0" rtlCol="0" anchor="ctr"/>
           <a:lstStyle/>
           <a:p>
-            <a:pPr algn="ctr" indent="0" marL="0">
+            <a:pPr marL="0" indent="0" algn="ctr">
               <a:buNone/>
             </a:pPr>
             <a:r>
@@ -4322,11 +4114,11 @@
           <a:bodyPr wrap="square" lIns="0" tIns="0" rIns="0" bIns="0" rtlCol="0" anchor="ctr"/>
           <a:lstStyle/>
           <a:p>
-            <a:pPr indent="0" marL="0">
+            <a:pPr marL="0" indent="0">
               <a:buNone/>
             </a:pPr>
             <a:r>
-              <a:rPr lang="en-US" sz="1000" b="1" spc="200" kern="0" dirty="0">
+              <a:rPr lang="en-US" sz="1000" b="1" kern="0" spc="200" dirty="0">
                 <a:solidFill>
                   <a:srgbClr val="F5C26B"/>
                 </a:solidFill>
@@ -4358,7 +4150,7 @@
           <a:bodyPr wrap="square" lIns="0" tIns="0" rIns="0" bIns="0" rtlCol="0" anchor="ctr"/>
           <a:lstStyle/>
           <a:p>
-            <a:pPr indent="0" marL="0">
+            <a:pPr marL="0" indent="0">
               <a:buNone/>
             </a:pPr>
             <a:r>
@@ -4397,7 +4189,7 @@
           <a:bodyPr wrap="square" lIns="0" tIns="0" rIns="0" bIns="0" rtlCol="0" anchor="ctr"/>
           <a:lstStyle/>
           <a:p>
-            <a:pPr indent="0" marL="0">
+            <a:pPr marL="0" indent="0">
               <a:buNone/>
             </a:pPr>
             <a:r>
@@ -4438,6 +4230,13 @@
             <a:prstDash val="solid"/>
           </a:ln>
         </p:spPr>
+        <p:txBody>
+          <a:bodyPr/>
+          <a:lstStyle/>
+          <a:p>
+            <a:endParaRPr lang="en-US"/>
+          </a:p>
+        </p:txBody>
       </p:sp>
       <p:sp>
         <p:nvSpPr>
@@ -4460,7 +4259,7 @@
           <a:bodyPr wrap="square" lIns="0" tIns="0" rIns="0" bIns="0" rtlCol="0" anchor="ctr"/>
           <a:lstStyle/>
           <a:p>
-            <a:pPr indent="0" marL="0">
+            <a:pPr marL="0" indent="0">
               <a:buNone/>
             </a:pPr>
             <a:r>
@@ -4568,6 +4367,13 @@
             <a:prstDash val="solid"/>
           </a:ln>
         </p:spPr>
+        <p:txBody>
+          <a:bodyPr/>
+          <a:lstStyle/>
+          <a:p>
+            <a:endParaRPr lang="en-US"/>
+          </a:p>
+        </p:txBody>
       </p:sp>
       <p:sp>
         <p:nvSpPr>
@@ -4590,11 +4396,11 @@
           <a:bodyPr wrap="square" lIns="0" tIns="0" rIns="0" bIns="0" rtlCol="0" anchor="ctr"/>
           <a:lstStyle/>
           <a:p>
-            <a:pPr indent="0" marL="0">
+            <a:pPr marL="0" indent="0">
               <a:buNone/>
             </a:pPr>
             <a:r>
-              <a:rPr lang="en-US" sz="1000" b="1" spc="200" kern="0" dirty="0">
+              <a:rPr lang="en-US" sz="1000" b="1" kern="0" spc="200" dirty="0">
                 <a:solidFill>
                   <a:srgbClr val="F5C26B"/>
                 </a:solidFill>
@@ -4629,7 +4435,7 @@
             <a:pPr marL="342900" indent="-342900">
               <a:buSzPct val="100000"/>
               <a:buFont typeface="+mj-lt"/>
-              <a:buAutoNum type="arabicPeriod" startAt="1"/>
+              <a:buAutoNum type="arabicPeriod"/>
             </a:pPr>
             <a:r>
               <a:rPr lang="en-US" sz="1000" dirty="0">
@@ -4645,7 +4451,7 @@
             <a:pPr marL="342900" indent="-342900">
               <a:buSzPct val="100000"/>
               <a:buFont typeface="+mj-lt"/>
-              <a:buAutoNum type="arabicPeriod" startAt="1"/>
+              <a:buAutoNum type="arabicPeriod"/>
             </a:pPr>
             <a:r>
               <a:rPr lang="en-US" sz="1000" dirty="0">
@@ -4661,7 +4467,7 @@
             <a:pPr marL="342900" indent="-342900">
               <a:buSzPct val="100000"/>
               <a:buFont typeface="+mj-lt"/>
-              <a:buAutoNum type="arabicPeriod" startAt="1"/>
+              <a:buAutoNum type="arabicPeriod"/>
             </a:pPr>
             <a:r>
               <a:rPr lang="en-US" sz="1000" dirty="0">
@@ -4724,6 +4530,13 @@
             <a:prstDash val="solid"/>
           </a:ln>
         </p:spPr>
+        <p:txBody>
+          <a:bodyPr/>
+          <a:lstStyle/>
+          <a:p>
+            <a:endParaRPr lang="en-US"/>
+          </a:p>
+        </p:txBody>
       </p:sp>
       <p:sp>
         <p:nvSpPr>
@@ -4749,6 +4562,13 @@
             <a:prstDash val="solid"/>
           </a:ln>
         </p:spPr>
+        <p:txBody>
+          <a:bodyPr/>
+          <a:lstStyle/>
+          <a:p>
+            <a:endParaRPr lang="en-US"/>
+          </a:p>
+        </p:txBody>
       </p:sp>
       <p:sp>
         <p:nvSpPr>
@@ -4774,6 +4594,13 @@
             <a:prstDash val="solid"/>
           </a:ln>
         </p:spPr>
+        <p:txBody>
+          <a:bodyPr/>
+          <a:lstStyle/>
+          <a:p>
+            <a:endParaRPr lang="en-US"/>
+          </a:p>
+        </p:txBody>
       </p:sp>
       <p:sp>
         <p:nvSpPr>
@@ -4801,6 +4628,13 @@
             <a:prstDash val="solid"/>
           </a:ln>
         </p:spPr>
+        <p:txBody>
+          <a:bodyPr/>
+          <a:lstStyle/>
+          <a:p>
+            <a:endParaRPr lang="en-US"/>
+          </a:p>
+        </p:txBody>
       </p:sp>
       <p:sp>
         <p:nvSpPr>
@@ -4828,6 +4662,13 @@
             <a:prstDash val="solid"/>
           </a:ln>
         </p:spPr>
+        <p:txBody>
+          <a:bodyPr/>
+          <a:lstStyle/>
+          <a:p>
+            <a:endParaRPr lang="en-US"/>
+          </a:p>
+        </p:txBody>
       </p:sp>
       <p:sp>
         <p:nvSpPr>
@@ -4853,6 +4694,13 @@
             <a:prstDash val="solid"/>
           </a:ln>
         </p:spPr>
+        <p:txBody>
+          <a:bodyPr/>
+          <a:lstStyle/>
+          <a:p>
+            <a:endParaRPr lang="en-US"/>
+          </a:p>
+        </p:txBody>
       </p:sp>
       <p:sp>
         <p:nvSpPr>
@@ -4875,7 +4723,7 @@
           <a:bodyPr wrap="square" lIns="0" tIns="0" rIns="0" bIns="0" rtlCol="0" anchor="ctr"/>
           <a:lstStyle/>
           <a:p>
-            <a:pPr algn="ctr" indent="0" marL="0">
+            <a:pPr marL="0" indent="0" algn="ctr">
               <a:buNone/>
             </a:pPr>
             <a:r>
@@ -4911,11 +4759,11 @@
           <a:bodyPr wrap="square" lIns="0" tIns="0" rIns="0" bIns="0" rtlCol="0" anchor="ctr"/>
           <a:lstStyle/>
           <a:p>
-            <a:pPr indent="0" marL="0">
+            <a:pPr marL="0" indent="0">
               <a:buNone/>
             </a:pPr>
             <a:r>
-              <a:rPr lang="en-US" sz="1000" b="1" spc="200" kern="0" dirty="0">
+              <a:rPr lang="en-US" sz="1000" b="1" kern="0" spc="200" dirty="0">
                 <a:solidFill>
                   <a:srgbClr val="F5C26B"/>
                 </a:solidFill>
@@ -4947,7 +4795,7 @@
           <a:bodyPr wrap="square" lIns="0" tIns="0" rIns="0" bIns="0" rtlCol="0" anchor="ctr"/>
           <a:lstStyle/>
           <a:p>
-            <a:pPr indent="0" marL="0">
+            <a:pPr marL="0" indent="0">
               <a:buNone/>
             </a:pPr>
             <a:r>
@@ -4986,7 +4834,7 @@
           <a:bodyPr wrap="square" lIns="0" tIns="0" rIns="0" bIns="0" rtlCol="0" anchor="ctr"/>
           <a:lstStyle/>
           <a:p>
-            <a:pPr indent="0" marL="0">
+            <a:pPr marL="0" indent="0">
               <a:buNone/>
             </a:pPr>
             <a:r>
@@ -5027,6 +4875,13 @@
             <a:prstDash val="solid"/>
           </a:ln>
         </p:spPr>
+        <p:txBody>
+          <a:bodyPr/>
+          <a:lstStyle/>
+          <a:p>
+            <a:endParaRPr lang="en-US"/>
+          </a:p>
+        </p:txBody>
       </p:sp>
       <p:sp>
         <p:nvSpPr>
@@ -5049,7 +4904,7 @@
           <a:bodyPr wrap="square" lIns="0" tIns="0" rIns="0" bIns="0" rtlCol="0" anchor="ctr"/>
           <a:lstStyle/>
           <a:p>
-            <a:pPr indent="0" marL="0">
+            <a:pPr marL="0" indent="0">
               <a:buNone/>
             </a:pPr>
             <a:r>
@@ -5157,6 +5012,13 @@
             <a:prstDash val="solid"/>
           </a:ln>
         </p:spPr>
+        <p:txBody>
+          <a:bodyPr/>
+          <a:lstStyle/>
+          <a:p>
+            <a:endParaRPr lang="en-US"/>
+          </a:p>
+        </p:txBody>
       </p:sp>
       <p:sp>
         <p:nvSpPr>
@@ -5179,11 +5041,11 @@
           <a:bodyPr wrap="square" lIns="0" tIns="0" rIns="0" bIns="0" rtlCol="0" anchor="ctr"/>
           <a:lstStyle/>
           <a:p>
-            <a:pPr indent="0" marL="0">
+            <a:pPr marL="0" indent="0">
               <a:buNone/>
             </a:pPr>
             <a:r>
-              <a:rPr lang="en-US" sz="1000" b="1" spc="200" kern="0" dirty="0">
+              <a:rPr lang="en-US" sz="1000" b="1" kern="0" spc="200" dirty="0">
                 <a:solidFill>
                   <a:srgbClr val="F5C26B"/>
                 </a:solidFill>
@@ -5218,7 +5080,7 @@
             <a:pPr marL="342900" indent="-342900">
               <a:buSzPct val="100000"/>
               <a:buFont typeface="+mj-lt"/>
-              <a:buAutoNum type="arabicPeriod" startAt="1"/>
+              <a:buAutoNum type="arabicPeriod"/>
             </a:pPr>
             <a:r>
               <a:rPr lang="en-US" sz="1000" dirty="0">
@@ -5234,7 +5096,7 @@
             <a:pPr marL="342900" indent="-342900">
               <a:buSzPct val="100000"/>
               <a:buFont typeface="+mj-lt"/>
-              <a:buAutoNum type="arabicPeriod" startAt="1"/>
+              <a:buAutoNum type="arabicPeriod"/>
             </a:pPr>
             <a:r>
               <a:rPr lang="en-US" sz="1000" dirty="0">
@@ -5250,7 +5112,7 @@
             <a:pPr marL="342900" indent="-342900">
               <a:buSzPct val="100000"/>
               <a:buFont typeface="+mj-lt"/>
-              <a:buAutoNum type="arabicPeriod" startAt="1"/>
+              <a:buAutoNum type="arabicPeriod"/>
             </a:pPr>
             <a:r>
               <a:rPr lang="en-US" sz="1000" dirty="0">
@@ -5313,6 +5175,13 @@
             <a:prstDash val="solid"/>
           </a:ln>
         </p:spPr>
+        <p:txBody>
+          <a:bodyPr/>
+          <a:lstStyle/>
+          <a:p>
+            <a:endParaRPr lang="en-US"/>
+          </a:p>
+        </p:txBody>
       </p:sp>
       <p:sp>
         <p:nvSpPr>
@@ -5338,6 +5207,13 @@
             <a:prstDash val="solid"/>
           </a:ln>
         </p:spPr>
+        <p:txBody>
+          <a:bodyPr/>
+          <a:lstStyle/>
+          <a:p>
+            <a:endParaRPr lang="en-US"/>
+          </a:p>
+        </p:txBody>
       </p:sp>
       <p:sp>
         <p:nvSpPr>
@@ -5363,6 +5239,13 @@
             <a:prstDash val="solid"/>
           </a:ln>
         </p:spPr>
+        <p:txBody>
+          <a:bodyPr/>
+          <a:lstStyle/>
+          <a:p>
+            <a:endParaRPr lang="en-US"/>
+          </a:p>
+        </p:txBody>
       </p:sp>
       <p:sp>
         <p:nvSpPr>
@@ -5390,6 +5273,13 @@
             <a:prstDash val="solid"/>
           </a:ln>
         </p:spPr>
+        <p:txBody>
+          <a:bodyPr/>
+          <a:lstStyle/>
+          <a:p>
+            <a:endParaRPr lang="en-US"/>
+          </a:p>
+        </p:txBody>
       </p:sp>
       <p:sp>
         <p:nvSpPr>
@@ -5417,6 +5307,13 @@
             <a:prstDash val="solid"/>
           </a:ln>
         </p:spPr>
+        <p:txBody>
+          <a:bodyPr/>
+          <a:lstStyle/>
+          <a:p>
+            <a:endParaRPr lang="en-US"/>
+          </a:p>
+        </p:txBody>
       </p:sp>
       <p:sp>
         <p:nvSpPr>
@@ -5442,6 +5339,13 @@
             <a:prstDash val="solid"/>
           </a:ln>
         </p:spPr>
+        <p:txBody>
+          <a:bodyPr/>
+          <a:lstStyle/>
+          <a:p>
+            <a:endParaRPr lang="en-US"/>
+          </a:p>
+        </p:txBody>
       </p:sp>
       <p:sp>
         <p:nvSpPr>
@@ -5464,7 +5368,7 @@
           <a:bodyPr wrap="square" lIns="0" tIns="0" rIns="0" bIns="0" rtlCol="0" anchor="ctr"/>
           <a:lstStyle/>
           <a:p>
-            <a:pPr algn="ctr" indent="0" marL="0">
+            <a:pPr marL="0" indent="0" algn="ctr">
               <a:buNone/>
             </a:pPr>
             <a:r>
@@ -5500,11 +5404,11 @@
           <a:bodyPr wrap="square" lIns="0" tIns="0" rIns="0" bIns="0" rtlCol="0" anchor="ctr"/>
           <a:lstStyle/>
           <a:p>
-            <a:pPr indent="0" marL="0">
+            <a:pPr marL="0" indent="0">
               <a:buNone/>
             </a:pPr>
             <a:r>
-              <a:rPr lang="en-US" sz="1000" b="1" spc="200" kern="0" dirty="0">
+              <a:rPr lang="en-US" sz="1000" b="1" kern="0" spc="200" dirty="0">
                 <a:solidFill>
                   <a:srgbClr val="F5C26B"/>
                 </a:solidFill>
@@ -5536,7 +5440,7 @@
           <a:bodyPr wrap="square" lIns="0" tIns="0" rIns="0" bIns="0" rtlCol="0" anchor="ctr"/>
           <a:lstStyle/>
           <a:p>
-            <a:pPr indent="0" marL="0">
+            <a:pPr marL="0" indent="0">
               <a:buNone/>
             </a:pPr>
             <a:r>
@@ -5575,7 +5479,7 @@
           <a:bodyPr wrap="square" lIns="0" tIns="0" rIns="0" bIns="0" rtlCol="0" anchor="ctr"/>
           <a:lstStyle/>
           <a:p>
-            <a:pPr indent="0" marL="0">
+            <a:pPr marL="0" indent="0">
               <a:buNone/>
             </a:pPr>
             <a:r>
@@ -5616,6 +5520,13 @@
             <a:prstDash val="solid"/>
           </a:ln>
         </p:spPr>
+        <p:txBody>
+          <a:bodyPr/>
+          <a:lstStyle/>
+          <a:p>
+            <a:endParaRPr lang="en-US"/>
+          </a:p>
+        </p:txBody>
       </p:sp>
       <p:sp>
         <p:nvSpPr>
@@ -5638,7 +5549,7 @@
           <a:bodyPr wrap="square" lIns="0" tIns="0" rIns="0" bIns="0" rtlCol="0" anchor="ctr"/>
           <a:lstStyle/>
           <a:p>
-            <a:pPr indent="0" marL="0">
+            <a:pPr marL="0" indent="0">
               <a:buNone/>
             </a:pPr>
             <a:r>
@@ -5746,6 +5657,13 @@
             <a:prstDash val="solid"/>
           </a:ln>
         </p:spPr>
+        <p:txBody>
+          <a:bodyPr/>
+          <a:lstStyle/>
+          <a:p>
+            <a:endParaRPr lang="en-US"/>
+          </a:p>
+        </p:txBody>
       </p:sp>
       <p:sp>
         <p:nvSpPr>
@@ -5768,11 +5686,11 @@
           <a:bodyPr wrap="square" lIns="0" tIns="0" rIns="0" bIns="0" rtlCol="0" anchor="ctr"/>
           <a:lstStyle/>
           <a:p>
-            <a:pPr indent="0" marL="0">
+            <a:pPr marL="0" indent="0">
               <a:buNone/>
             </a:pPr>
             <a:r>
-              <a:rPr lang="en-US" sz="1000" b="1" spc="200" kern="0" dirty="0">
+              <a:rPr lang="en-US" sz="1000" b="1" kern="0" spc="200" dirty="0">
                 <a:solidFill>
                   <a:srgbClr val="F5C26B"/>
                 </a:solidFill>
@@ -5807,7 +5725,7 @@
             <a:pPr marL="342900" indent="-342900">
               <a:buSzPct val="100000"/>
               <a:buFont typeface="+mj-lt"/>
-              <a:buAutoNum type="arabicPeriod" startAt="1"/>
+              <a:buAutoNum type="arabicPeriod"/>
             </a:pPr>
             <a:r>
               <a:rPr lang="en-US" sz="1000" dirty="0">
@@ -5823,7 +5741,7 @@
             <a:pPr marL="342900" indent="-342900">
               <a:buSzPct val="100000"/>
               <a:buFont typeface="+mj-lt"/>
-              <a:buAutoNum type="arabicPeriod" startAt="1"/>
+              <a:buAutoNum type="arabicPeriod"/>
             </a:pPr>
             <a:r>
               <a:rPr lang="en-US" sz="1000" dirty="0">
@@ -5839,7 +5757,7 @@
             <a:pPr marL="342900" indent="-342900">
               <a:buSzPct val="100000"/>
               <a:buFont typeface="+mj-lt"/>
-              <a:buAutoNum type="arabicPeriod" startAt="1"/>
+              <a:buAutoNum type="arabicPeriod"/>
             </a:pPr>
             <a:r>
               <a:rPr lang="en-US" sz="1000" dirty="0">
@@ -5902,6 +5820,13 @@
             <a:prstDash val="solid"/>
           </a:ln>
         </p:spPr>
+        <p:txBody>
+          <a:bodyPr/>
+          <a:lstStyle/>
+          <a:p>
+            <a:endParaRPr lang="en-US"/>
+          </a:p>
+        </p:txBody>
       </p:sp>
       <p:sp>
         <p:nvSpPr>
@@ -5927,6 +5852,13 @@
             <a:prstDash val="solid"/>
           </a:ln>
         </p:spPr>
+        <p:txBody>
+          <a:bodyPr/>
+          <a:lstStyle/>
+          <a:p>
+            <a:endParaRPr lang="en-US"/>
+          </a:p>
+        </p:txBody>
       </p:sp>
       <p:sp>
         <p:nvSpPr>
@@ -5952,6 +5884,13 @@
             <a:prstDash val="solid"/>
           </a:ln>
         </p:spPr>
+        <p:txBody>
+          <a:bodyPr/>
+          <a:lstStyle/>
+          <a:p>
+            <a:endParaRPr lang="en-US"/>
+          </a:p>
+        </p:txBody>
       </p:sp>
       <p:sp>
         <p:nvSpPr>
@@ -5979,6 +5918,13 @@
             <a:prstDash val="solid"/>
           </a:ln>
         </p:spPr>
+        <p:txBody>
+          <a:bodyPr/>
+          <a:lstStyle/>
+          <a:p>
+            <a:endParaRPr lang="en-US"/>
+          </a:p>
+        </p:txBody>
       </p:sp>
       <p:sp>
         <p:nvSpPr>
@@ -6006,6 +5952,13 @@
             <a:prstDash val="solid"/>
           </a:ln>
         </p:spPr>
+        <p:txBody>
+          <a:bodyPr/>
+          <a:lstStyle/>
+          <a:p>
+            <a:endParaRPr lang="en-US"/>
+          </a:p>
+        </p:txBody>
       </p:sp>
       <p:sp>
         <p:nvSpPr>
@@ -6031,6 +5984,13 @@
             <a:prstDash val="solid"/>
           </a:ln>
         </p:spPr>
+        <p:txBody>
+          <a:bodyPr/>
+          <a:lstStyle/>
+          <a:p>
+            <a:endParaRPr lang="en-US"/>
+          </a:p>
+        </p:txBody>
       </p:sp>
       <p:sp>
         <p:nvSpPr>
@@ -6053,7 +6013,7 @@
           <a:bodyPr wrap="square" lIns="0" tIns="0" rIns="0" bIns="0" rtlCol="0" anchor="ctr"/>
           <a:lstStyle/>
           <a:p>
-            <a:pPr algn="ctr" indent="0" marL="0">
+            <a:pPr marL="0" indent="0" algn="ctr">
               <a:buNone/>
             </a:pPr>
             <a:r>
@@ -6089,11 +6049,11 @@
           <a:bodyPr wrap="square" lIns="0" tIns="0" rIns="0" bIns="0" rtlCol="0" anchor="ctr"/>
           <a:lstStyle/>
           <a:p>
-            <a:pPr indent="0" marL="0">
+            <a:pPr marL="0" indent="0">
               <a:buNone/>
             </a:pPr>
             <a:r>
-              <a:rPr lang="en-US" sz="1000" b="1" spc="200" kern="0" dirty="0">
+              <a:rPr lang="en-US" sz="1000" b="1" kern="0" spc="200" dirty="0">
                 <a:solidFill>
                   <a:srgbClr val="F5C26B"/>
                 </a:solidFill>
@@ -6125,7 +6085,7 @@
           <a:bodyPr wrap="square" lIns="0" tIns="0" rIns="0" bIns="0" rtlCol="0" anchor="ctr"/>
           <a:lstStyle/>
           <a:p>
-            <a:pPr indent="0" marL="0">
+            <a:pPr marL="0" indent="0">
               <a:buNone/>
             </a:pPr>
             <a:r>
@@ -6164,7 +6124,7 @@
           <a:bodyPr wrap="square" lIns="0" tIns="0" rIns="0" bIns="0" rtlCol="0" anchor="ctr"/>
           <a:lstStyle/>
           <a:p>
-            <a:pPr indent="0" marL="0">
+            <a:pPr marL="0" indent="0">
               <a:buNone/>
             </a:pPr>
             <a:r>
@@ -6205,6 +6165,13 @@
             <a:prstDash val="solid"/>
           </a:ln>
         </p:spPr>
+        <p:txBody>
+          <a:bodyPr/>
+          <a:lstStyle/>
+          <a:p>
+            <a:endParaRPr lang="en-US"/>
+          </a:p>
+        </p:txBody>
       </p:sp>
       <p:sp>
         <p:nvSpPr>
@@ -6227,7 +6194,7 @@
           <a:bodyPr wrap="square" lIns="0" tIns="0" rIns="0" bIns="0" rtlCol="0" anchor="ctr"/>
           <a:lstStyle/>
           <a:p>
-            <a:pPr indent="0" marL="0">
+            <a:pPr marL="0" indent="0">
               <a:buNone/>
             </a:pPr>
             <a:r>
@@ -6335,6 +6302,13 @@
             <a:prstDash val="solid"/>
           </a:ln>
         </p:spPr>
+        <p:txBody>
+          <a:bodyPr/>
+          <a:lstStyle/>
+          <a:p>
+            <a:endParaRPr lang="en-US"/>
+          </a:p>
+        </p:txBody>
       </p:sp>
       <p:sp>
         <p:nvSpPr>
@@ -6357,11 +6331,11 @@
           <a:bodyPr wrap="square" lIns="0" tIns="0" rIns="0" bIns="0" rtlCol="0" anchor="ctr"/>
           <a:lstStyle/>
           <a:p>
-            <a:pPr indent="0" marL="0">
+            <a:pPr marL="0" indent="0">
               <a:buNone/>
             </a:pPr>
             <a:r>
-              <a:rPr lang="en-US" sz="1000" b="1" spc="200" kern="0" dirty="0">
+              <a:rPr lang="en-US" sz="1000" b="1" kern="0" spc="200" dirty="0">
                 <a:solidFill>
                   <a:srgbClr val="F5C26B"/>
                 </a:solidFill>
@@ -6396,7 +6370,7 @@
             <a:pPr marL="342900" indent="-342900">
               <a:buSzPct val="100000"/>
               <a:buFont typeface="+mj-lt"/>
-              <a:buAutoNum type="arabicPeriod" startAt="1"/>
+              <a:buAutoNum type="arabicPeriod"/>
             </a:pPr>
             <a:r>
               <a:rPr lang="en-US" sz="1000" dirty="0">
@@ -6412,7 +6386,7 @@
             <a:pPr marL="342900" indent="-342900">
               <a:buSzPct val="100000"/>
               <a:buFont typeface="+mj-lt"/>
-              <a:buAutoNum type="arabicPeriod" startAt="1"/>
+              <a:buAutoNum type="arabicPeriod"/>
             </a:pPr>
             <a:r>
               <a:rPr lang="en-US" sz="1000" dirty="0">
@@ -6428,7 +6402,7 @@
             <a:pPr marL="342900" indent="-342900">
               <a:buSzPct val="100000"/>
               <a:buFont typeface="+mj-lt"/>
-              <a:buAutoNum type="arabicPeriod" startAt="1"/>
+              <a:buAutoNum type="arabicPeriod"/>
             </a:pPr>
             <a:r>
               <a:rPr lang="en-US" sz="1000" dirty="0">
@@ -6491,6 +6465,13 @@
             <a:prstDash val="solid"/>
           </a:ln>
         </p:spPr>
+        <p:txBody>
+          <a:bodyPr/>
+          <a:lstStyle/>
+          <a:p>
+            <a:endParaRPr lang="en-US"/>
+          </a:p>
+        </p:txBody>
       </p:sp>
       <p:sp>
         <p:nvSpPr>
@@ -6516,6 +6497,13 @@
             <a:prstDash val="solid"/>
           </a:ln>
         </p:spPr>
+        <p:txBody>
+          <a:bodyPr/>
+          <a:lstStyle/>
+          <a:p>
+            <a:endParaRPr lang="en-US"/>
+          </a:p>
+        </p:txBody>
       </p:sp>
       <p:sp>
         <p:nvSpPr>
@@ -6541,6 +6529,13 @@
             <a:prstDash val="solid"/>
           </a:ln>
         </p:spPr>
+        <p:txBody>
+          <a:bodyPr/>
+          <a:lstStyle/>
+          <a:p>
+            <a:endParaRPr lang="en-US"/>
+          </a:p>
+        </p:txBody>
       </p:sp>
       <p:sp>
         <p:nvSpPr>
@@ -6568,6 +6563,13 @@
             <a:prstDash val="solid"/>
           </a:ln>
         </p:spPr>
+        <p:txBody>
+          <a:bodyPr/>
+          <a:lstStyle/>
+          <a:p>
+            <a:endParaRPr lang="en-US"/>
+          </a:p>
+        </p:txBody>
       </p:sp>
       <p:sp>
         <p:nvSpPr>
@@ -6595,6 +6597,13 @@
             <a:prstDash val="solid"/>
           </a:ln>
         </p:spPr>
+        <p:txBody>
+          <a:bodyPr/>
+          <a:lstStyle/>
+          <a:p>
+            <a:endParaRPr lang="en-US"/>
+          </a:p>
+        </p:txBody>
       </p:sp>
       <p:sp>
         <p:nvSpPr>
@@ -6620,6 +6629,13 @@
             <a:prstDash val="solid"/>
           </a:ln>
         </p:spPr>
+        <p:txBody>
+          <a:bodyPr/>
+          <a:lstStyle/>
+          <a:p>
+            <a:endParaRPr lang="en-US"/>
+          </a:p>
+        </p:txBody>
       </p:sp>
       <p:sp>
         <p:nvSpPr>
@@ -6642,7 +6658,7 @@
           <a:bodyPr wrap="square" lIns="0" tIns="0" rIns="0" bIns="0" rtlCol="0" anchor="ctr"/>
           <a:lstStyle/>
           <a:p>
-            <a:pPr algn="ctr" indent="0" marL="0">
+            <a:pPr marL="0" indent="0" algn="ctr">
               <a:buNone/>
             </a:pPr>
             <a:r>
@@ -6678,11 +6694,11 @@
           <a:bodyPr wrap="square" lIns="0" tIns="0" rIns="0" bIns="0" rtlCol="0" anchor="ctr"/>
           <a:lstStyle/>
           <a:p>
-            <a:pPr indent="0" marL="0">
+            <a:pPr marL="0" indent="0">
               <a:buNone/>
             </a:pPr>
             <a:r>
-              <a:rPr lang="en-US" sz="1000" b="1" spc="200" kern="0" dirty="0">
+              <a:rPr lang="en-US" sz="1000" b="1" kern="0" spc="200" dirty="0">
                 <a:solidFill>
                   <a:srgbClr val="F5C26B"/>
                 </a:solidFill>
@@ -6714,7 +6730,7 @@
           <a:bodyPr wrap="square" lIns="0" tIns="0" rIns="0" bIns="0" rtlCol="0" anchor="ctr"/>
           <a:lstStyle/>
           <a:p>
-            <a:pPr indent="0" marL="0">
+            <a:pPr marL="0" indent="0">
               <a:buNone/>
             </a:pPr>
             <a:r>
@@ -6753,7 +6769,7 @@
           <a:bodyPr wrap="square" lIns="0" tIns="0" rIns="0" bIns="0" rtlCol="0" anchor="ctr"/>
           <a:lstStyle/>
           <a:p>
-            <a:pPr indent="0" marL="0">
+            <a:pPr marL="0" indent="0">
               <a:buNone/>
             </a:pPr>
             <a:r>
@@ -6794,6 +6810,13 @@
             <a:prstDash val="solid"/>
           </a:ln>
         </p:spPr>
+        <p:txBody>
+          <a:bodyPr/>
+          <a:lstStyle/>
+          <a:p>
+            <a:endParaRPr lang="en-US"/>
+          </a:p>
+        </p:txBody>
       </p:sp>
       <p:sp>
         <p:nvSpPr>
@@ -6816,7 +6839,7 @@
           <a:bodyPr wrap="square" lIns="0" tIns="0" rIns="0" bIns="0" rtlCol="0" anchor="ctr"/>
           <a:lstStyle/>
           <a:p>
-            <a:pPr indent="0" marL="0">
+            <a:pPr marL="0" indent="0">
               <a:buNone/>
             </a:pPr>
             <a:r>
@@ -6924,6 +6947,13 @@
             <a:prstDash val="solid"/>
           </a:ln>
         </p:spPr>
+        <p:txBody>
+          <a:bodyPr/>
+          <a:lstStyle/>
+          <a:p>
+            <a:endParaRPr lang="en-US"/>
+          </a:p>
+        </p:txBody>
       </p:sp>
       <p:sp>
         <p:nvSpPr>
@@ -6946,11 +6976,11 @@
           <a:bodyPr wrap="square" lIns="0" tIns="0" rIns="0" bIns="0" rtlCol="0" anchor="ctr"/>
           <a:lstStyle/>
           <a:p>
-            <a:pPr indent="0" marL="0">
+            <a:pPr marL="0" indent="0">
               <a:buNone/>
             </a:pPr>
             <a:r>
-              <a:rPr lang="en-US" sz="1000" b="1" spc="200" kern="0" dirty="0">
+              <a:rPr lang="en-US" sz="1000" b="1" kern="0" spc="200" dirty="0">
                 <a:solidFill>
                   <a:srgbClr val="F5C26B"/>
                 </a:solidFill>
@@ -6985,7 +7015,7 @@
             <a:pPr marL="342900" indent="-342900">
               <a:buSzPct val="100000"/>
               <a:buFont typeface="+mj-lt"/>
-              <a:buAutoNum type="arabicPeriod" startAt="1"/>
+              <a:buAutoNum type="arabicPeriod"/>
             </a:pPr>
             <a:r>
               <a:rPr lang="en-US" sz="1000" dirty="0">
@@ -7001,7 +7031,7 @@
             <a:pPr marL="342900" indent="-342900">
               <a:buSzPct val="100000"/>
               <a:buFont typeface="+mj-lt"/>
-              <a:buAutoNum type="arabicPeriod" startAt="1"/>
+              <a:buAutoNum type="arabicPeriod"/>
             </a:pPr>
             <a:r>
               <a:rPr lang="en-US" sz="1000" dirty="0">
@@ -7017,7 +7047,7 @@
             <a:pPr marL="342900" indent="-342900">
               <a:buSzPct val="100000"/>
               <a:buFont typeface="+mj-lt"/>
-              <a:buAutoNum type="arabicPeriod" startAt="1"/>
+              <a:buAutoNum type="arabicPeriod"/>
             </a:pPr>
             <a:r>
               <a:rPr lang="en-US" sz="1000" dirty="0">
@@ -7080,6 +7110,13 @@
             <a:prstDash val="solid"/>
           </a:ln>
         </p:spPr>
+        <p:txBody>
+          <a:bodyPr/>
+          <a:lstStyle/>
+          <a:p>
+            <a:endParaRPr lang="en-US"/>
+          </a:p>
+        </p:txBody>
       </p:sp>
       <p:sp>
         <p:nvSpPr>
@@ -7105,6 +7142,13 @@
             <a:prstDash val="solid"/>
           </a:ln>
         </p:spPr>
+        <p:txBody>
+          <a:bodyPr/>
+          <a:lstStyle/>
+          <a:p>
+            <a:endParaRPr lang="en-US"/>
+          </a:p>
+        </p:txBody>
       </p:sp>
       <p:sp>
         <p:nvSpPr>
@@ -7130,6 +7174,13 @@
             <a:prstDash val="solid"/>
           </a:ln>
         </p:spPr>
+        <p:txBody>
+          <a:bodyPr/>
+          <a:lstStyle/>
+          <a:p>
+            <a:endParaRPr lang="en-US"/>
+          </a:p>
+        </p:txBody>
       </p:sp>
       <p:sp>
         <p:nvSpPr>
@@ -7157,6 +7208,13 @@
             <a:prstDash val="solid"/>
           </a:ln>
         </p:spPr>
+        <p:txBody>
+          <a:bodyPr/>
+          <a:lstStyle/>
+          <a:p>
+            <a:endParaRPr lang="en-US"/>
+          </a:p>
+        </p:txBody>
       </p:sp>
       <p:sp>
         <p:nvSpPr>
@@ -7184,6 +7242,13 @@
             <a:prstDash val="solid"/>
           </a:ln>
         </p:spPr>
+        <p:txBody>
+          <a:bodyPr/>
+          <a:lstStyle/>
+          <a:p>
+            <a:endParaRPr lang="en-US"/>
+          </a:p>
+        </p:txBody>
       </p:sp>
       <p:sp>
         <p:nvSpPr>
@@ -7206,7 +7271,7 @@
           <a:bodyPr wrap="square" lIns="0" tIns="0" rIns="0" bIns="0" rtlCol="0" anchor="ctr"/>
           <a:lstStyle/>
           <a:p>
-            <a:pPr algn="ctr" indent="0" marL="0">
+            <a:pPr marL="0" indent="0" algn="ctr">
               <a:buNone/>
             </a:pPr>
             <a:r>
@@ -7245,7 +7310,7 @@
           <a:bodyPr wrap="square" lIns="0" tIns="0" rIns="0" bIns="0" rtlCol="0" anchor="ctr"/>
           <a:lstStyle/>
           <a:p>
-            <a:pPr algn="ctr" indent="0" marL="0">
+            <a:pPr marL="0" indent="0" algn="ctr">
               <a:buNone/>
             </a:pPr>
             <a:r>
@@ -7282,6 +7347,13 @@
             <a:prstDash val="solid"/>
           </a:ln>
         </p:spPr>
+        <p:txBody>
+          <a:bodyPr/>
+          <a:lstStyle/>
+          <a:p>
+            <a:endParaRPr lang="en-US"/>
+          </a:p>
+        </p:txBody>
       </p:sp>
     </p:spTree>
   </p:cSld>
@@ -7332,6 +7404,13 @@
             <a:prstDash val="solid"/>
           </a:ln>
         </p:spPr>
+        <p:txBody>
+          <a:bodyPr/>
+          <a:lstStyle/>
+          <a:p>
+            <a:endParaRPr lang="en-US"/>
+          </a:p>
+        </p:txBody>
       </p:sp>
       <p:sp>
         <p:nvSpPr>
@@ -7357,6 +7436,13 @@
             <a:prstDash val="solid"/>
           </a:ln>
         </p:spPr>
+        <p:txBody>
+          <a:bodyPr/>
+          <a:lstStyle/>
+          <a:p>
+            <a:endParaRPr lang="en-US"/>
+          </a:p>
+        </p:txBody>
       </p:sp>
       <p:sp>
         <p:nvSpPr>
@@ -7382,6 +7468,13 @@
             <a:prstDash val="solid"/>
           </a:ln>
         </p:spPr>
+        <p:txBody>
+          <a:bodyPr/>
+          <a:lstStyle/>
+          <a:p>
+            <a:endParaRPr lang="en-US"/>
+          </a:p>
+        </p:txBody>
       </p:sp>
       <p:sp>
         <p:nvSpPr>
@@ -7409,6 +7502,13 @@
             <a:prstDash val="solid"/>
           </a:ln>
         </p:spPr>
+        <p:txBody>
+          <a:bodyPr/>
+          <a:lstStyle/>
+          <a:p>
+            <a:endParaRPr lang="en-US"/>
+          </a:p>
+        </p:txBody>
       </p:sp>
       <p:sp>
         <p:nvSpPr>
@@ -7436,6 +7536,13 @@
             <a:prstDash val="solid"/>
           </a:ln>
         </p:spPr>
+        <p:txBody>
+          <a:bodyPr/>
+          <a:lstStyle/>
+          <a:p>
+            <a:endParaRPr lang="en-US"/>
+          </a:p>
+        </p:txBody>
       </p:sp>
       <p:sp>
         <p:nvSpPr>
@@ -7461,6 +7568,13 @@
             <a:prstDash val="solid"/>
           </a:ln>
         </p:spPr>
+        <p:txBody>
+          <a:bodyPr/>
+          <a:lstStyle/>
+          <a:p>
+            <a:endParaRPr lang="en-US"/>
+          </a:p>
+        </p:txBody>
       </p:sp>
       <p:sp>
         <p:nvSpPr>
@@ -7483,7 +7597,7 @@
           <a:bodyPr wrap="square" lIns="0" tIns="0" rIns="0" bIns="0" rtlCol="0" anchor="ctr"/>
           <a:lstStyle/>
           <a:p>
-            <a:pPr algn="ctr" indent="0" marL="0">
+            <a:pPr marL="0" indent="0" algn="ctr">
               <a:buNone/>
             </a:pPr>
             <a:r>
@@ -7519,11 +7633,11 @@
           <a:bodyPr wrap="square" lIns="0" tIns="0" rIns="0" bIns="0" rtlCol="0" anchor="ctr"/>
           <a:lstStyle/>
           <a:p>
-            <a:pPr indent="0" marL="0">
+            <a:pPr marL="0" indent="0">
               <a:buNone/>
             </a:pPr>
             <a:r>
-              <a:rPr lang="en-US" sz="1000" b="1" spc="200" kern="0" dirty="0">
+              <a:rPr lang="en-US" sz="1000" b="1" kern="0" spc="200" dirty="0">
                 <a:solidFill>
                   <a:srgbClr val="F5C26B"/>
                 </a:solidFill>
@@ -7555,7 +7669,7 @@
           <a:bodyPr wrap="square" lIns="0" tIns="0" rIns="0" bIns="0" rtlCol="0" anchor="ctr"/>
           <a:lstStyle/>
           <a:p>
-            <a:pPr indent="0" marL="0">
+            <a:pPr marL="0" indent="0">
               <a:buNone/>
             </a:pPr>
             <a:r>
@@ -7594,7 +7708,7 @@
           <a:bodyPr wrap="square" lIns="0" tIns="0" rIns="0" bIns="0" rtlCol="0" anchor="ctr"/>
           <a:lstStyle/>
           <a:p>
-            <a:pPr indent="0" marL="0">
+            <a:pPr marL="0" indent="0">
               <a:buNone/>
             </a:pPr>
             <a:r>
@@ -7635,6 +7749,13 @@
             <a:prstDash val="solid"/>
           </a:ln>
         </p:spPr>
+        <p:txBody>
+          <a:bodyPr/>
+          <a:lstStyle/>
+          <a:p>
+            <a:endParaRPr lang="en-US"/>
+          </a:p>
+        </p:txBody>
       </p:sp>
       <p:sp>
         <p:nvSpPr>
@@ -7657,7 +7778,7 @@
           <a:bodyPr wrap="square" lIns="0" tIns="0" rIns="0" bIns="0" rtlCol="0" anchor="ctr"/>
           <a:lstStyle/>
           <a:p>
-            <a:pPr indent="0" marL="0">
+            <a:pPr marL="0" indent="0">
               <a:buNone/>
             </a:pPr>
             <a:r>
@@ -7765,6 +7886,13 @@
             <a:prstDash val="solid"/>
           </a:ln>
         </p:spPr>
+        <p:txBody>
+          <a:bodyPr/>
+          <a:lstStyle/>
+          <a:p>
+            <a:endParaRPr lang="en-US"/>
+          </a:p>
+        </p:txBody>
       </p:sp>
       <p:sp>
         <p:nvSpPr>
@@ -7787,11 +7915,11 @@
           <a:bodyPr wrap="square" lIns="0" tIns="0" rIns="0" bIns="0" rtlCol="0" anchor="ctr"/>
           <a:lstStyle/>
           <a:p>
-            <a:pPr indent="0" marL="0">
+            <a:pPr marL="0" indent="0">
               <a:buNone/>
             </a:pPr>
             <a:r>
-              <a:rPr lang="en-US" sz="1000" b="1" spc="200" kern="0" dirty="0">
+              <a:rPr lang="en-US" sz="1000" b="1" kern="0" spc="200" dirty="0">
                 <a:solidFill>
                   <a:srgbClr val="F5C26B"/>
                 </a:solidFill>
@@ -7826,7 +7954,7 @@
             <a:pPr marL="342900" indent="-342900">
               <a:buSzPct val="100000"/>
               <a:buFont typeface="+mj-lt"/>
-              <a:buAutoNum type="arabicPeriod" startAt="1"/>
+              <a:buAutoNum type="arabicPeriod"/>
             </a:pPr>
             <a:r>
               <a:rPr lang="en-US" sz="1000" dirty="0">
@@ -7842,7 +7970,7 @@
             <a:pPr marL="342900" indent="-342900">
               <a:buSzPct val="100000"/>
               <a:buFont typeface="+mj-lt"/>
-              <a:buAutoNum type="arabicPeriod" startAt="1"/>
+              <a:buAutoNum type="arabicPeriod"/>
             </a:pPr>
             <a:r>
               <a:rPr lang="en-US" sz="1000" dirty="0">
@@ -7858,7 +7986,7 @@
             <a:pPr marL="342900" indent="-342900">
               <a:buSzPct val="100000"/>
               <a:buFont typeface="+mj-lt"/>
-              <a:buAutoNum type="arabicPeriod" startAt="1"/>
+              <a:buAutoNum type="arabicPeriod"/>
             </a:pPr>
             <a:r>
               <a:rPr lang="en-US" sz="1000" dirty="0">
@@ -7921,6 +8049,13 @@
             <a:prstDash val="solid"/>
           </a:ln>
         </p:spPr>
+        <p:txBody>
+          <a:bodyPr/>
+          <a:lstStyle/>
+          <a:p>
+            <a:endParaRPr lang="en-US"/>
+          </a:p>
+        </p:txBody>
       </p:sp>
       <p:sp>
         <p:nvSpPr>
@@ -7946,6 +8081,13 @@
             <a:prstDash val="solid"/>
           </a:ln>
         </p:spPr>
+        <p:txBody>
+          <a:bodyPr/>
+          <a:lstStyle/>
+          <a:p>
+            <a:endParaRPr lang="en-US"/>
+          </a:p>
+        </p:txBody>
       </p:sp>
       <p:sp>
         <p:nvSpPr>
@@ -7971,6 +8113,13 @@
             <a:prstDash val="solid"/>
           </a:ln>
         </p:spPr>
+        <p:txBody>
+          <a:bodyPr/>
+          <a:lstStyle/>
+          <a:p>
+            <a:endParaRPr lang="en-US"/>
+          </a:p>
+        </p:txBody>
       </p:sp>
       <p:sp>
         <p:nvSpPr>
@@ -7998,6 +8147,13 @@
             <a:prstDash val="solid"/>
           </a:ln>
         </p:spPr>
+        <p:txBody>
+          <a:bodyPr/>
+          <a:lstStyle/>
+          <a:p>
+            <a:endParaRPr lang="en-US"/>
+          </a:p>
+        </p:txBody>
       </p:sp>
       <p:sp>
         <p:nvSpPr>
@@ -8025,6 +8181,13 @@
             <a:prstDash val="solid"/>
           </a:ln>
         </p:spPr>
+        <p:txBody>
+          <a:bodyPr/>
+          <a:lstStyle/>
+          <a:p>
+            <a:endParaRPr lang="en-US"/>
+          </a:p>
+        </p:txBody>
       </p:sp>
       <p:sp>
         <p:nvSpPr>
@@ -8050,6 +8213,13 @@
             <a:prstDash val="solid"/>
           </a:ln>
         </p:spPr>
+        <p:txBody>
+          <a:bodyPr/>
+          <a:lstStyle/>
+          <a:p>
+            <a:endParaRPr lang="en-US"/>
+          </a:p>
+        </p:txBody>
       </p:sp>
       <p:sp>
         <p:nvSpPr>
@@ -8072,7 +8242,7 @@
           <a:bodyPr wrap="square" lIns="0" tIns="0" rIns="0" bIns="0" rtlCol="0" anchor="ctr"/>
           <a:lstStyle/>
           <a:p>
-            <a:pPr algn="ctr" indent="0" marL="0">
+            <a:pPr marL="0" indent="0" algn="ctr">
               <a:buNone/>
             </a:pPr>
             <a:r>
@@ -8108,11 +8278,11 @@
           <a:bodyPr wrap="square" lIns="0" tIns="0" rIns="0" bIns="0" rtlCol="0" anchor="ctr"/>
           <a:lstStyle/>
           <a:p>
-            <a:pPr indent="0" marL="0">
+            <a:pPr marL="0" indent="0">
               <a:buNone/>
             </a:pPr>
             <a:r>
-              <a:rPr lang="en-US" sz="1000" b="1" spc="200" kern="0" dirty="0">
+              <a:rPr lang="en-US" sz="1000" b="1" kern="0" spc="200" dirty="0">
                 <a:solidFill>
                   <a:srgbClr val="F5C26B"/>
                 </a:solidFill>
@@ -8144,7 +8314,7 @@
           <a:bodyPr wrap="square" lIns="0" tIns="0" rIns="0" bIns="0" rtlCol="0" anchor="ctr"/>
           <a:lstStyle/>
           <a:p>
-            <a:pPr indent="0" marL="0">
+            <a:pPr marL="0" indent="0">
               <a:buNone/>
             </a:pPr>
             <a:r>
@@ -8183,7 +8353,7 @@
           <a:bodyPr wrap="square" lIns="0" tIns="0" rIns="0" bIns="0" rtlCol="0" anchor="ctr"/>
           <a:lstStyle/>
           <a:p>
-            <a:pPr indent="0" marL="0">
+            <a:pPr marL="0" indent="0">
               <a:buNone/>
             </a:pPr>
             <a:r>
@@ -8224,6 +8394,13 @@
             <a:prstDash val="solid"/>
           </a:ln>
         </p:spPr>
+        <p:txBody>
+          <a:bodyPr/>
+          <a:lstStyle/>
+          <a:p>
+            <a:endParaRPr lang="en-US"/>
+          </a:p>
+        </p:txBody>
       </p:sp>
       <p:sp>
         <p:nvSpPr>
@@ -8246,7 +8423,7 @@
           <a:bodyPr wrap="square" lIns="0" tIns="0" rIns="0" bIns="0" rtlCol="0" anchor="ctr"/>
           <a:lstStyle/>
           <a:p>
-            <a:pPr indent="0" marL="0">
+            <a:pPr marL="0" indent="0">
               <a:buNone/>
             </a:pPr>
             <a:r>
@@ -8354,6 +8531,13 @@
             <a:prstDash val="solid"/>
           </a:ln>
         </p:spPr>
+        <p:txBody>
+          <a:bodyPr/>
+          <a:lstStyle/>
+          <a:p>
+            <a:endParaRPr lang="en-US"/>
+          </a:p>
+        </p:txBody>
       </p:sp>
       <p:sp>
         <p:nvSpPr>
@@ -8376,11 +8560,11 @@
           <a:bodyPr wrap="square" lIns="0" tIns="0" rIns="0" bIns="0" rtlCol="0" anchor="ctr"/>
           <a:lstStyle/>
           <a:p>
-            <a:pPr indent="0" marL="0">
+            <a:pPr marL="0" indent="0">
               <a:buNone/>
             </a:pPr>
             <a:r>
-              <a:rPr lang="en-US" sz="1000" b="1" spc="200" kern="0" dirty="0">
+              <a:rPr lang="en-US" sz="1000" b="1" kern="0" spc="200" dirty="0">
                 <a:solidFill>
                   <a:srgbClr val="F5C26B"/>
                 </a:solidFill>
@@ -8415,7 +8599,7 @@
             <a:pPr marL="342900" indent="-342900">
               <a:buSzPct val="100000"/>
               <a:buFont typeface="+mj-lt"/>
-              <a:buAutoNum type="arabicPeriod" startAt="1"/>
+              <a:buAutoNum type="arabicPeriod"/>
             </a:pPr>
             <a:r>
               <a:rPr lang="en-US" sz="1000" dirty="0">
@@ -8431,7 +8615,7 @@
             <a:pPr marL="342900" indent="-342900">
               <a:buSzPct val="100000"/>
               <a:buFont typeface="+mj-lt"/>
-              <a:buAutoNum type="arabicPeriod" startAt="1"/>
+              <a:buAutoNum type="arabicPeriod"/>
             </a:pPr>
             <a:r>
               <a:rPr lang="en-US" sz="1000" dirty="0">
@@ -8447,7 +8631,7 @@
             <a:pPr marL="342900" indent="-342900">
               <a:buSzPct val="100000"/>
               <a:buFont typeface="+mj-lt"/>
-              <a:buAutoNum type="arabicPeriod" startAt="1"/>
+              <a:buAutoNum type="arabicPeriod"/>
             </a:pPr>
             <a:r>
               <a:rPr lang="en-US" sz="1000" dirty="0">
@@ -8510,6 +8694,13 @@
             <a:prstDash val="solid"/>
           </a:ln>
         </p:spPr>
+        <p:txBody>
+          <a:bodyPr/>
+          <a:lstStyle/>
+          <a:p>
+            <a:endParaRPr lang="en-US"/>
+          </a:p>
+        </p:txBody>
       </p:sp>
       <p:sp>
         <p:nvSpPr>
@@ -8535,6 +8726,13 @@
             <a:prstDash val="solid"/>
           </a:ln>
         </p:spPr>
+        <p:txBody>
+          <a:bodyPr/>
+          <a:lstStyle/>
+          <a:p>
+            <a:endParaRPr lang="en-US"/>
+          </a:p>
+        </p:txBody>
       </p:sp>
       <p:sp>
         <p:nvSpPr>
@@ -8560,6 +8758,13 @@
             <a:prstDash val="solid"/>
           </a:ln>
         </p:spPr>
+        <p:txBody>
+          <a:bodyPr/>
+          <a:lstStyle/>
+          <a:p>
+            <a:endParaRPr lang="en-US"/>
+          </a:p>
+        </p:txBody>
       </p:sp>
       <p:sp>
         <p:nvSpPr>
@@ -8587,6 +8792,13 @@
             <a:prstDash val="solid"/>
           </a:ln>
         </p:spPr>
+        <p:txBody>
+          <a:bodyPr/>
+          <a:lstStyle/>
+          <a:p>
+            <a:endParaRPr lang="en-US"/>
+          </a:p>
+        </p:txBody>
       </p:sp>
       <p:sp>
         <p:nvSpPr>
@@ -8614,6 +8826,13 @@
             <a:prstDash val="solid"/>
           </a:ln>
         </p:spPr>
+        <p:txBody>
+          <a:bodyPr/>
+          <a:lstStyle/>
+          <a:p>
+            <a:endParaRPr lang="en-US"/>
+          </a:p>
+        </p:txBody>
       </p:sp>
       <p:sp>
         <p:nvSpPr>
@@ -8639,6 +8858,13 @@
             <a:prstDash val="solid"/>
           </a:ln>
         </p:spPr>
+        <p:txBody>
+          <a:bodyPr/>
+          <a:lstStyle/>
+          <a:p>
+            <a:endParaRPr lang="en-US"/>
+          </a:p>
+        </p:txBody>
       </p:sp>
       <p:sp>
         <p:nvSpPr>
@@ -8661,7 +8887,7 @@
           <a:bodyPr wrap="square" lIns="0" tIns="0" rIns="0" bIns="0" rtlCol="0" anchor="ctr"/>
           <a:lstStyle/>
           <a:p>
-            <a:pPr algn="ctr" indent="0" marL="0">
+            <a:pPr marL="0" indent="0" algn="ctr">
               <a:buNone/>
             </a:pPr>
             <a:r>
@@ -8697,11 +8923,11 @@
           <a:bodyPr wrap="square" lIns="0" tIns="0" rIns="0" bIns="0" rtlCol="0" anchor="ctr"/>
           <a:lstStyle/>
           <a:p>
-            <a:pPr indent="0" marL="0">
+            <a:pPr marL="0" indent="0">
               <a:buNone/>
             </a:pPr>
             <a:r>
-              <a:rPr lang="en-US" sz="1000" b="1" spc="200" kern="0" dirty="0">
+              <a:rPr lang="en-US" sz="1000" b="1" kern="0" spc="200" dirty="0">
                 <a:solidFill>
                   <a:srgbClr val="F5C26B"/>
                 </a:solidFill>
@@ -8733,7 +8959,7 @@
           <a:bodyPr wrap="square" lIns="0" tIns="0" rIns="0" bIns="0" rtlCol="0" anchor="ctr"/>
           <a:lstStyle/>
           <a:p>
-            <a:pPr indent="0" marL="0">
+            <a:pPr marL="0" indent="0">
               <a:buNone/>
             </a:pPr>
             <a:r>
@@ -8772,7 +8998,7 @@
           <a:bodyPr wrap="square" lIns="0" tIns="0" rIns="0" bIns="0" rtlCol="0" anchor="ctr"/>
           <a:lstStyle/>
           <a:p>
-            <a:pPr indent="0" marL="0">
+            <a:pPr marL="0" indent="0">
               <a:buNone/>
             </a:pPr>
             <a:r>
@@ -8813,6 +9039,13 @@
             <a:prstDash val="solid"/>
           </a:ln>
         </p:spPr>
+        <p:txBody>
+          <a:bodyPr/>
+          <a:lstStyle/>
+          <a:p>
+            <a:endParaRPr lang="en-US"/>
+          </a:p>
+        </p:txBody>
       </p:sp>
       <p:sp>
         <p:nvSpPr>
@@ -8835,7 +9068,7 @@
           <a:bodyPr wrap="square" lIns="0" tIns="0" rIns="0" bIns="0" rtlCol="0" anchor="ctr"/>
           <a:lstStyle/>
           <a:p>
-            <a:pPr indent="0" marL="0">
+            <a:pPr marL="0" indent="0">
               <a:buNone/>
             </a:pPr>
             <a:r>
@@ -8943,6 +9176,13 @@
             <a:prstDash val="solid"/>
           </a:ln>
         </p:spPr>
+        <p:txBody>
+          <a:bodyPr/>
+          <a:lstStyle/>
+          <a:p>
+            <a:endParaRPr lang="en-US"/>
+          </a:p>
+        </p:txBody>
       </p:sp>
       <p:sp>
         <p:nvSpPr>
@@ -8965,11 +9205,11 @@
           <a:bodyPr wrap="square" lIns="0" tIns="0" rIns="0" bIns="0" rtlCol="0" anchor="ctr"/>
           <a:lstStyle/>
           <a:p>
-            <a:pPr indent="0" marL="0">
+            <a:pPr marL="0" indent="0">
               <a:buNone/>
             </a:pPr>
             <a:r>
-              <a:rPr lang="en-US" sz="1000" b="1" spc="200" kern="0" dirty="0">
+              <a:rPr lang="en-US" sz="1000" b="1" kern="0" spc="200" dirty="0">
                 <a:solidFill>
                   <a:srgbClr val="F5C26B"/>
                 </a:solidFill>
@@ -9004,7 +9244,7 @@
             <a:pPr marL="342900" indent="-342900">
               <a:buSzPct val="100000"/>
               <a:buFont typeface="+mj-lt"/>
-              <a:buAutoNum type="arabicPeriod" startAt="1"/>
+              <a:buAutoNum type="arabicPeriod"/>
             </a:pPr>
             <a:r>
               <a:rPr lang="en-US" sz="1000" dirty="0">
@@ -9020,7 +9260,7 @@
             <a:pPr marL="342900" indent="-342900">
               <a:buSzPct val="100000"/>
               <a:buFont typeface="+mj-lt"/>
-              <a:buAutoNum type="arabicPeriod" startAt="1"/>
+              <a:buAutoNum type="arabicPeriod"/>
             </a:pPr>
             <a:r>
               <a:rPr lang="en-US" sz="1000" dirty="0">
@@ -9036,7 +9276,7 @@
             <a:pPr marL="342900" indent="-342900">
               <a:buSzPct val="100000"/>
               <a:buFont typeface="+mj-lt"/>
-              <a:buAutoNum type="arabicPeriod" startAt="1"/>
+              <a:buAutoNum type="arabicPeriod"/>
             </a:pPr>
             <a:r>
               <a:rPr lang="en-US" sz="1000" dirty="0">
@@ -9099,6 +9339,13 @@
             <a:prstDash val="solid"/>
           </a:ln>
         </p:spPr>
+        <p:txBody>
+          <a:bodyPr/>
+          <a:lstStyle/>
+          <a:p>
+            <a:endParaRPr lang="en-US"/>
+          </a:p>
+        </p:txBody>
       </p:sp>
       <p:sp>
         <p:nvSpPr>
@@ -9124,6 +9371,13 @@
             <a:prstDash val="solid"/>
           </a:ln>
         </p:spPr>
+        <p:txBody>
+          <a:bodyPr/>
+          <a:lstStyle/>
+          <a:p>
+            <a:endParaRPr lang="en-US"/>
+          </a:p>
+        </p:txBody>
       </p:sp>
       <p:sp>
         <p:nvSpPr>
@@ -9149,6 +9403,13 @@
             <a:prstDash val="solid"/>
           </a:ln>
         </p:spPr>
+        <p:txBody>
+          <a:bodyPr/>
+          <a:lstStyle/>
+          <a:p>
+            <a:endParaRPr lang="en-US"/>
+          </a:p>
+        </p:txBody>
       </p:sp>
       <p:sp>
         <p:nvSpPr>
@@ -9176,6 +9437,13 @@
             <a:prstDash val="solid"/>
           </a:ln>
         </p:spPr>
+        <p:txBody>
+          <a:bodyPr/>
+          <a:lstStyle/>
+          <a:p>
+            <a:endParaRPr lang="en-US"/>
+          </a:p>
+        </p:txBody>
       </p:sp>
       <p:sp>
         <p:nvSpPr>
@@ -9203,6 +9471,13 @@
             <a:prstDash val="solid"/>
           </a:ln>
         </p:spPr>
+        <p:txBody>
+          <a:bodyPr/>
+          <a:lstStyle/>
+          <a:p>
+            <a:endParaRPr lang="en-US"/>
+          </a:p>
+        </p:txBody>
       </p:sp>
       <p:sp>
         <p:nvSpPr>
@@ -9225,11 +9500,11 @@
           <a:bodyPr wrap="square" lIns="0" tIns="0" rIns="0" bIns="0" rtlCol="0" anchor="ctr"/>
           <a:lstStyle/>
           <a:p>
-            <a:pPr indent="0" marL="0">
+            <a:pPr marL="0" indent="0">
               <a:buNone/>
             </a:pPr>
             <a:r>
-              <a:rPr lang="en-US" sz="1200" b="1" spc="300" kern="0" dirty="0">
+              <a:rPr lang="en-US" sz="1200" b="1" kern="0" spc="300" dirty="0">
                 <a:solidFill>
                   <a:srgbClr val="F5C26B"/>
                 </a:solidFill>
@@ -9261,7 +9536,7 @@
           <a:bodyPr wrap="square" lIns="0" tIns="0" rIns="0" bIns="0" rtlCol="0" anchor="ctr"/>
           <a:lstStyle/>
           <a:p>
-            <a:pPr indent="0" marL="0">
+            <a:pPr marL="0" indent="0">
               <a:buNone/>
             </a:pPr>
             <a:r>
@@ -9278,7 +9553,7 @@
             <a:endParaRPr lang="en-US" sz="3400" dirty="0"/>
           </a:p>
           <a:p>
-            <a:pPr indent="0" marL="0">
+            <a:pPr marL="0" indent="0">
               <a:buNone/>
             </a:pPr>
             <a:r>
@@ -9404,6 +9679,13 @@
             <a:prstDash val="solid"/>
           </a:ln>
         </p:spPr>
+        <p:txBody>
+          <a:bodyPr/>
+          <a:lstStyle/>
+          <a:p>
+            <a:endParaRPr lang="en-US"/>
+          </a:p>
+        </p:txBody>
       </p:sp>
       <p:sp>
         <p:nvSpPr>
@@ -9426,7 +9708,7 @@
           <a:bodyPr wrap="square" lIns="0" tIns="0" rIns="0" bIns="0" rtlCol="0" anchor="ctr"/>
           <a:lstStyle/>
           <a:p>
-            <a:pPr indent="0" marL="0">
+            <a:pPr marL="0" indent="0">
               <a:buNone/>
             </a:pPr>
             <a:r>
@@ -9441,7 +9723,7 @@
             <a:endParaRPr lang="en-US" sz="1300" dirty="0"/>
           </a:p>
           <a:p>
-            <a:pPr indent="0" marL="0">
+            <a:pPr marL="0" indent="0">
               <a:buNone/>
             </a:pPr>
             <a:r>
@@ -9455,7 +9737,7 @@
             <a:endParaRPr lang="en-US" sz="1300" dirty="0"/>
           </a:p>
           <a:p>
-            <a:pPr indent="0" marL="0">
+            <a:pPr marL="0" indent="0">
               <a:buNone/>
             </a:pPr>
             <a:r>
@@ -9469,7 +9751,7 @@
             <a:endParaRPr lang="en-US" sz="1300" dirty="0"/>
           </a:p>
           <a:p>
-            <a:pPr indent="0" marL="0">
+            <a:pPr marL="0" indent="0">
               <a:buNone/>
             </a:pPr>
             <a:r>
@@ -9483,7 +9765,7 @@
             <a:endParaRPr lang="en-US" sz="1300" dirty="0"/>
           </a:p>
           <a:p>
-            <a:pPr indent="0" marL="0">
+            <a:pPr marL="0" indent="0">
               <a:buNone/>
             </a:pPr>
             <a:r>
@@ -9547,6 +9829,13 @@
             <a:prstDash val="solid"/>
           </a:ln>
         </p:spPr>
+        <p:txBody>
+          <a:bodyPr/>
+          <a:lstStyle/>
+          <a:p>
+            <a:endParaRPr lang="en-US"/>
+          </a:p>
+        </p:txBody>
       </p:sp>
       <p:sp>
         <p:nvSpPr>
@@ -9572,6 +9861,13 @@
             <a:prstDash val="solid"/>
           </a:ln>
         </p:spPr>
+        <p:txBody>
+          <a:bodyPr/>
+          <a:lstStyle/>
+          <a:p>
+            <a:endParaRPr lang="en-US"/>
+          </a:p>
+        </p:txBody>
       </p:sp>
       <p:sp>
         <p:nvSpPr>
@@ -9597,6 +9893,13 @@
             <a:prstDash val="solid"/>
           </a:ln>
         </p:spPr>
+        <p:txBody>
+          <a:bodyPr/>
+          <a:lstStyle/>
+          <a:p>
+            <a:endParaRPr lang="en-US"/>
+          </a:p>
+        </p:txBody>
       </p:sp>
       <p:sp>
         <p:nvSpPr>
@@ -9624,6 +9927,13 @@
             <a:prstDash val="solid"/>
           </a:ln>
         </p:spPr>
+        <p:txBody>
+          <a:bodyPr/>
+          <a:lstStyle/>
+          <a:p>
+            <a:endParaRPr lang="en-US"/>
+          </a:p>
+        </p:txBody>
       </p:sp>
       <p:sp>
         <p:nvSpPr>
@@ -9651,6 +9961,13 @@
             <a:prstDash val="solid"/>
           </a:ln>
         </p:spPr>
+        <p:txBody>
+          <a:bodyPr/>
+          <a:lstStyle/>
+          <a:p>
+            <a:endParaRPr lang="en-US"/>
+          </a:p>
+        </p:txBody>
       </p:sp>
       <p:sp>
         <p:nvSpPr>
@@ -9673,7 +9990,7 @@
           <a:bodyPr wrap="square" lIns="0" tIns="0" rIns="0" bIns="0" rtlCol="0" anchor="ctr"/>
           <a:lstStyle/>
           <a:p>
-            <a:pPr algn="ctr" indent="0" marL="0">
+            <a:pPr marL="0" indent="0" algn="ctr">
               <a:buNone/>
             </a:pPr>
             <a:r>
@@ -9712,7 +10029,7 @@
           <a:bodyPr wrap="square" lIns="0" tIns="0" rIns="0" bIns="0" rtlCol="0" anchor="ctr"/>
           <a:lstStyle/>
           <a:p>
-            <a:pPr algn="ctr" indent="0" marL="0">
+            <a:pPr marL="0" indent="0" algn="ctr">
               <a:buNone/>
             </a:pPr>
             <a:r>
@@ -9749,6 +10066,13 @@
             <a:prstDash val="solid"/>
           </a:ln>
         </p:spPr>
+        <p:txBody>
+          <a:bodyPr/>
+          <a:lstStyle/>
+          <a:p>
+            <a:endParaRPr lang="en-US"/>
+          </a:p>
+        </p:txBody>
       </p:sp>
     </p:spTree>
   </p:cSld>
@@ -9799,6 +10123,13 @@
             <a:prstDash val="solid"/>
           </a:ln>
         </p:spPr>
+        <p:txBody>
+          <a:bodyPr/>
+          <a:lstStyle/>
+          <a:p>
+            <a:endParaRPr lang="en-US"/>
+          </a:p>
+        </p:txBody>
       </p:sp>
       <p:sp>
         <p:nvSpPr>
@@ -9824,6 +10155,13 @@
             <a:prstDash val="solid"/>
           </a:ln>
         </p:spPr>
+        <p:txBody>
+          <a:bodyPr/>
+          <a:lstStyle/>
+          <a:p>
+            <a:endParaRPr lang="en-US"/>
+          </a:p>
+        </p:txBody>
       </p:sp>
       <p:sp>
         <p:nvSpPr>
@@ -9849,6 +10187,13 @@
             <a:prstDash val="solid"/>
           </a:ln>
         </p:spPr>
+        <p:txBody>
+          <a:bodyPr/>
+          <a:lstStyle/>
+          <a:p>
+            <a:endParaRPr lang="en-US"/>
+          </a:p>
+        </p:txBody>
       </p:sp>
       <p:sp>
         <p:nvSpPr>
@@ -9876,6 +10221,13 @@
             <a:prstDash val="solid"/>
           </a:ln>
         </p:spPr>
+        <p:txBody>
+          <a:bodyPr/>
+          <a:lstStyle/>
+          <a:p>
+            <a:endParaRPr lang="en-US"/>
+          </a:p>
+        </p:txBody>
       </p:sp>
       <p:sp>
         <p:nvSpPr>
@@ -9903,6 +10255,13 @@
             <a:prstDash val="solid"/>
           </a:ln>
         </p:spPr>
+        <p:txBody>
+          <a:bodyPr/>
+          <a:lstStyle/>
+          <a:p>
+            <a:endParaRPr lang="en-US"/>
+          </a:p>
+        </p:txBody>
       </p:sp>
       <p:sp>
         <p:nvSpPr>
@@ -9928,6 +10287,13 @@
             <a:prstDash val="solid"/>
           </a:ln>
         </p:spPr>
+        <p:txBody>
+          <a:bodyPr/>
+          <a:lstStyle/>
+          <a:p>
+            <a:endParaRPr lang="en-US"/>
+          </a:p>
+        </p:txBody>
       </p:sp>
       <p:sp>
         <p:nvSpPr>
@@ -9950,7 +10316,7 @@
           <a:bodyPr wrap="square" lIns="0" tIns="0" rIns="0" bIns="0" rtlCol="0" anchor="ctr"/>
           <a:lstStyle/>
           <a:p>
-            <a:pPr algn="ctr" indent="0" marL="0">
+            <a:pPr marL="0" indent="0" algn="ctr">
               <a:buNone/>
             </a:pPr>
             <a:r>
@@ -9986,11 +10352,11 @@
           <a:bodyPr wrap="square" lIns="0" tIns="0" rIns="0" bIns="0" rtlCol="0" anchor="ctr"/>
           <a:lstStyle/>
           <a:p>
-            <a:pPr indent="0" marL="0">
+            <a:pPr marL="0" indent="0">
               <a:buNone/>
             </a:pPr>
             <a:r>
-              <a:rPr lang="en-US" sz="1000" b="1" spc="200" kern="0" dirty="0">
+              <a:rPr lang="en-US" sz="1000" b="1" kern="0" spc="200" dirty="0">
                 <a:solidFill>
                   <a:srgbClr val="F5C26B"/>
                 </a:solidFill>
@@ -10022,7 +10388,7 @@
           <a:bodyPr wrap="square" lIns="0" tIns="0" rIns="0" bIns="0" rtlCol="0" anchor="ctr"/>
           <a:lstStyle/>
           <a:p>
-            <a:pPr indent="0" marL="0">
+            <a:pPr marL="0" indent="0">
               <a:buNone/>
             </a:pPr>
             <a:r>
@@ -10061,7 +10427,7 @@
           <a:bodyPr wrap="square" lIns="0" tIns="0" rIns="0" bIns="0" rtlCol="0" anchor="ctr"/>
           <a:lstStyle/>
           <a:p>
-            <a:pPr indent="0" marL="0">
+            <a:pPr marL="0" indent="0">
               <a:buNone/>
             </a:pPr>
             <a:r>
@@ -10102,6 +10468,13 @@
             <a:prstDash val="solid"/>
           </a:ln>
         </p:spPr>
+        <p:txBody>
+          <a:bodyPr/>
+          <a:lstStyle/>
+          <a:p>
+            <a:endParaRPr lang="en-US"/>
+          </a:p>
+        </p:txBody>
       </p:sp>
       <p:sp>
         <p:nvSpPr>
@@ -10124,7 +10497,7 @@
           <a:bodyPr wrap="square" lIns="0" tIns="0" rIns="0" bIns="0" rtlCol="0" anchor="ctr"/>
           <a:lstStyle/>
           <a:p>
-            <a:pPr indent="0" marL="0">
+            <a:pPr marL="0" indent="0">
               <a:buNone/>
             </a:pPr>
             <a:r>
@@ -10232,6 +10605,13 @@
             <a:prstDash val="solid"/>
           </a:ln>
         </p:spPr>
+        <p:txBody>
+          <a:bodyPr/>
+          <a:lstStyle/>
+          <a:p>
+            <a:endParaRPr lang="en-US"/>
+          </a:p>
+        </p:txBody>
       </p:sp>
       <p:sp>
         <p:nvSpPr>
@@ -10254,11 +10634,11 @@
           <a:bodyPr wrap="square" lIns="0" tIns="0" rIns="0" bIns="0" rtlCol="0" anchor="ctr"/>
           <a:lstStyle/>
           <a:p>
-            <a:pPr indent="0" marL="0">
+            <a:pPr marL="0" indent="0">
               <a:buNone/>
             </a:pPr>
             <a:r>
-              <a:rPr lang="en-US" sz="1000" b="1" spc="200" kern="0" dirty="0">
+              <a:rPr lang="en-US" sz="1000" b="1" kern="0" spc="200" dirty="0">
                 <a:solidFill>
                   <a:srgbClr val="F5C26B"/>
                 </a:solidFill>
@@ -10293,7 +10673,7 @@
             <a:pPr marL="342900" indent="-342900">
               <a:buSzPct val="100000"/>
               <a:buFont typeface="+mj-lt"/>
-              <a:buAutoNum type="arabicPeriod" startAt="1"/>
+              <a:buAutoNum type="arabicPeriod"/>
             </a:pPr>
             <a:r>
               <a:rPr lang="en-US" sz="1000" dirty="0">
@@ -10309,7 +10689,7 @@
             <a:pPr marL="342900" indent="-342900">
               <a:buSzPct val="100000"/>
               <a:buFont typeface="+mj-lt"/>
-              <a:buAutoNum type="arabicPeriod" startAt="1"/>
+              <a:buAutoNum type="arabicPeriod"/>
             </a:pPr>
             <a:r>
               <a:rPr lang="en-US" sz="1000" dirty="0">
@@ -10325,7 +10705,7 @@
             <a:pPr marL="342900" indent="-342900">
               <a:buSzPct val="100000"/>
               <a:buFont typeface="+mj-lt"/>
-              <a:buAutoNum type="arabicPeriod" startAt="1"/>
+              <a:buAutoNum type="arabicPeriod"/>
             </a:pPr>
             <a:r>
               <a:rPr lang="en-US" sz="1000" dirty="0">
@@ -10388,6 +10768,13 @@
             <a:prstDash val="solid"/>
           </a:ln>
         </p:spPr>
+        <p:txBody>
+          <a:bodyPr/>
+          <a:lstStyle/>
+          <a:p>
+            <a:endParaRPr lang="en-US"/>
+          </a:p>
+        </p:txBody>
       </p:sp>
       <p:sp>
         <p:nvSpPr>
@@ -10413,6 +10800,13 @@
             <a:prstDash val="solid"/>
           </a:ln>
         </p:spPr>
+        <p:txBody>
+          <a:bodyPr/>
+          <a:lstStyle/>
+          <a:p>
+            <a:endParaRPr lang="en-US"/>
+          </a:p>
+        </p:txBody>
       </p:sp>
       <p:sp>
         <p:nvSpPr>
@@ -10438,6 +10832,13 @@
             <a:prstDash val="solid"/>
           </a:ln>
         </p:spPr>
+        <p:txBody>
+          <a:bodyPr/>
+          <a:lstStyle/>
+          <a:p>
+            <a:endParaRPr lang="en-US"/>
+          </a:p>
+        </p:txBody>
       </p:sp>
       <p:sp>
         <p:nvSpPr>
@@ -10465,6 +10866,13 @@
             <a:prstDash val="solid"/>
           </a:ln>
         </p:spPr>
+        <p:txBody>
+          <a:bodyPr/>
+          <a:lstStyle/>
+          <a:p>
+            <a:endParaRPr lang="en-US"/>
+          </a:p>
+        </p:txBody>
       </p:sp>
       <p:sp>
         <p:nvSpPr>
@@ -10492,6 +10900,13 @@
             <a:prstDash val="solid"/>
           </a:ln>
         </p:spPr>
+        <p:txBody>
+          <a:bodyPr/>
+          <a:lstStyle/>
+          <a:p>
+            <a:endParaRPr lang="en-US"/>
+          </a:p>
+        </p:txBody>
       </p:sp>
       <p:sp>
         <p:nvSpPr>
@@ -10517,6 +10932,13 @@
             <a:prstDash val="solid"/>
           </a:ln>
         </p:spPr>
+        <p:txBody>
+          <a:bodyPr/>
+          <a:lstStyle/>
+          <a:p>
+            <a:endParaRPr lang="en-US"/>
+          </a:p>
+        </p:txBody>
       </p:sp>
       <p:sp>
         <p:nvSpPr>
@@ -10539,7 +10961,7 @@
           <a:bodyPr wrap="square" lIns="0" tIns="0" rIns="0" bIns="0" rtlCol="0" anchor="ctr"/>
           <a:lstStyle/>
           <a:p>
-            <a:pPr algn="ctr" indent="0" marL="0">
+            <a:pPr marL="0" indent="0" algn="ctr">
               <a:buNone/>
             </a:pPr>
             <a:r>
@@ -10575,11 +10997,11 @@
           <a:bodyPr wrap="square" lIns="0" tIns="0" rIns="0" bIns="0" rtlCol="0" anchor="ctr"/>
           <a:lstStyle/>
           <a:p>
-            <a:pPr indent="0" marL="0">
+            <a:pPr marL="0" indent="0">
               <a:buNone/>
             </a:pPr>
             <a:r>
-              <a:rPr lang="en-US" sz="1000" b="1" spc="200" kern="0" dirty="0">
+              <a:rPr lang="en-US" sz="1000" b="1" kern="0" spc="200" dirty="0">
                 <a:solidFill>
                   <a:srgbClr val="F5C26B"/>
                 </a:solidFill>
@@ -10611,7 +11033,7 @@
           <a:bodyPr wrap="square" lIns="0" tIns="0" rIns="0" bIns="0" rtlCol="0" anchor="ctr"/>
           <a:lstStyle/>
           <a:p>
-            <a:pPr indent="0" marL="0">
+            <a:pPr marL="0" indent="0">
               <a:buNone/>
             </a:pPr>
             <a:r>
@@ -10650,7 +11072,7 @@
           <a:bodyPr wrap="square" lIns="0" tIns="0" rIns="0" bIns="0" rtlCol="0" anchor="ctr"/>
           <a:lstStyle/>
           <a:p>
-            <a:pPr indent="0" marL="0">
+            <a:pPr marL="0" indent="0">
               <a:buNone/>
             </a:pPr>
             <a:r>
@@ -10691,6 +11113,13 @@
             <a:prstDash val="solid"/>
           </a:ln>
         </p:spPr>
+        <p:txBody>
+          <a:bodyPr/>
+          <a:lstStyle/>
+          <a:p>
+            <a:endParaRPr lang="en-US"/>
+          </a:p>
+        </p:txBody>
       </p:sp>
       <p:sp>
         <p:nvSpPr>
@@ -10713,7 +11142,7 @@
           <a:bodyPr wrap="square" lIns="0" tIns="0" rIns="0" bIns="0" rtlCol="0" anchor="ctr"/>
           <a:lstStyle/>
           <a:p>
-            <a:pPr indent="0" marL="0">
+            <a:pPr marL="0" indent="0">
               <a:buNone/>
             </a:pPr>
             <a:r>
@@ -10821,6 +11250,13 @@
             <a:prstDash val="solid"/>
           </a:ln>
         </p:spPr>
+        <p:txBody>
+          <a:bodyPr/>
+          <a:lstStyle/>
+          <a:p>
+            <a:endParaRPr lang="en-US"/>
+          </a:p>
+        </p:txBody>
       </p:sp>
       <p:sp>
         <p:nvSpPr>
@@ -10843,11 +11279,11 @@
           <a:bodyPr wrap="square" lIns="0" tIns="0" rIns="0" bIns="0" rtlCol="0" anchor="ctr"/>
           <a:lstStyle/>
           <a:p>
-            <a:pPr indent="0" marL="0">
+            <a:pPr marL="0" indent="0">
               <a:buNone/>
             </a:pPr>
             <a:r>
-              <a:rPr lang="en-US" sz="1000" b="1" spc="200" kern="0" dirty="0">
+              <a:rPr lang="en-US" sz="1000" b="1" kern="0" spc="200" dirty="0">
                 <a:solidFill>
                   <a:srgbClr val="F5C26B"/>
                 </a:solidFill>
@@ -10882,7 +11318,7 @@
             <a:pPr marL="342900" indent="-342900">
               <a:buSzPct val="100000"/>
               <a:buFont typeface="+mj-lt"/>
-              <a:buAutoNum type="arabicPeriod" startAt="1"/>
+              <a:buAutoNum type="arabicPeriod"/>
             </a:pPr>
             <a:r>
               <a:rPr lang="en-US" sz="1000" dirty="0">
@@ -10898,7 +11334,7 @@
             <a:pPr marL="342900" indent="-342900">
               <a:buSzPct val="100000"/>
               <a:buFont typeface="+mj-lt"/>
-              <a:buAutoNum type="arabicPeriod" startAt="1"/>
+              <a:buAutoNum type="arabicPeriod"/>
             </a:pPr>
             <a:r>
               <a:rPr lang="en-US" sz="1000" dirty="0">
@@ -10914,7 +11350,7 @@
             <a:pPr marL="342900" indent="-342900">
               <a:buSzPct val="100000"/>
               <a:buFont typeface="+mj-lt"/>
-              <a:buAutoNum type="arabicPeriod" startAt="1"/>
+              <a:buAutoNum type="arabicPeriod"/>
             </a:pPr>
             <a:r>
               <a:rPr lang="en-US" sz="1000" dirty="0">
@@ -10977,6 +11413,13 @@
             <a:prstDash val="solid"/>
           </a:ln>
         </p:spPr>
+        <p:txBody>
+          <a:bodyPr/>
+          <a:lstStyle/>
+          <a:p>
+            <a:endParaRPr lang="en-US"/>
+          </a:p>
+        </p:txBody>
       </p:sp>
       <p:sp>
         <p:nvSpPr>
@@ -11002,6 +11445,13 @@
             <a:prstDash val="solid"/>
           </a:ln>
         </p:spPr>
+        <p:txBody>
+          <a:bodyPr/>
+          <a:lstStyle/>
+          <a:p>
+            <a:endParaRPr lang="en-US"/>
+          </a:p>
+        </p:txBody>
       </p:sp>
       <p:sp>
         <p:nvSpPr>
@@ -11027,6 +11477,13 @@
             <a:prstDash val="solid"/>
           </a:ln>
         </p:spPr>
+        <p:txBody>
+          <a:bodyPr/>
+          <a:lstStyle/>
+          <a:p>
+            <a:endParaRPr lang="en-US"/>
+          </a:p>
+        </p:txBody>
       </p:sp>
       <p:sp>
         <p:nvSpPr>
@@ -11054,6 +11511,13 @@
             <a:prstDash val="solid"/>
           </a:ln>
         </p:spPr>
+        <p:txBody>
+          <a:bodyPr/>
+          <a:lstStyle/>
+          <a:p>
+            <a:endParaRPr lang="en-US"/>
+          </a:p>
+        </p:txBody>
       </p:sp>
       <p:sp>
         <p:nvSpPr>
@@ -11081,6 +11545,13 @@
             <a:prstDash val="solid"/>
           </a:ln>
         </p:spPr>
+        <p:txBody>
+          <a:bodyPr/>
+          <a:lstStyle/>
+          <a:p>
+            <a:endParaRPr lang="en-US"/>
+          </a:p>
+        </p:txBody>
       </p:sp>
       <p:sp>
         <p:nvSpPr>
@@ -11106,6 +11577,13 @@
             <a:prstDash val="solid"/>
           </a:ln>
         </p:spPr>
+        <p:txBody>
+          <a:bodyPr/>
+          <a:lstStyle/>
+          <a:p>
+            <a:endParaRPr lang="en-US"/>
+          </a:p>
+        </p:txBody>
       </p:sp>
       <p:sp>
         <p:nvSpPr>
@@ -11128,7 +11606,7 @@
           <a:bodyPr wrap="square" lIns="0" tIns="0" rIns="0" bIns="0" rtlCol="0" anchor="ctr"/>
           <a:lstStyle/>
           <a:p>
-            <a:pPr algn="ctr" indent="0" marL="0">
+            <a:pPr marL="0" indent="0" algn="ctr">
               <a:buNone/>
             </a:pPr>
             <a:r>
@@ -11164,11 +11642,11 @@
           <a:bodyPr wrap="square" lIns="0" tIns="0" rIns="0" bIns="0" rtlCol="0" anchor="ctr"/>
           <a:lstStyle/>
           <a:p>
-            <a:pPr indent="0" marL="0">
+            <a:pPr marL="0" indent="0">
               <a:buNone/>
             </a:pPr>
             <a:r>
-              <a:rPr lang="en-US" sz="1000" b="1" spc="200" kern="0" dirty="0">
+              <a:rPr lang="en-US" sz="1000" b="1" kern="0" spc="200" dirty="0">
                 <a:solidFill>
                   <a:srgbClr val="F5C26B"/>
                 </a:solidFill>
@@ -11200,7 +11678,7 @@
           <a:bodyPr wrap="square" lIns="0" tIns="0" rIns="0" bIns="0" rtlCol="0" anchor="ctr"/>
           <a:lstStyle/>
           <a:p>
-            <a:pPr indent="0" marL="0">
+            <a:pPr marL="0" indent="0">
               <a:buNone/>
             </a:pPr>
             <a:r>
@@ -11239,7 +11717,7 @@
           <a:bodyPr wrap="square" lIns="0" tIns="0" rIns="0" bIns="0" rtlCol="0" anchor="ctr"/>
           <a:lstStyle/>
           <a:p>
-            <a:pPr indent="0" marL="0">
+            <a:pPr marL="0" indent="0">
               <a:buNone/>
             </a:pPr>
             <a:r>
@@ -11280,6 +11758,13 @@
             <a:prstDash val="solid"/>
           </a:ln>
         </p:spPr>
+        <p:txBody>
+          <a:bodyPr/>
+          <a:lstStyle/>
+          <a:p>
+            <a:endParaRPr lang="en-US"/>
+          </a:p>
+        </p:txBody>
       </p:sp>
       <p:sp>
         <p:nvSpPr>
@@ -11302,7 +11787,7 @@
           <a:bodyPr wrap="square" lIns="0" tIns="0" rIns="0" bIns="0" rtlCol="0" anchor="ctr"/>
           <a:lstStyle/>
           <a:p>
-            <a:pPr indent="0" marL="0">
+            <a:pPr marL="0" indent="0">
               <a:buNone/>
             </a:pPr>
             <a:r>
@@ -11410,6 +11895,13 @@
             <a:prstDash val="solid"/>
           </a:ln>
         </p:spPr>
+        <p:txBody>
+          <a:bodyPr/>
+          <a:lstStyle/>
+          <a:p>
+            <a:endParaRPr lang="en-US"/>
+          </a:p>
+        </p:txBody>
       </p:sp>
       <p:sp>
         <p:nvSpPr>
@@ -11432,11 +11924,11 @@
           <a:bodyPr wrap="square" lIns="0" tIns="0" rIns="0" bIns="0" rtlCol="0" anchor="ctr"/>
           <a:lstStyle/>
           <a:p>
-            <a:pPr indent="0" marL="0">
+            <a:pPr marL="0" indent="0">
               <a:buNone/>
             </a:pPr>
             <a:r>
-              <a:rPr lang="en-US" sz="1000" b="1" spc="200" kern="0" dirty="0">
+              <a:rPr lang="en-US" sz="1000" b="1" kern="0" spc="200" dirty="0">
                 <a:solidFill>
                   <a:srgbClr val="F5C26B"/>
                 </a:solidFill>
@@ -11471,7 +11963,7 @@
             <a:pPr marL="342900" indent="-342900">
               <a:buSzPct val="100000"/>
               <a:buFont typeface="+mj-lt"/>
-              <a:buAutoNum type="arabicPeriod" startAt="1"/>
+              <a:buAutoNum type="arabicPeriod"/>
             </a:pPr>
             <a:r>
               <a:rPr lang="en-US" sz="1000" dirty="0">
@@ -11487,7 +11979,7 @@
             <a:pPr marL="342900" indent="-342900">
               <a:buSzPct val="100000"/>
               <a:buFont typeface="+mj-lt"/>
-              <a:buAutoNum type="arabicPeriod" startAt="1"/>
+              <a:buAutoNum type="arabicPeriod"/>
             </a:pPr>
             <a:r>
               <a:rPr lang="en-US" sz="1000" dirty="0">
@@ -11503,7 +11995,7 @@
             <a:pPr marL="342900" indent="-342900">
               <a:buSzPct val="100000"/>
               <a:buFont typeface="+mj-lt"/>
-              <a:buAutoNum type="arabicPeriod" startAt="1"/>
+              <a:buAutoNum type="arabicPeriod"/>
             </a:pPr>
             <a:r>
               <a:rPr lang="en-US" sz="1000" dirty="0">
@@ -11566,6 +12058,13 @@
             <a:prstDash val="solid"/>
           </a:ln>
         </p:spPr>
+        <p:txBody>
+          <a:bodyPr/>
+          <a:lstStyle/>
+          <a:p>
+            <a:endParaRPr lang="en-US"/>
+          </a:p>
+        </p:txBody>
       </p:sp>
       <p:sp>
         <p:nvSpPr>
@@ -11591,6 +12090,13 @@
             <a:prstDash val="solid"/>
           </a:ln>
         </p:spPr>
+        <p:txBody>
+          <a:bodyPr/>
+          <a:lstStyle/>
+          <a:p>
+            <a:endParaRPr lang="en-US"/>
+          </a:p>
+        </p:txBody>
       </p:sp>
       <p:sp>
         <p:nvSpPr>
@@ -11616,6 +12122,13 @@
             <a:prstDash val="solid"/>
           </a:ln>
         </p:spPr>
+        <p:txBody>
+          <a:bodyPr/>
+          <a:lstStyle/>
+          <a:p>
+            <a:endParaRPr lang="en-US"/>
+          </a:p>
+        </p:txBody>
       </p:sp>
       <p:sp>
         <p:nvSpPr>
@@ -11643,6 +12156,13 @@
             <a:prstDash val="solid"/>
           </a:ln>
         </p:spPr>
+        <p:txBody>
+          <a:bodyPr/>
+          <a:lstStyle/>
+          <a:p>
+            <a:endParaRPr lang="en-US"/>
+          </a:p>
+        </p:txBody>
       </p:sp>
       <p:sp>
         <p:nvSpPr>
@@ -11670,6 +12190,13 @@
             <a:prstDash val="solid"/>
           </a:ln>
         </p:spPr>
+        <p:txBody>
+          <a:bodyPr/>
+          <a:lstStyle/>
+          <a:p>
+            <a:endParaRPr lang="en-US"/>
+          </a:p>
+        </p:txBody>
       </p:sp>
       <p:sp>
         <p:nvSpPr>
@@ -11695,6 +12222,13 @@
             <a:prstDash val="solid"/>
           </a:ln>
         </p:spPr>
+        <p:txBody>
+          <a:bodyPr/>
+          <a:lstStyle/>
+          <a:p>
+            <a:endParaRPr lang="en-US"/>
+          </a:p>
+        </p:txBody>
       </p:sp>
       <p:sp>
         <p:nvSpPr>
@@ -11717,7 +12251,7 @@
           <a:bodyPr wrap="square" lIns="0" tIns="0" rIns="0" bIns="0" rtlCol="0" anchor="ctr"/>
           <a:lstStyle/>
           <a:p>
-            <a:pPr algn="ctr" indent="0" marL="0">
+            <a:pPr marL="0" indent="0" algn="ctr">
               <a:buNone/>
             </a:pPr>
             <a:r>
@@ -11753,11 +12287,11 @@
           <a:bodyPr wrap="square" lIns="0" tIns="0" rIns="0" bIns="0" rtlCol="0" anchor="ctr"/>
           <a:lstStyle/>
           <a:p>
-            <a:pPr indent="0" marL="0">
+            <a:pPr marL="0" indent="0">
               <a:buNone/>
             </a:pPr>
             <a:r>
-              <a:rPr lang="en-US" sz="1000" b="1" spc="200" kern="0" dirty="0">
+              <a:rPr lang="en-US" sz="1000" b="1" kern="0" spc="200" dirty="0">
                 <a:solidFill>
                   <a:srgbClr val="F5C26B"/>
                 </a:solidFill>
@@ -11789,7 +12323,7 @@
           <a:bodyPr wrap="square" lIns="0" tIns="0" rIns="0" bIns="0" rtlCol="0" anchor="ctr"/>
           <a:lstStyle/>
           <a:p>
-            <a:pPr indent="0" marL="0">
+            <a:pPr marL="0" indent="0">
               <a:buNone/>
             </a:pPr>
             <a:r>
@@ -11828,7 +12362,7 @@
           <a:bodyPr wrap="square" lIns="0" tIns="0" rIns="0" bIns="0" rtlCol="0" anchor="ctr"/>
           <a:lstStyle/>
           <a:p>
-            <a:pPr indent="0" marL="0">
+            <a:pPr marL="0" indent="0">
               <a:buNone/>
             </a:pPr>
             <a:r>
@@ -11869,6 +12403,13 @@
             <a:prstDash val="solid"/>
           </a:ln>
         </p:spPr>
+        <p:txBody>
+          <a:bodyPr/>
+          <a:lstStyle/>
+          <a:p>
+            <a:endParaRPr lang="en-US"/>
+          </a:p>
+        </p:txBody>
       </p:sp>
       <p:sp>
         <p:nvSpPr>
@@ -11891,7 +12432,7 @@
           <a:bodyPr wrap="square" lIns="0" tIns="0" rIns="0" bIns="0" rtlCol="0" anchor="ctr"/>
           <a:lstStyle/>
           <a:p>
-            <a:pPr indent="0" marL="0">
+            <a:pPr marL="0" indent="0">
               <a:buNone/>
             </a:pPr>
             <a:r>
@@ -11999,6 +12540,13 @@
             <a:prstDash val="solid"/>
           </a:ln>
         </p:spPr>
+        <p:txBody>
+          <a:bodyPr/>
+          <a:lstStyle/>
+          <a:p>
+            <a:endParaRPr lang="en-US"/>
+          </a:p>
+        </p:txBody>
       </p:sp>
       <p:sp>
         <p:nvSpPr>
@@ -12021,11 +12569,11 @@
           <a:bodyPr wrap="square" lIns="0" tIns="0" rIns="0" bIns="0" rtlCol="0" anchor="ctr"/>
           <a:lstStyle/>
           <a:p>
-            <a:pPr indent="0" marL="0">
+            <a:pPr marL="0" indent="0">
               <a:buNone/>
             </a:pPr>
             <a:r>
-              <a:rPr lang="en-US" sz="1000" b="1" spc="200" kern="0" dirty="0">
+              <a:rPr lang="en-US" sz="1000" b="1" kern="0" spc="200" dirty="0">
                 <a:solidFill>
                   <a:srgbClr val="F5C26B"/>
                 </a:solidFill>
@@ -12060,7 +12608,7 @@
             <a:pPr marL="342900" indent="-342900">
               <a:buSzPct val="100000"/>
               <a:buFont typeface="+mj-lt"/>
-              <a:buAutoNum type="arabicPeriod" startAt="1"/>
+              <a:buAutoNum type="arabicPeriod"/>
             </a:pPr>
             <a:r>
               <a:rPr lang="en-US" sz="1000" dirty="0">
@@ -12076,7 +12624,7 @@
             <a:pPr marL="342900" indent="-342900">
               <a:buSzPct val="100000"/>
               <a:buFont typeface="+mj-lt"/>
-              <a:buAutoNum type="arabicPeriod" startAt="1"/>
+              <a:buAutoNum type="arabicPeriod"/>
             </a:pPr>
             <a:r>
               <a:rPr lang="en-US" sz="1000" dirty="0">
@@ -12092,7 +12640,7 @@
             <a:pPr marL="342900" indent="-342900">
               <a:buSzPct val="100000"/>
               <a:buFont typeface="+mj-lt"/>
-              <a:buAutoNum type="arabicPeriod" startAt="1"/>
+              <a:buAutoNum type="arabicPeriod"/>
             </a:pPr>
             <a:r>
               <a:rPr lang="en-US" sz="1000" dirty="0">
@@ -12155,6 +12703,13 @@
             <a:prstDash val="solid"/>
           </a:ln>
         </p:spPr>
+        <p:txBody>
+          <a:bodyPr/>
+          <a:lstStyle/>
+          <a:p>
+            <a:endParaRPr lang="en-US"/>
+          </a:p>
+        </p:txBody>
       </p:sp>
       <p:sp>
         <p:nvSpPr>
@@ -12180,6 +12735,13 @@
             <a:prstDash val="solid"/>
           </a:ln>
         </p:spPr>
+        <p:txBody>
+          <a:bodyPr/>
+          <a:lstStyle/>
+          <a:p>
+            <a:endParaRPr lang="en-US"/>
+          </a:p>
+        </p:txBody>
       </p:sp>
       <p:sp>
         <p:nvSpPr>
@@ -12205,6 +12767,13 @@
             <a:prstDash val="solid"/>
           </a:ln>
         </p:spPr>
+        <p:txBody>
+          <a:bodyPr/>
+          <a:lstStyle/>
+          <a:p>
+            <a:endParaRPr lang="en-US"/>
+          </a:p>
+        </p:txBody>
       </p:sp>
       <p:sp>
         <p:nvSpPr>
@@ -12232,6 +12801,13 @@
             <a:prstDash val="solid"/>
           </a:ln>
         </p:spPr>
+        <p:txBody>
+          <a:bodyPr/>
+          <a:lstStyle/>
+          <a:p>
+            <a:endParaRPr lang="en-US"/>
+          </a:p>
+        </p:txBody>
       </p:sp>
       <p:sp>
         <p:nvSpPr>
@@ -12259,6 +12835,13 @@
             <a:prstDash val="solid"/>
           </a:ln>
         </p:spPr>
+        <p:txBody>
+          <a:bodyPr/>
+          <a:lstStyle/>
+          <a:p>
+            <a:endParaRPr lang="en-US"/>
+          </a:p>
+        </p:txBody>
       </p:sp>
       <p:sp>
         <p:nvSpPr>
@@ -12284,6 +12867,13 @@
             <a:prstDash val="solid"/>
           </a:ln>
         </p:spPr>
+        <p:txBody>
+          <a:bodyPr/>
+          <a:lstStyle/>
+          <a:p>
+            <a:endParaRPr lang="en-US"/>
+          </a:p>
+        </p:txBody>
       </p:sp>
       <p:sp>
         <p:nvSpPr>
@@ -12306,7 +12896,7 @@
           <a:bodyPr wrap="square" lIns="0" tIns="0" rIns="0" bIns="0" rtlCol="0" anchor="ctr"/>
           <a:lstStyle/>
           <a:p>
-            <a:pPr algn="ctr" indent="0" marL="0">
+            <a:pPr marL="0" indent="0" algn="ctr">
               <a:buNone/>
             </a:pPr>
             <a:r>
@@ -12342,11 +12932,11 @@
           <a:bodyPr wrap="square" lIns="0" tIns="0" rIns="0" bIns="0" rtlCol="0" anchor="ctr"/>
           <a:lstStyle/>
           <a:p>
-            <a:pPr indent="0" marL="0">
+            <a:pPr marL="0" indent="0">
               <a:buNone/>
             </a:pPr>
             <a:r>
-              <a:rPr lang="en-US" sz="1000" b="1" spc="200" kern="0" dirty="0">
+              <a:rPr lang="en-US" sz="1000" b="1" kern="0" spc="200" dirty="0">
                 <a:solidFill>
                   <a:srgbClr val="F5C26B"/>
                 </a:solidFill>
@@ -12378,7 +12968,7 @@
           <a:bodyPr wrap="square" lIns="0" tIns="0" rIns="0" bIns="0" rtlCol="0" anchor="ctr"/>
           <a:lstStyle/>
           <a:p>
-            <a:pPr indent="0" marL="0">
+            <a:pPr marL="0" indent="0">
               <a:buNone/>
             </a:pPr>
             <a:r>
@@ -12417,7 +13007,7 @@
           <a:bodyPr wrap="square" lIns="0" tIns="0" rIns="0" bIns="0" rtlCol="0" anchor="ctr"/>
           <a:lstStyle/>
           <a:p>
-            <a:pPr indent="0" marL="0">
+            <a:pPr marL="0" indent="0">
               <a:buNone/>
             </a:pPr>
             <a:r>
@@ -12458,6 +13048,13 @@
             <a:prstDash val="solid"/>
           </a:ln>
         </p:spPr>
+        <p:txBody>
+          <a:bodyPr/>
+          <a:lstStyle/>
+          <a:p>
+            <a:endParaRPr lang="en-US"/>
+          </a:p>
+        </p:txBody>
       </p:sp>
       <p:sp>
         <p:nvSpPr>
@@ -12480,7 +13077,7 @@
           <a:bodyPr wrap="square" lIns="0" tIns="0" rIns="0" bIns="0" rtlCol="0" anchor="ctr"/>
           <a:lstStyle/>
           <a:p>
-            <a:pPr indent="0" marL="0">
+            <a:pPr marL="0" indent="0">
               <a:buNone/>
             </a:pPr>
             <a:r>
@@ -12588,6 +13185,13 @@
             <a:prstDash val="solid"/>
           </a:ln>
         </p:spPr>
+        <p:txBody>
+          <a:bodyPr/>
+          <a:lstStyle/>
+          <a:p>
+            <a:endParaRPr lang="en-US"/>
+          </a:p>
+        </p:txBody>
       </p:sp>
       <p:sp>
         <p:nvSpPr>
@@ -12610,11 +13214,11 @@
           <a:bodyPr wrap="square" lIns="0" tIns="0" rIns="0" bIns="0" rtlCol="0" anchor="ctr"/>
           <a:lstStyle/>
           <a:p>
-            <a:pPr indent="0" marL="0">
+            <a:pPr marL="0" indent="0">
               <a:buNone/>
             </a:pPr>
             <a:r>
-              <a:rPr lang="en-US" sz="1000" b="1" spc="200" kern="0" dirty="0">
+              <a:rPr lang="en-US" sz="1000" b="1" kern="0" spc="200" dirty="0">
                 <a:solidFill>
                   <a:srgbClr val="F5C26B"/>
                 </a:solidFill>
@@ -12649,7 +13253,7 @@
             <a:pPr marL="342900" indent="-342900">
               <a:buSzPct val="100000"/>
               <a:buFont typeface="+mj-lt"/>
-              <a:buAutoNum type="arabicPeriod" startAt="1"/>
+              <a:buAutoNum type="arabicPeriod"/>
             </a:pPr>
             <a:r>
               <a:rPr lang="en-US" sz="1000" dirty="0">
@@ -12665,7 +13269,7 @@
             <a:pPr marL="342900" indent="-342900">
               <a:buSzPct val="100000"/>
               <a:buFont typeface="+mj-lt"/>
-              <a:buAutoNum type="arabicPeriod" startAt="1"/>
+              <a:buAutoNum type="arabicPeriod"/>
             </a:pPr>
             <a:r>
               <a:rPr lang="en-US" sz="1000" dirty="0">
@@ -12681,7 +13285,7 @@
             <a:pPr marL="342900" indent="-342900">
               <a:buSzPct val="100000"/>
               <a:buFont typeface="+mj-lt"/>
-              <a:buAutoNum type="arabicPeriod" startAt="1"/>
+              <a:buAutoNum type="arabicPeriod"/>
             </a:pPr>
             <a:r>
               <a:rPr lang="en-US" sz="1000" dirty="0">
@@ -12744,6 +13348,13 @@
             <a:prstDash val="solid"/>
           </a:ln>
         </p:spPr>
+        <p:txBody>
+          <a:bodyPr/>
+          <a:lstStyle/>
+          <a:p>
+            <a:endParaRPr lang="en-US"/>
+          </a:p>
+        </p:txBody>
       </p:sp>
       <p:sp>
         <p:nvSpPr>
@@ -12769,6 +13380,13 @@
             <a:prstDash val="solid"/>
           </a:ln>
         </p:spPr>
+        <p:txBody>
+          <a:bodyPr/>
+          <a:lstStyle/>
+          <a:p>
+            <a:endParaRPr lang="en-US"/>
+          </a:p>
+        </p:txBody>
       </p:sp>
       <p:sp>
         <p:nvSpPr>
@@ -12794,6 +13412,13 @@
             <a:prstDash val="solid"/>
           </a:ln>
         </p:spPr>
+        <p:txBody>
+          <a:bodyPr/>
+          <a:lstStyle/>
+          <a:p>
+            <a:endParaRPr lang="en-US"/>
+          </a:p>
+        </p:txBody>
       </p:sp>
       <p:sp>
         <p:nvSpPr>
@@ -12821,6 +13446,13 @@
             <a:prstDash val="solid"/>
           </a:ln>
         </p:spPr>
+        <p:txBody>
+          <a:bodyPr/>
+          <a:lstStyle/>
+          <a:p>
+            <a:endParaRPr lang="en-US"/>
+          </a:p>
+        </p:txBody>
       </p:sp>
       <p:sp>
         <p:nvSpPr>
@@ -12848,6 +13480,13 @@
             <a:prstDash val="solid"/>
           </a:ln>
         </p:spPr>
+        <p:txBody>
+          <a:bodyPr/>
+          <a:lstStyle/>
+          <a:p>
+            <a:endParaRPr lang="en-US"/>
+          </a:p>
+        </p:txBody>
       </p:sp>
       <p:sp>
         <p:nvSpPr>
@@ -12870,7 +13509,7 @@
           <a:bodyPr wrap="square" lIns="0" tIns="0" rIns="0" bIns="0" rtlCol="0" anchor="ctr"/>
           <a:lstStyle/>
           <a:p>
-            <a:pPr algn="ctr" indent="0" marL="0">
+            <a:pPr marL="0" indent="0" algn="ctr">
               <a:buNone/>
             </a:pPr>
             <a:r>
@@ -12909,7 +13548,7 @@
           <a:bodyPr wrap="square" lIns="0" tIns="0" rIns="0" bIns="0" rtlCol="0" anchor="ctr"/>
           <a:lstStyle/>
           <a:p>
-            <a:pPr algn="ctr" indent="0" marL="0">
+            <a:pPr marL="0" indent="0" algn="ctr">
               <a:buNone/>
             </a:pPr>
             <a:r>
@@ -12946,6 +13585,13 @@
             <a:prstDash val="solid"/>
           </a:ln>
         </p:spPr>
+        <p:txBody>
+          <a:bodyPr/>
+          <a:lstStyle/>
+          <a:p>
+            <a:endParaRPr lang="en-US"/>
+          </a:p>
+        </p:txBody>
       </p:sp>
     </p:spTree>
   </p:cSld>
@@ -12996,6 +13642,13 @@
             <a:prstDash val="solid"/>
           </a:ln>
         </p:spPr>
+        <p:txBody>
+          <a:bodyPr/>
+          <a:lstStyle/>
+          <a:p>
+            <a:endParaRPr lang="en-US"/>
+          </a:p>
+        </p:txBody>
       </p:sp>
       <p:sp>
         <p:nvSpPr>
@@ -13021,6 +13674,13 @@
             <a:prstDash val="solid"/>
           </a:ln>
         </p:spPr>
+        <p:txBody>
+          <a:bodyPr/>
+          <a:lstStyle/>
+          <a:p>
+            <a:endParaRPr lang="en-US"/>
+          </a:p>
+        </p:txBody>
       </p:sp>
       <p:sp>
         <p:nvSpPr>
@@ -13046,6 +13706,13 @@
             <a:prstDash val="solid"/>
           </a:ln>
         </p:spPr>
+        <p:txBody>
+          <a:bodyPr/>
+          <a:lstStyle/>
+          <a:p>
+            <a:endParaRPr lang="en-US"/>
+          </a:p>
+        </p:txBody>
       </p:sp>
       <p:sp>
         <p:nvSpPr>
@@ -13073,6 +13740,13 @@
             <a:prstDash val="solid"/>
           </a:ln>
         </p:spPr>
+        <p:txBody>
+          <a:bodyPr/>
+          <a:lstStyle/>
+          <a:p>
+            <a:endParaRPr lang="en-US"/>
+          </a:p>
+        </p:txBody>
       </p:sp>
       <p:sp>
         <p:nvSpPr>
@@ -13100,6 +13774,13 @@
             <a:prstDash val="solid"/>
           </a:ln>
         </p:spPr>
+        <p:txBody>
+          <a:bodyPr/>
+          <a:lstStyle/>
+          <a:p>
+            <a:endParaRPr lang="en-US"/>
+          </a:p>
+        </p:txBody>
       </p:sp>
       <p:sp>
         <p:nvSpPr>
@@ -13125,6 +13806,13 @@
             <a:prstDash val="solid"/>
           </a:ln>
         </p:spPr>
+        <p:txBody>
+          <a:bodyPr/>
+          <a:lstStyle/>
+          <a:p>
+            <a:endParaRPr lang="en-US"/>
+          </a:p>
+        </p:txBody>
       </p:sp>
       <p:sp>
         <p:nvSpPr>
@@ -13147,7 +13835,7 @@
           <a:bodyPr wrap="square" lIns="0" tIns="0" rIns="0" bIns="0" rtlCol="0" anchor="ctr"/>
           <a:lstStyle/>
           <a:p>
-            <a:pPr algn="ctr" indent="0" marL="0">
+            <a:pPr marL="0" indent="0" algn="ctr">
               <a:buNone/>
             </a:pPr>
             <a:r>
@@ -13183,11 +13871,11 @@
           <a:bodyPr wrap="square" lIns="0" tIns="0" rIns="0" bIns="0" rtlCol="0" anchor="ctr"/>
           <a:lstStyle/>
           <a:p>
-            <a:pPr indent="0" marL="0">
+            <a:pPr marL="0" indent="0">
               <a:buNone/>
             </a:pPr>
             <a:r>
-              <a:rPr lang="en-US" sz="1000" b="1" spc="200" kern="0" dirty="0">
+              <a:rPr lang="en-US" sz="1000" b="1" kern="0" spc="200" dirty="0">
                 <a:solidFill>
                   <a:srgbClr val="F5C26B"/>
                 </a:solidFill>
@@ -13219,7 +13907,7 @@
           <a:bodyPr wrap="square" lIns="0" tIns="0" rIns="0" bIns="0" rtlCol="0" anchor="ctr"/>
           <a:lstStyle/>
           <a:p>
-            <a:pPr indent="0" marL="0">
+            <a:pPr marL="0" indent="0">
               <a:buNone/>
             </a:pPr>
             <a:r>
@@ -13258,7 +13946,7 @@
           <a:bodyPr wrap="square" lIns="0" tIns="0" rIns="0" bIns="0" rtlCol="0" anchor="ctr"/>
           <a:lstStyle/>
           <a:p>
-            <a:pPr indent="0" marL="0">
+            <a:pPr marL="0" indent="0">
               <a:buNone/>
             </a:pPr>
             <a:r>
@@ -13299,6 +13987,13 @@
             <a:prstDash val="solid"/>
           </a:ln>
         </p:spPr>
+        <p:txBody>
+          <a:bodyPr/>
+          <a:lstStyle/>
+          <a:p>
+            <a:endParaRPr lang="en-US"/>
+          </a:p>
+        </p:txBody>
       </p:sp>
       <p:sp>
         <p:nvSpPr>
@@ -13321,7 +14016,7 @@
           <a:bodyPr wrap="square" lIns="0" tIns="0" rIns="0" bIns="0" rtlCol="0" anchor="ctr"/>
           <a:lstStyle/>
           <a:p>
-            <a:pPr indent="0" marL="0">
+            <a:pPr marL="0" indent="0">
               <a:buNone/>
             </a:pPr>
             <a:r>
@@ -13429,6 +14124,13 @@
             <a:prstDash val="solid"/>
           </a:ln>
         </p:spPr>
+        <p:txBody>
+          <a:bodyPr/>
+          <a:lstStyle/>
+          <a:p>
+            <a:endParaRPr lang="en-US"/>
+          </a:p>
+        </p:txBody>
       </p:sp>
       <p:sp>
         <p:nvSpPr>
@@ -13451,11 +14153,11 @@
           <a:bodyPr wrap="square" lIns="0" tIns="0" rIns="0" bIns="0" rtlCol="0" anchor="ctr"/>
           <a:lstStyle/>
           <a:p>
-            <a:pPr indent="0" marL="0">
+            <a:pPr marL="0" indent="0">
               <a:buNone/>
             </a:pPr>
             <a:r>
-              <a:rPr lang="en-US" sz="1000" b="1" spc="200" kern="0" dirty="0">
+              <a:rPr lang="en-US" sz="1000" b="1" kern="0" spc="200" dirty="0">
                 <a:solidFill>
                   <a:srgbClr val="F5C26B"/>
                 </a:solidFill>
@@ -13490,7 +14192,7 @@
             <a:pPr marL="342900" indent="-342900">
               <a:buSzPct val="100000"/>
               <a:buFont typeface="+mj-lt"/>
-              <a:buAutoNum type="arabicPeriod" startAt="1"/>
+              <a:buAutoNum type="arabicPeriod"/>
             </a:pPr>
             <a:r>
               <a:rPr lang="en-US" sz="1000" dirty="0">
@@ -13506,7 +14208,7 @@
             <a:pPr marL="342900" indent="-342900">
               <a:buSzPct val="100000"/>
               <a:buFont typeface="+mj-lt"/>
-              <a:buAutoNum type="arabicPeriod" startAt="1"/>
+              <a:buAutoNum type="arabicPeriod"/>
             </a:pPr>
             <a:r>
               <a:rPr lang="en-US" sz="1000" dirty="0">
@@ -13522,7 +14224,7 @@
             <a:pPr marL="342900" indent="-342900">
               <a:buSzPct val="100000"/>
               <a:buFont typeface="+mj-lt"/>
-              <a:buAutoNum type="arabicPeriod" startAt="1"/>
+              <a:buAutoNum type="arabicPeriod"/>
             </a:pPr>
             <a:r>
               <a:rPr lang="en-US" sz="1000" dirty="0">
@@ -13585,6 +14287,13 @@
             <a:prstDash val="solid"/>
           </a:ln>
         </p:spPr>
+        <p:txBody>
+          <a:bodyPr/>
+          <a:lstStyle/>
+          <a:p>
+            <a:endParaRPr lang="en-US"/>
+          </a:p>
+        </p:txBody>
       </p:sp>
       <p:sp>
         <p:nvSpPr>
@@ -13610,6 +14319,13 @@
             <a:prstDash val="solid"/>
           </a:ln>
         </p:spPr>
+        <p:txBody>
+          <a:bodyPr/>
+          <a:lstStyle/>
+          <a:p>
+            <a:endParaRPr lang="en-US"/>
+          </a:p>
+        </p:txBody>
       </p:sp>
       <p:sp>
         <p:nvSpPr>
@@ -13635,6 +14351,13 @@
             <a:prstDash val="solid"/>
           </a:ln>
         </p:spPr>
+        <p:txBody>
+          <a:bodyPr/>
+          <a:lstStyle/>
+          <a:p>
+            <a:endParaRPr lang="en-US"/>
+          </a:p>
+        </p:txBody>
       </p:sp>
       <p:sp>
         <p:nvSpPr>
@@ -13662,6 +14385,13 @@
             <a:prstDash val="solid"/>
           </a:ln>
         </p:spPr>
+        <p:txBody>
+          <a:bodyPr/>
+          <a:lstStyle/>
+          <a:p>
+            <a:endParaRPr lang="en-US"/>
+          </a:p>
+        </p:txBody>
       </p:sp>
       <p:sp>
         <p:nvSpPr>
@@ -13689,6 +14419,13 @@
             <a:prstDash val="solid"/>
           </a:ln>
         </p:spPr>
+        <p:txBody>
+          <a:bodyPr/>
+          <a:lstStyle/>
+          <a:p>
+            <a:endParaRPr lang="en-US"/>
+          </a:p>
+        </p:txBody>
       </p:sp>
       <p:sp>
         <p:nvSpPr>
@@ -13714,6 +14451,13 @@
             <a:prstDash val="solid"/>
           </a:ln>
         </p:spPr>
+        <p:txBody>
+          <a:bodyPr/>
+          <a:lstStyle/>
+          <a:p>
+            <a:endParaRPr lang="en-US"/>
+          </a:p>
+        </p:txBody>
       </p:sp>
       <p:sp>
         <p:nvSpPr>
@@ -13736,7 +14480,7 @@
           <a:bodyPr wrap="square" lIns="0" tIns="0" rIns="0" bIns="0" rtlCol="0" anchor="ctr"/>
           <a:lstStyle/>
           <a:p>
-            <a:pPr algn="ctr" indent="0" marL="0">
+            <a:pPr marL="0" indent="0" algn="ctr">
               <a:buNone/>
             </a:pPr>
             <a:r>
@@ -13772,11 +14516,11 @@
           <a:bodyPr wrap="square" lIns="0" tIns="0" rIns="0" bIns="0" rtlCol="0" anchor="ctr"/>
           <a:lstStyle/>
           <a:p>
-            <a:pPr indent="0" marL="0">
+            <a:pPr marL="0" indent="0">
               <a:buNone/>
             </a:pPr>
             <a:r>
-              <a:rPr lang="en-US" sz="1000" b="1" spc="200" kern="0" dirty="0">
+              <a:rPr lang="en-US" sz="1000" b="1" kern="0" spc="200" dirty="0">
                 <a:solidFill>
                   <a:srgbClr val="F5C26B"/>
                 </a:solidFill>
@@ -13808,7 +14552,7 @@
           <a:bodyPr wrap="square" lIns="0" tIns="0" rIns="0" bIns="0" rtlCol="0" anchor="ctr"/>
           <a:lstStyle/>
           <a:p>
-            <a:pPr indent="0" marL="0">
+            <a:pPr marL="0" indent="0">
               <a:buNone/>
             </a:pPr>
             <a:r>
@@ -13847,7 +14591,7 @@
           <a:bodyPr wrap="square" lIns="0" tIns="0" rIns="0" bIns="0" rtlCol="0" anchor="ctr"/>
           <a:lstStyle/>
           <a:p>
-            <a:pPr indent="0" marL="0">
+            <a:pPr marL="0" indent="0">
               <a:buNone/>
             </a:pPr>
             <a:r>
@@ -13888,6 +14632,13 @@
             <a:prstDash val="solid"/>
           </a:ln>
         </p:spPr>
+        <p:txBody>
+          <a:bodyPr/>
+          <a:lstStyle/>
+          <a:p>
+            <a:endParaRPr lang="en-US"/>
+          </a:p>
+        </p:txBody>
       </p:sp>
       <p:sp>
         <p:nvSpPr>
@@ -13910,7 +14661,7 @@
           <a:bodyPr wrap="square" lIns="0" tIns="0" rIns="0" bIns="0" rtlCol="0" anchor="ctr"/>
           <a:lstStyle/>
           <a:p>
-            <a:pPr indent="0" marL="0">
+            <a:pPr marL="0" indent="0">
               <a:buNone/>
             </a:pPr>
             <a:r>
@@ -14018,6 +14769,13 @@
             <a:prstDash val="solid"/>
           </a:ln>
         </p:spPr>
+        <p:txBody>
+          <a:bodyPr/>
+          <a:lstStyle/>
+          <a:p>
+            <a:endParaRPr lang="en-US"/>
+          </a:p>
+        </p:txBody>
       </p:sp>
       <p:sp>
         <p:nvSpPr>
@@ -14040,11 +14798,11 @@
           <a:bodyPr wrap="square" lIns="0" tIns="0" rIns="0" bIns="0" rtlCol="0" anchor="ctr"/>
           <a:lstStyle/>
           <a:p>
-            <a:pPr indent="0" marL="0">
+            <a:pPr marL="0" indent="0">
               <a:buNone/>
             </a:pPr>
             <a:r>
-              <a:rPr lang="en-US" sz="1000" b="1" spc="200" kern="0" dirty="0">
+              <a:rPr lang="en-US" sz="1000" b="1" kern="0" spc="200" dirty="0">
                 <a:solidFill>
                   <a:srgbClr val="F5C26B"/>
                 </a:solidFill>
@@ -14079,7 +14837,7 @@
             <a:pPr marL="342900" indent="-342900">
               <a:buSzPct val="100000"/>
               <a:buFont typeface="+mj-lt"/>
-              <a:buAutoNum type="arabicPeriod" startAt="1"/>
+              <a:buAutoNum type="arabicPeriod"/>
             </a:pPr>
             <a:r>
               <a:rPr lang="en-US" sz="1000" dirty="0">
@@ -14095,7 +14853,7 @@
             <a:pPr marL="342900" indent="-342900">
               <a:buSzPct val="100000"/>
               <a:buFont typeface="+mj-lt"/>
-              <a:buAutoNum type="arabicPeriod" startAt="1"/>
+              <a:buAutoNum type="arabicPeriod"/>
             </a:pPr>
             <a:r>
               <a:rPr lang="en-US" sz="1000" dirty="0">
@@ -14111,7 +14869,7 @@
             <a:pPr marL="342900" indent="-342900">
               <a:buSzPct val="100000"/>
               <a:buFont typeface="+mj-lt"/>
-              <a:buAutoNum type="arabicPeriod" startAt="1"/>
+              <a:buAutoNum type="arabicPeriod"/>
             </a:pPr>
             <a:r>
               <a:rPr lang="en-US" sz="1000" dirty="0">
@@ -14174,6 +14932,13 @@
             <a:prstDash val="solid"/>
           </a:ln>
         </p:spPr>
+        <p:txBody>
+          <a:bodyPr/>
+          <a:lstStyle/>
+          <a:p>
+            <a:endParaRPr lang="en-US"/>
+          </a:p>
+        </p:txBody>
       </p:sp>
       <p:sp>
         <p:nvSpPr>
@@ -14199,6 +14964,13 @@
             <a:prstDash val="solid"/>
           </a:ln>
         </p:spPr>
+        <p:txBody>
+          <a:bodyPr/>
+          <a:lstStyle/>
+          <a:p>
+            <a:endParaRPr lang="en-US"/>
+          </a:p>
+        </p:txBody>
       </p:sp>
       <p:sp>
         <p:nvSpPr>
@@ -14224,6 +14996,13 @@
             <a:prstDash val="solid"/>
           </a:ln>
         </p:spPr>
+        <p:txBody>
+          <a:bodyPr/>
+          <a:lstStyle/>
+          <a:p>
+            <a:endParaRPr lang="en-US"/>
+          </a:p>
+        </p:txBody>
       </p:sp>
       <p:sp>
         <p:nvSpPr>
@@ -14251,6 +15030,13 @@
             <a:prstDash val="solid"/>
           </a:ln>
         </p:spPr>
+        <p:txBody>
+          <a:bodyPr/>
+          <a:lstStyle/>
+          <a:p>
+            <a:endParaRPr lang="en-US"/>
+          </a:p>
+        </p:txBody>
       </p:sp>
       <p:sp>
         <p:nvSpPr>
@@ -14278,6 +15064,13 @@
             <a:prstDash val="solid"/>
           </a:ln>
         </p:spPr>
+        <p:txBody>
+          <a:bodyPr/>
+          <a:lstStyle/>
+          <a:p>
+            <a:endParaRPr lang="en-US"/>
+          </a:p>
+        </p:txBody>
       </p:sp>
       <p:sp>
         <p:nvSpPr>
@@ -14303,6 +15096,13 @@
             <a:prstDash val="solid"/>
           </a:ln>
         </p:spPr>
+        <p:txBody>
+          <a:bodyPr/>
+          <a:lstStyle/>
+          <a:p>
+            <a:endParaRPr lang="en-US"/>
+          </a:p>
+        </p:txBody>
       </p:sp>
       <p:sp>
         <p:nvSpPr>
@@ -14325,7 +15125,7 @@
           <a:bodyPr wrap="square" lIns="0" tIns="0" rIns="0" bIns="0" rtlCol="0" anchor="ctr"/>
           <a:lstStyle/>
           <a:p>
-            <a:pPr algn="ctr" indent="0" marL="0">
+            <a:pPr marL="0" indent="0" algn="ctr">
               <a:buNone/>
             </a:pPr>
             <a:r>
@@ -14361,11 +15161,11 @@
           <a:bodyPr wrap="square" lIns="0" tIns="0" rIns="0" bIns="0" rtlCol="0" anchor="ctr"/>
           <a:lstStyle/>
           <a:p>
-            <a:pPr indent="0" marL="0">
+            <a:pPr marL="0" indent="0">
               <a:buNone/>
             </a:pPr>
             <a:r>
-              <a:rPr lang="en-US" sz="1000" b="1" spc="200" kern="0" dirty="0">
+              <a:rPr lang="en-US" sz="1000" b="1" kern="0" spc="200" dirty="0">
                 <a:solidFill>
                   <a:srgbClr val="F5C26B"/>
                 </a:solidFill>
@@ -14397,7 +15197,7 @@
           <a:bodyPr wrap="square" lIns="0" tIns="0" rIns="0" bIns="0" rtlCol="0" anchor="ctr"/>
           <a:lstStyle/>
           <a:p>
-            <a:pPr indent="0" marL="0">
+            <a:pPr marL="0" indent="0">
               <a:buNone/>
             </a:pPr>
             <a:r>
@@ -14436,7 +15236,7 @@
           <a:bodyPr wrap="square" lIns="0" tIns="0" rIns="0" bIns="0" rtlCol="0" anchor="ctr"/>
           <a:lstStyle/>
           <a:p>
-            <a:pPr indent="0" marL="0">
+            <a:pPr marL="0" indent="0">
               <a:buNone/>
             </a:pPr>
             <a:r>
@@ -14477,6 +15277,13 @@
             <a:prstDash val="solid"/>
           </a:ln>
         </p:spPr>
+        <p:txBody>
+          <a:bodyPr/>
+          <a:lstStyle/>
+          <a:p>
+            <a:endParaRPr lang="en-US"/>
+          </a:p>
+        </p:txBody>
       </p:sp>
       <p:sp>
         <p:nvSpPr>
@@ -14499,7 +15306,7 @@
           <a:bodyPr wrap="square" lIns="0" tIns="0" rIns="0" bIns="0" rtlCol="0" anchor="ctr"/>
           <a:lstStyle/>
           <a:p>
-            <a:pPr indent="0" marL="0">
+            <a:pPr marL="0" indent="0">
               <a:buNone/>
             </a:pPr>
             <a:r>
@@ -14607,6 +15414,13 @@
             <a:prstDash val="solid"/>
           </a:ln>
         </p:spPr>
+        <p:txBody>
+          <a:bodyPr/>
+          <a:lstStyle/>
+          <a:p>
+            <a:endParaRPr lang="en-US"/>
+          </a:p>
+        </p:txBody>
       </p:sp>
       <p:sp>
         <p:nvSpPr>
@@ -14629,11 +15443,11 @@
           <a:bodyPr wrap="square" lIns="0" tIns="0" rIns="0" bIns="0" rtlCol="0" anchor="ctr"/>
           <a:lstStyle/>
           <a:p>
-            <a:pPr indent="0" marL="0">
+            <a:pPr marL="0" indent="0">
               <a:buNone/>
             </a:pPr>
             <a:r>
-              <a:rPr lang="en-US" sz="1000" b="1" spc="200" kern="0" dirty="0">
+              <a:rPr lang="en-US" sz="1000" b="1" kern="0" spc="200" dirty="0">
                 <a:solidFill>
                   <a:srgbClr val="F5C26B"/>
                 </a:solidFill>
@@ -14668,7 +15482,7 @@
             <a:pPr marL="342900" indent="-342900">
               <a:buSzPct val="100000"/>
               <a:buFont typeface="+mj-lt"/>
-              <a:buAutoNum type="arabicPeriod" startAt="1"/>
+              <a:buAutoNum type="arabicPeriod"/>
             </a:pPr>
             <a:r>
               <a:rPr lang="en-US" sz="1000" dirty="0">
@@ -14684,7 +15498,7 @@
             <a:pPr marL="342900" indent="-342900">
               <a:buSzPct val="100000"/>
               <a:buFont typeface="+mj-lt"/>
-              <a:buAutoNum type="arabicPeriod" startAt="1"/>
+              <a:buAutoNum type="arabicPeriod"/>
             </a:pPr>
             <a:r>
               <a:rPr lang="en-US" sz="1000" dirty="0">
@@ -14700,7 +15514,7 @@
             <a:pPr marL="342900" indent="-342900">
               <a:buSzPct val="100000"/>
               <a:buFont typeface="+mj-lt"/>
-              <a:buAutoNum type="arabicPeriod" startAt="1"/>
+              <a:buAutoNum type="arabicPeriod"/>
             </a:pPr>
             <a:r>
               <a:rPr lang="en-US" sz="1000" dirty="0">
@@ -14735,7 +15549,7 @@
           <a:bodyPr wrap="square" lIns="0" tIns="0" rIns="0" bIns="0" rtlCol="0" anchor="ctr"/>
           <a:lstStyle/>
           <a:p>
-            <a:pPr indent="0" marL="0">
+            <a:pPr marL="0" indent="0">
               <a:buNone/>
             </a:pPr>
             <a:r>
@@ -14799,6 +15613,13 @@
             <a:prstDash val="solid"/>
           </a:ln>
         </p:spPr>
+        <p:txBody>
+          <a:bodyPr/>
+          <a:lstStyle/>
+          <a:p>
+            <a:endParaRPr lang="en-US"/>
+          </a:p>
+        </p:txBody>
       </p:sp>
       <p:sp>
         <p:nvSpPr>
@@ -14824,6 +15645,13 @@
             <a:prstDash val="solid"/>
           </a:ln>
         </p:spPr>
+        <p:txBody>
+          <a:bodyPr/>
+          <a:lstStyle/>
+          <a:p>
+            <a:endParaRPr lang="en-US"/>
+          </a:p>
+        </p:txBody>
       </p:sp>
       <p:sp>
         <p:nvSpPr>
@@ -14849,6 +15677,13 @@
             <a:prstDash val="solid"/>
           </a:ln>
         </p:spPr>
+        <p:txBody>
+          <a:bodyPr/>
+          <a:lstStyle/>
+          <a:p>
+            <a:endParaRPr lang="en-US"/>
+          </a:p>
+        </p:txBody>
       </p:sp>
       <p:sp>
         <p:nvSpPr>
@@ -14871,11 +15706,11 @@
           <a:bodyPr wrap="square" lIns="0" tIns="0" rIns="0" bIns="0" rtlCol="0" anchor="ctr"/>
           <a:lstStyle/>
           <a:p>
-            <a:pPr indent="0" marL="0">
+            <a:pPr marL="0" indent="0">
               <a:buNone/>
             </a:pPr>
             <a:r>
-              <a:rPr lang="en-US" sz="1200" b="1" spc="300" kern="0" dirty="0">
+              <a:rPr lang="en-US" sz="1200" b="1" kern="0" spc="300" dirty="0">
                 <a:solidFill>
                   <a:srgbClr val="F5C26B"/>
                 </a:solidFill>
@@ -14912,6 +15747,13 @@
             <a:prstDash val="solid"/>
           </a:ln>
         </p:spPr>
+        <p:txBody>
+          <a:bodyPr/>
+          <a:lstStyle/>
+          <a:p>
+            <a:endParaRPr lang="en-US"/>
+          </a:p>
+        </p:txBody>
       </p:sp>
       <p:sp>
         <p:nvSpPr>
@@ -14934,7 +15776,7 @@
           <a:bodyPr wrap="square" lIns="0" tIns="0" rIns="0" bIns="0" rtlCol="0" anchor="ctr"/>
           <a:lstStyle/>
           <a:p>
-            <a:pPr algn="ctr" indent="0" marL="0">
+            <a:pPr marL="0" indent="0" algn="ctr">
               <a:buNone/>
             </a:pPr>
             <a:r>
@@ -14973,7 +15815,7 @@
           <a:bodyPr wrap="square" lIns="0" tIns="0" rIns="0" bIns="0" rtlCol="0" anchor="ctr"/>
           <a:lstStyle/>
           <a:p>
-            <a:pPr algn="ctr" indent="0" marL="0">
+            <a:pPr marL="0" indent="0" algn="ctr">
               <a:buNone/>
             </a:pPr>
             <a:r>
@@ -15009,7 +15851,7 @@
           <a:bodyPr wrap="square" lIns="0" tIns="0" rIns="0" bIns="0" rtlCol="0" anchor="ctr"/>
           <a:lstStyle/>
           <a:p>
-            <a:pPr algn="ctr" indent="0" marL="0">
+            <a:pPr marL="0" indent="0" algn="ctr">
               <a:buNone/>
             </a:pPr>
             <a:r>
@@ -15050,6 +15892,13 @@
             <a:prstDash val="solid"/>
           </a:ln>
         </p:spPr>
+        <p:txBody>
+          <a:bodyPr/>
+          <a:lstStyle/>
+          <a:p>
+            <a:endParaRPr lang="en-US"/>
+          </a:p>
+        </p:txBody>
       </p:sp>
       <p:sp>
         <p:nvSpPr>
@@ -15072,7 +15921,7 @@
           <a:bodyPr wrap="square" lIns="0" tIns="0" rIns="0" bIns="0" rtlCol="0" anchor="ctr"/>
           <a:lstStyle/>
           <a:p>
-            <a:pPr algn="ctr" indent="0" marL="0">
+            <a:pPr marL="0" indent="0" algn="ctr">
               <a:buNone/>
             </a:pPr>
             <a:r>
@@ -15111,7 +15960,7 @@
           <a:bodyPr wrap="square" lIns="0" tIns="0" rIns="0" bIns="0" rtlCol="0" anchor="ctr"/>
           <a:lstStyle/>
           <a:p>
-            <a:pPr algn="ctr" indent="0" marL="0">
+            <a:pPr marL="0" indent="0" algn="ctr">
               <a:buNone/>
             </a:pPr>
             <a:r>
@@ -15147,7 +15996,7 @@
           <a:bodyPr wrap="square" lIns="0" tIns="0" rIns="0" bIns="0" rtlCol="0" anchor="ctr"/>
           <a:lstStyle/>
           <a:p>
-            <a:pPr algn="ctr" indent="0" marL="0">
+            <a:pPr marL="0" indent="0" algn="ctr">
               <a:buNone/>
             </a:pPr>
             <a:r>
@@ -15188,6 +16037,13 @@
             <a:prstDash val="solid"/>
           </a:ln>
         </p:spPr>
+        <p:txBody>
+          <a:bodyPr/>
+          <a:lstStyle/>
+          <a:p>
+            <a:endParaRPr lang="en-US"/>
+          </a:p>
+        </p:txBody>
       </p:sp>
       <p:sp>
         <p:nvSpPr>
@@ -15210,7 +16066,7 @@
           <a:bodyPr wrap="square" lIns="0" tIns="0" rIns="0" bIns="0" rtlCol="0" anchor="ctr"/>
           <a:lstStyle/>
           <a:p>
-            <a:pPr algn="ctr" indent="0" marL="0">
+            <a:pPr marL="0" indent="0" algn="ctr">
               <a:buNone/>
             </a:pPr>
             <a:r>
@@ -15249,7 +16105,7 @@
           <a:bodyPr wrap="square" lIns="0" tIns="0" rIns="0" bIns="0" rtlCol="0" anchor="ctr"/>
           <a:lstStyle/>
           <a:p>
-            <a:pPr algn="ctr" indent="0" marL="0">
+            <a:pPr marL="0" indent="0" algn="ctr">
               <a:buNone/>
             </a:pPr>
             <a:r>
@@ -15285,7 +16141,7 @@
           <a:bodyPr wrap="square" lIns="0" tIns="0" rIns="0" bIns="0" rtlCol="0" anchor="ctr"/>
           <a:lstStyle/>
           <a:p>
-            <a:pPr algn="ctr" indent="0" marL="0">
+            <a:pPr marL="0" indent="0" algn="ctr">
               <a:buNone/>
             </a:pPr>
             <a:r>
@@ -15326,6 +16182,13 @@
             <a:prstDash val="solid"/>
           </a:ln>
         </p:spPr>
+        <p:txBody>
+          <a:bodyPr/>
+          <a:lstStyle/>
+          <a:p>
+            <a:endParaRPr lang="en-US"/>
+          </a:p>
+        </p:txBody>
       </p:sp>
       <p:sp>
         <p:nvSpPr>
@@ -15348,7 +16211,7 @@
           <a:bodyPr wrap="square" rtlCol="0" anchor="t"/>
           <a:lstStyle/>
           <a:p>
-            <a:pPr indent="0" marL="0">
+            <a:pPr marL="0" indent="0">
               <a:buNone/>
             </a:pPr>
             <a:r>
@@ -15359,9 +16222,6 @@
               </a:rPr>
               <a:t>About your Transformation Book: </a:t>
             </a:r>
-            <a:pPr indent="0" marL="0">
-              <a:buNone/>
-            </a:pPr>
             <a:r>
               <a:rPr lang="en-US" sz="1300" dirty="0">
                 <a:solidFill>
@@ -15423,6 +16283,13 @@
             <a:prstDash val="solid"/>
           </a:ln>
         </p:spPr>
+        <p:txBody>
+          <a:bodyPr/>
+          <a:lstStyle/>
+          <a:p>
+            <a:endParaRPr lang="en-US"/>
+          </a:p>
+        </p:txBody>
       </p:sp>
       <p:sp>
         <p:nvSpPr>
@@ -15448,6 +16315,13 @@
             <a:prstDash val="solid"/>
           </a:ln>
         </p:spPr>
+        <p:txBody>
+          <a:bodyPr/>
+          <a:lstStyle/>
+          <a:p>
+            <a:endParaRPr lang="en-US"/>
+          </a:p>
+        </p:txBody>
       </p:sp>
       <p:sp>
         <p:nvSpPr>
@@ -15473,6 +16347,13 @@
             <a:prstDash val="solid"/>
           </a:ln>
         </p:spPr>
+        <p:txBody>
+          <a:bodyPr/>
+          <a:lstStyle/>
+          <a:p>
+            <a:endParaRPr lang="en-US"/>
+          </a:p>
+        </p:txBody>
       </p:sp>
       <p:sp>
         <p:nvSpPr>
@@ -15500,6 +16381,13 @@
             <a:prstDash val="solid"/>
           </a:ln>
         </p:spPr>
+        <p:txBody>
+          <a:bodyPr/>
+          <a:lstStyle/>
+          <a:p>
+            <a:endParaRPr lang="en-US"/>
+          </a:p>
+        </p:txBody>
       </p:sp>
       <p:sp>
         <p:nvSpPr>
@@ -15527,6 +16415,13 @@
             <a:prstDash val="solid"/>
           </a:ln>
         </p:spPr>
+        <p:txBody>
+          <a:bodyPr/>
+          <a:lstStyle/>
+          <a:p>
+            <a:endParaRPr lang="en-US"/>
+          </a:p>
+        </p:txBody>
       </p:sp>
       <p:sp>
         <p:nvSpPr>
@@ -15549,7 +16444,7 @@
           <a:bodyPr wrap="square" lIns="0" tIns="0" rIns="0" bIns="0" rtlCol="0" anchor="ctr"/>
           <a:lstStyle/>
           <a:p>
-            <a:pPr algn="ctr" indent="0" marL="0">
+            <a:pPr marL="0" indent="0" algn="ctr">
               <a:buNone/>
             </a:pPr>
             <a:r>
@@ -15566,7 +16461,7 @@
             <a:endParaRPr lang="en-US" sz="3600" dirty="0"/>
           </a:p>
           <a:p>
-            <a:pPr algn="ctr" indent="0" marL="0">
+            <a:pPr marL="0" indent="0" algn="ctr">
               <a:buNone/>
             </a:pPr>
             <a:r>
@@ -15605,7 +16500,7 @@
           <a:bodyPr wrap="square" lIns="0" tIns="0" rIns="0" bIns="0" rtlCol="0" anchor="ctr"/>
           <a:lstStyle/>
           <a:p>
-            <a:pPr algn="ctr" indent="0" marL="0">
+            <a:pPr marL="0" indent="0" algn="ctr">
               <a:buNone/>
             </a:pPr>
             <a:r>
@@ -15619,7 +16514,7 @@
             <a:endParaRPr lang="en-US" sz="1600" dirty="0"/>
           </a:p>
           <a:p>
-            <a:pPr algn="ctr" indent="0" marL="0">
+            <a:pPr marL="0" indent="0" algn="ctr">
               <a:buNone/>
             </a:pPr>
             <a:r>
@@ -15660,6 +16555,13 @@
             <a:prstDash val="solid"/>
           </a:ln>
         </p:spPr>
+        <p:txBody>
+          <a:bodyPr/>
+          <a:lstStyle/>
+          <a:p>
+            <a:endParaRPr lang="en-US"/>
+          </a:p>
+        </p:txBody>
       </p:sp>
       <p:sp>
         <p:nvSpPr>
@@ -15682,7 +16584,7 @@
           <a:bodyPr wrap="square" lIns="0" tIns="0" rIns="0" bIns="0" rtlCol="0" anchor="ctr"/>
           <a:lstStyle/>
           <a:p>
-            <a:pPr algn="ctr" indent="0" marL="0">
+            <a:pPr marL="0" indent="0" algn="ctr">
               <a:buNone/>
             </a:pPr>
             <a:r>
@@ -15746,6 +16648,13 @@
             <a:prstDash val="solid"/>
           </a:ln>
         </p:spPr>
+        <p:txBody>
+          <a:bodyPr/>
+          <a:lstStyle/>
+          <a:p>
+            <a:endParaRPr lang="en-US"/>
+          </a:p>
+        </p:txBody>
       </p:sp>
       <p:sp>
         <p:nvSpPr>
@@ -15771,6 +16680,13 @@
             <a:prstDash val="solid"/>
           </a:ln>
         </p:spPr>
+        <p:txBody>
+          <a:bodyPr/>
+          <a:lstStyle/>
+          <a:p>
+            <a:endParaRPr lang="en-US"/>
+          </a:p>
+        </p:txBody>
       </p:sp>
       <p:sp>
         <p:nvSpPr>
@@ -15796,6 +16712,13 @@
             <a:prstDash val="solid"/>
           </a:ln>
         </p:spPr>
+        <p:txBody>
+          <a:bodyPr/>
+          <a:lstStyle/>
+          <a:p>
+            <a:endParaRPr lang="en-US"/>
+          </a:p>
+        </p:txBody>
       </p:sp>
       <p:sp>
         <p:nvSpPr>
@@ -15818,11 +16741,11 @@
           <a:bodyPr wrap="square" lIns="0" tIns="0" rIns="0" bIns="0" rtlCol="0" anchor="ctr"/>
           <a:lstStyle/>
           <a:p>
-            <a:pPr indent="0" marL="0">
+            <a:pPr marL="0" indent="0">
               <a:buNone/>
             </a:pPr>
             <a:r>
-              <a:rPr lang="en-US" sz="1200" b="1" spc="300" kern="0" dirty="0">
+              <a:rPr lang="en-US" sz="1200" b="1" kern="0" spc="300" dirty="0">
                 <a:solidFill>
                   <a:srgbClr val="F5C26B"/>
                 </a:solidFill>
@@ -15857,6 +16780,13 @@
             <a:prstDash val="solid"/>
           </a:ln>
         </p:spPr>
+        <p:txBody>
+          <a:bodyPr/>
+          <a:lstStyle/>
+          <a:p>
+            <a:endParaRPr lang="en-US"/>
+          </a:p>
+        </p:txBody>
       </p:sp>
       <p:sp>
         <p:nvSpPr>
@@ -15880,6 +16810,13 @@
             <a:prstDash val="solid"/>
           </a:ln>
         </p:spPr>
+        <p:txBody>
+          <a:bodyPr/>
+          <a:lstStyle/>
+          <a:p>
+            <a:endParaRPr lang="en-US"/>
+          </a:p>
+        </p:txBody>
       </p:sp>
       <p:sp>
         <p:nvSpPr>
@@ -15902,7 +16839,7 @@
           <a:bodyPr wrap="square" lIns="0" tIns="0" rIns="0" bIns="0" rtlCol="0" anchor="ctr"/>
           <a:lstStyle/>
           <a:p>
-            <a:pPr indent="0" marL="0">
+            <a:pPr marL="0" indent="0">
               <a:buNone/>
             </a:pPr>
             <a:r>
@@ -15938,7 +16875,7 @@
           <a:bodyPr wrap="square" lIns="0" tIns="0" rIns="0" bIns="0" rtlCol="0" anchor="ctr"/>
           <a:lstStyle/>
           <a:p>
-            <a:pPr indent="0" marL="0">
+            <a:pPr marL="0" indent="0">
               <a:buNone/>
             </a:pPr>
             <a:r>
@@ -15977,6 +16914,13 @@
             <a:prstDash val="solid"/>
           </a:ln>
         </p:spPr>
+        <p:txBody>
+          <a:bodyPr/>
+          <a:lstStyle/>
+          <a:p>
+            <a:endParaRPr lang="en-US"/>
+          </a:p>
+        </p:txBody>
       </p:sp>
       <p:sp>
         <p:nvSpPr>
@@ -16000,6 +16944,13 @@
             <a:prstDash val="solid"/>
           </a:ln>
         </p:spPr>
+        <p:txBody>
+          <a:bodyPr/>
+          <a:lstStyle/>
+          <a:p>
+            <a:endParaRPr lang="en-US"/>
+          </a:p>
+        </p:txBody>
       </p:sp>
       <p:sp>
         <p:nvSpPr>
@@ -16022,7 +16973,7 @@
           <a:bodyPr wrap="square" lIns="0" tIns="0" rIns="0" bIns="0" rtlCol="0" anchor="ctr"/>
           <a:lstStyle/>
           <a:p>
-            <a:pPr indent="0" marL="0">
+            <a:pPr marL="0" indent="0">
               <a:buNone/>
             </a:pPr>
             <a:r>
@@ -16058,7 +17009,7 @@
           <a:bodyPr wrap="square" lIns="0" tIns="0" rIns="0" bIns="0" rtlCol="0" anchor="ctr"/>
           <a:lstStyle/>
           <a:p>
-            <a:pPr indent="0" marL="0">
+            <a:pPr marL="0" indent="0">
               <a:buNone/>
             </a:pPr>
             <a:r>
@@ -16097,6 +17048,13 @@
             <a:prstDash val="solid"/>
           </a:ln>
         </p:spPr>
+        <p:txBody>
+          <a:bodyPr/>
+          <a:lstStyle/>
+          <a:p>
+            <a:endParaRPr lang="en-US"/>
+          </a:p>
+        </p:txBody>
       </p:sp>
       <p:sp>
         <p:nvSpPr>
@@ -16120,6 +17078,13 @@
             <a:prstDash val="solid"/>
           </a:ln>
         </p:spPr>
+        <p:txBody>
+          <a:bodyPr/>
+          <a:lstStyle/>
+          <a:p>
+            <a:endParaRPr lang="en-US"/>
+          </a:p>
+        </p:txBody>
       </p:sp>
       <p:sp>
         <p:nvSpPr>
@@ -16142,7 +17107,7 @@
           <a:bodyPr wrap="square" lIns="0" tIns="0" rIns="0" bIns="0" rtlCol="0" anchor="ctr"/>
           <a:lstStyle/>
           <a:p>
-            <a:pPr indent="0" marL="0">
+            <a:pPr marL="0" indent="0">
               <a:buNone/>
             </a:pPr>
             <a:r>
@@ -16178,7 +17143,7 @@
           <a:bodyPr wrap="square" lIns="0" tIns="0" rIns="0" bIns="0" rtlCol="0" anchor="ctr"/>
           <a:lstStyle/>
           <a:p>
-            <a:pPr indent="0" marL="0">
+            <a:pPr marL="0" indent="0">
               <a:buNone/>
             </a:pPr>
             <a:r>
@@ -16217,6 +17182,13 @@
             <a:prstDash val="solid"/>
           </a:ln>
         </p:spPr>
+        <p:txBody>
+          <a:bodyPr/>
+          <a:lstStyle/>
+          <a:p>
+            <a:endParaRPr lang="en-US"/>
+          </a:p>
+        </p:txBody>
       </p:sp>
       <p:sp>
         <p:nvSpPr>
@@ -16240,6 +17212,13 @@
             <a:prstDash val="solid"/>
           </a:ln>
         </p:spPr>
+        <p:txBody>
+          <a:bodyPr/>
+          <a:lstStyle/>
+          <a:p>
+            <a:endParaRPr lang="en-US"/>
+          </a:p>
+        </p:txBody>
       </p:sp>
       <p:sp>
         <p:nvSpPr>
@@ -16262,7 +17241,7 @@
           <a:bodyPr wrap="square" lIns="0" tIns="0" rIns="0" bIns="0" rtlCol="0" anchor="ctr"/>
           <a:lstStyle/>
           <a:p>
-            <a:pPr indent="0" marL="0">
+            <a:pPr marL="0" indent="0">
               <a:buNone/>
             </a:pPr>
             <a:r>
@@ -16298,7 +17277,7 @@
           <a:bodyPr wrap="square" lIns="0" tIns="0" rIns="0" bIns="0" rtlCol="0" anchor="ctr"/>
           <a:lstStyle/>
           <a:p>
-            <a:pPr indent="0" marL="0">
+            <a:pPr marL="0" indent="0">
               <a:buNone/>
             </a:pPr>
             <a:r>
@@ -16337,6 +17316,13 @@
             <a:prstDash val="solid"/>
           </a:ln>
         </p:spPr>
+        <p:txBody>
+          <a:bodyPr/>
+          <a:lstStyle/>
+          <a:p>
+            <a:endParaRPr lang="en-US"/>
+          </a:p>
+        </p:txBody>
       </p:sp>
       <p:sp>
         <p:nvSpPr>
@@ -16359,7 +17345,7 @@
           <a:bodyPr wrap="square" lIns="0" tIns="0" rIns="0" bIns="0" rtlCol="0" anchor="ctr"/>
           <a:lstStyle/>
           <a:p>
-            <a:pPr indent="0" marL="0">
+            <a:pPr marL="0" indent="0">
               <a:buNone/>
             </a:pPr>
             <a:r>
@@ -16395,7 +17381,7 @@
           <a:bodyPr wrap="square" lIns="0" tIns="0" rIns="0" bIns="0" rtlCol="0" anchor="ctr"/>
           <a:lstStyle/>
           <a:p>
-            <a:pPr indent="0" marL="0">
+            <a:pPr marL="0" indent="0">
               <a:buNone/>
             </a:pPr>
             <a:r>
@@ -16459,6 +17445,13 @@
             <a:prstDash val="solid"/>
           </a:ln>
         </p:spPr>
+        <p:txBody>
+          <a:bodyPr/>
+          <a:lstStyle/>
+          <a:p>
+            <a:endParaRPr lang="en-US"/>
+          </a:p>
+        </p:txBody>
       </p:sp>
       <p:sp>
         <p:nvSpPr>
@@ -16484,6 +17477,13 @@
             <a:prstDash val="solid"/>
           </a:ln>
         </p:spPr>
+        <p:txBody>
+          <a:bodyPr/>
+          <a:lstStyle/>
+          <a:p>
+            <a:endParaRPr lang="en-US"/>
+          </a:p>
+        </p:txBody>
       </p:sp>
       <p:sp>
         <p:nvSpPr>
@@ -16509,6 +17509,13 @@
             <a:prstDash val="solid"/>
           </a:ln>
         </p:spPr>
+        <p:txBody>
+          <a:bodyPr/>
+          <a:lstStyle/>
+          <a:p>
+            <a:endParaRPr lang="en-US"/>
+          </a:p>
+        </p:txBody>
       </p:sp>
       <p:sp>
         <p:nvSpPr>
@@ -16536,6 +17543,13 @@
             <a:prstDash val="solid"/>
           </a:ln>
         </p:spPr>
+        <p:txBody>
+          <a:bodyPr/>
+          <a:lstStyle/>
+          <a:p>
+            <a:endParaRPr lang="en-US"/>
+          </a:p>
+        </p:txBody>
       </p:sp>
       <p:sp>
         <p:nvSpPr>
@@ -16563,6 +17577,13 @@
             <a:prstDash val="solid"/>
           </a:ln>
         </p:spPr>
+        <p:txBody>
+          <a:bodyPr/>
+          <a:lstStyle/>
+          <a:p>
+            <a:endParaRPr lang="en-US"/>
+          </a:p>
+        </p:txBody>
       </p:sp>
       <p:sp>
         <p:nvSpPr>
@@ -16585,7 +17606,7 @@
           <a:bodyPr wrap="square" lIns="0" tIns="0" rIns="0" bIns="0" rtlCol="0" anchor="ctr"/>
           <a:lstStyle/>
           <a:p>
-            <a:pPr algn="ctr" indent="0" marL="0">
+            <a:pPr marL="0" indent="0" algn="ctr">
               <a:buNone/>
             </a:pPr>
             <a:r>
@@ -16624,7 +17645,7 @@
           <a:bodyPr wrap="square" lIns="0" tIns="0" rIns="0" bIns="0" rtlCol="0" anchor="ctr"/>
           <a:lstStyle/>
           <a:p>
-            <a:pPr algn="ctr" indent="0" marL="0">
+            <a:pPr marL="0" indent="0" algn="ctr">
               <a:buNone/>
             </a:pPr>
             <a:r>
@@ -16661,6 +17682,13 @@
             <a:prstDash val="solid"/>
           </a:ln>
         </p:spPr>
+        <p:txBody>
+          <a:bodyPr/>
+          <a:lstStyle/>
+          <a:p>
+            <a:endParaRPr lang="en-US"/>
+          </a:p>
+        </p:txBody>
       </p:sp>
     </p:spTree>
   </p:cSld>
@@ -16711,6 +17739,13 @@
             <a:prstDash val="solid"/>
           </a:ln>
         </p:spPr>
+        <p:txBody>
+          <a:bodyPr/>
+          <a:lstStyle/>
+          <a:p>
+            <a:endParaRPr lang="en-US"/>
+          </a:p>
+        </p:txBody>
       </p:sp>
       <p:sp>
         <p:nvSpPr>
@@ -16736,6 +17771,13 @@
             <a:prstDash val="solid"/>
           </a:ln>
         </p:spPr>
+        <p:txBody>
+          <a:bodyPr/>
+          <a:lstStyle/>
+          <a:p>
+            <a:endParaRPr lang="en-US"/>
+          </a:p>
+        </p:txBody>
       </p:sp>
       <p:sp>
         <p:nvSpPr>
@@ -16761,6 +17803,13 @@
             <a:prstDash val="solid"/>
           </a:ln>
         </p:spPr>
+        <p:txBody>
+          <a:bodyPr/>
+          <a:lstStyle/>
+          <a:p>
+            <a:endParaRPr lang="en-US"/>
+          </a:p>
+        </p:txBody>
       </p:sp>
       <p:sp>
         <p:nvSpPr>
@@ -16788,6 +17837,13 @@
             <a:prstDash val="solid"/>
           </a:ln>
         </p:spPr>
+        <p:txBody>
+          <a:bodyPr/>
+          <a:lstStyle/>
+          <a:p>
+            <a:endParaRPr lang="en-US"/>
+          </a:p>
+        </p:txBody>
       </p:sp>
       <p:sp>
         <p:nvSpPr>
@@ -16815,6 +17871,13 @@
             <a:prstDash val="solid"/>
           </a:ln>
         </p:spPr>
+        <p:txBody>
+          <a:bodyPr/>
+          <a:lstStyle/>
+          <a:p>
+            <a:endParaRPr lang="en-US"/>
+          </a:p>
+        </p:txBody>
       </p:sp>
       <p:sp>
         <p:nvSpPr>
@@ -16840,6 +17903,13 @@
             <a:prstDash val="solid"/>
           </a:ln>
         </p:spPr>
+        <p:txBody>
+          <a:bodyPr/>
+          <a:lstStyle/>
+          <a:p>
+            <a:endParaRPr lang="en-US"/>
+          </a:p>
+        </p:txBody>
       </p:sp>
       <p:sp>
         <p:nvSpPr>
@@ -16862,7 +17932,7 @@
           <a:bodyPr wrap="square" lIns="0" tIns="0" rIns="0" bIns="0" rtlCol="0" anchor="ctr"/>
           <a:lstStyle/>
           <a:p>
-            <a:pPr algn="ctr" indent="0" marL="0">
+            <a:pPr marL="0" indent="0" algn="ctr">
               <a:buNone/>
             </a:pPr>
             <a:r>
@@ -16898,11 +17968,11 @@
           <a:bodyPr wrap="square" lIns="0" tIns="0" rIns="0" bIns="0" rtlCol="0" anchor="ctr"/>
           <a:lstStyle/>
           <a:p>
-            <a:pPr indent="0" marL="0">
+            <a:pPr marL="0" indent="0">
               <a:buNone/>
             </a:pPr>
             <a:r>
-              <a:rPr lang="en-US" sz="1000" b="1" spc="200" kern="0" dirty="0">
+              <a:rPr lang="en-US" sz="1000" b="1" kern="0" spc="200" dirty="0">
                 <a:solidFill>
                   <a:srgbClr val="F5C26B"/>
                 </a:solidFill>
@@ -16934,7 +18004,7 @@
           <a:bodyPr wrap="square" lIns="0" tIns="0" rIns="0" bIns="0" rtlCol="0" anchor="ctr"/>
           <a:lstStyle/>
           <a:p>
-            <a:pPr indent="0" marL="0">
+            <a:pPr marL="0" indent="0">
               <a:buNone/>
             </a:pPr>
             <a:r>
@@ -16973,7 +18043,7 @@
           <a:bodyPr wrap="square" lIns="0" tIns="0" rIns="0" bIns="0" rtlCol="0" anchor="ctr"/>
           <a:lstStyle/>
           <a:p>
-            <a:pPr indent="0" marL="0">
+            <a:pPr marL="0" indent="0">
               <a:buNone/>
             </a:pPr>
             <a:r>
@@ -17014,6 +18084,13 @@
             <a:prstDash val="solid"/>
           </a:ln>
         </p:spPr>
+        <p:txBody>
+          <a:bodyPr/>
+          <a:lstStyle/>
+          <a:p>
+            <a:endParaRPr lang="en-US"/>
+          </a:p>
+        </p:txBody>
       </p:sp>
       <p:sp>
         <p:nvSpPr>
@@ -17036,7 +18113,7 @@
           <a:bodyPr wrap="square" lIns="0" tIns="0" rIns="0" bIns="0" rtlCol="0" anchor="ctr"/>
           <a:lstStyle/>
           <a:p>
-            <a:pPr indent="0" marL="0">
+            <a:pPr marL="0" indent="0">
               <a:buNone/>
             </a:pPr>
             <a:r>
@@ -17144,6 +18221,13 @@
             <a:prstDash val="solid"/>
           </a:ln>
         </p:spPr>
+        <p:txBody>
+          <a:bodyPr/>
+          <a:lstStyle/>
+          <a:p>
+            <a:endParaRPr lang="en-US"/>
+          </a:p>
+        </p:txBody>
       </p:sp>
       <p:sp>
         <p:nvSpPr>
@@ -17166,11 +18250,11 @@
           <a:bodyPr wrap="square" lIns="0" tIns="0" rIns="0" bIns="0" rtlCol="0" anchor="ctr"/>
           <a:lstStyle/>
           <a:p>
-            <a:pPr indent="0" marL="0">
+            <a:pPr marL="0" indent="0">
               <a:buNone/>
             </a:pPr>
             <a:r>
-              <a:rPr lang="en-US" sz="1000" b="1" spc="200" kern="0" dirty="0">
+              <a:rPr lang="en-US" sz="1000" b="1" kern="0" spc="200" dirty="0">
                 <a:solidFill>
                   <a:srgbClr val="F5C26B"/>
                 </a:solidFill>
@@ -17205,7 +18289,7 @@
             <a:pPr marL="342900" indent="-342900">
               <a:buSzPct val="100000"/>
               <a:buFont typeface="+mj-lt"/>
-              <a:buAutoNum type="arabicPeriod" startAt="1"/>
+              <a:buAutoNum type="arabicPeriod"/>
             </a:pPr>
             <a:r>
               <a:rPr lang="en-US" sz="1000" dirty="0">
@@ -17221,7 +18305,7 @@
             <a:pPr marL="342900" indent="-342900">
               <a:buSzPct val="100000"/>
               <a:buFont typeface="+mj-lt"/>
-              <a:buAutoNum type="arabicPeriod" startAt="1"/>
+              <a:buAutoNum type="arabicPeriod"/>
             </a:pPr>
             <a:r>
               <a:rPr lang="en-US" sz="1000" dirty="0">
@@ -17237,7 +18321,7 @@
             <a:pPr marL="342900" indent="-342900">
               <a:buSzPct val="100000"/>
               <a:buFont typeface="+mj-lt"/>
-              <a:buAutoNum type="arabicPeriod" startAt="1"/>
+              <a:buAutoNum type="arabicPeriod"/>
             </a:pPr>
             <a:r>
               <a:rPr lang="en-US" sz="1000" dirty="0">
@@ -17272,7 +18356,7 @@
           <a:bodyPr wrap="square" lIns="0" tIns="0" rIns="0" bIns="0" rtlCol="0" anchor="ctr"/>
           <a:lstStyle/>
           <a:p>
-            <a:pPr indent="0" marL="0">
+            <a:pPr marL="0" indent="0">
               <a:buNone/>
             </a:pPr>
             <a:r>
@@ -17336,6 +18420,13 @@
             <a:prstDash val="solid"/>
           </a:ln>
         </p:spPr>
+        <p:txBody>
+          <a:bodyPr/>
+          <a:lstStyle/>
+          <a:p>
+            <a:endParaRPr lang="en-US"/>
+          </a:p>
+        </p:txBody>
       </p:sp>
       <p:sp>
         <p:nvSpPr>
@@ -17361,6 +18452,13 @@
             <a:prstDash val="solid"/>
           </a:ln>
         </p:spPr>
+        <p:txBody>
+          <a:bodyPr/>
+          <a:lstStyle/>
+          <a:p>
+            <a:endParaRPr lang="en-US"/>
+          </a:p>
+        </p:txBody>
       </p:sp>
       <p:sp>
         <p:nvSpPr>
@@ -17386,6 +18484,13 @@
             <a:prstDash val="solid"/>
           </a:ln>
         </p:spPr>
+        <p:txBody>
+          <a:bodyPr/>
+          <a:lstStyle/>
+          <a:p>
+            <a:endParaRPr lang="en-US"/>
+          </a:p>
+        </p:txBody>
       </p:sp>
       <p:sp>
         <p:nvSpPr>
@@ -17413,6 +18518,13 @@
             <a:prstDash val="solid"/>
           </a:ln>
         </p:spPr>
+        <p:txBody>
+          <a:bodyPr/>
+          <a:lstStyle/>
+          <a:p>
+            <a:endParaRPr lang="en-US"/>
+          </a:p>
+        </p:txBody>
       </p:sp>
       <p:sp>
         <p:nvSpPr>
@@ -17440,6 +18552,13 @@
             <a:prstDash val="solid"/>
           </a:ln>
         </p:spPr>
+        <p:txBody>
+          <a:bodyPr/>
+          <a:lstStyle/>
+          <a:p>
+            <a:endParaRPr lang="en-US"/>
+          </a:p>
+        </p:txBody>
       </p:sp>
       <p:sp>
         <p:nvSpPr>
@@ -17465,6 +18584,13 @@
             <a:prstDash val="solid"/>
           </a:ln>
         </p:spPr>
+        <p:txBody>
+          <a:bodyPr/>
+          <a:lstStyle/>
+          <a:p>
+            <a:endParaRPr lang="en-US"/>
+          </a:p>
+        </p:txBody>
       </p:sp>
       <p:sp>
         <p:nvSpPr>
@@ -17487,7 +18613,7 @@
           <a:bodyPr wrap="square" lIns="0" tIns="0" rIns="0" bIns="0" rtlCol="0" anchor="ctr"/>
           <a:lstStyle/>
           <a:p>
-            <a:pPr algn="ctr" indent="0" marL="0">
+            <a:pPr marL="0" indent="0" algn="ctr">
               <a:buNone/>
             </a:pPr>
             <a:r>
@@ -17523,11 +18649,11 @@
           <a:bodyPr wrap="square" lIns="0" tIns="0" rIns="0" bIns="0" rtlCol="0" anchor="ctr"/>
           <a:lstStyle/>
           <a:p>
-            <a:pPr indent="0" marL="0">
+            <a:pPr marL="0" indent="0">
               <a:buNone/>
             </a:pPr>
             <a:r>
-              <a:rPr lang="en-US" sz="1000" b="1" spc="200" kern="0" dirty="0">
+              <a:rPr lang="en-US" sz="1000" b="1" kern="0" spc="200" dirty="0">
                 <a:solidFill>
                   <a:srgbClr val="F5C26B"/>
                 </a:solidFill>
@@ -17559,7 +18685,7 @@
           <a:bodyPr wrap="square" lIns="0" tIns="0" rIns="0" bIns="0" rtlCol="0" anchor="ctr"/>
           <a:lstStyle/>
           <a:p>
-            <a:pPr indent="0" marL="0">
+            <a:pPr marL="0" indent="0">
               <a:buNone/>
             </a:pPr>
             <a:r>
@@ -17598,7 +18724,7 @@
           <a:bodyPr wrap="square" lIns="0" tIns="0" rIns="0" bIns="0" rtlCol="0" anchor="ctr"/>
           <a:lstStyle/>
           <a:p>
-            <a:pPr indent="0" marL="0">
+            <a:pPr marL="0" indent="0">
               <a:buNone/>
             </a:pPr>
             <a:r>
@@ -17639,6 +18765,13 @@
             <a:prstDash val="solid"/>
           </a:ln>
         </p:spPr>
+        <p:txBody>
+          <a:bodyPr/>
+          <a:lstStyle/>
+          <a:p>
+            <a:endParaRPr lang="en-US"/>
+          </a:p>
+        </p:txBody>
       </p:sp>
       <p:sp>
         <p:nvSpPr>
@@ -17661,7 +18794,7 @@
           <a:bodyPr wrap="square" lIns="0" tIns="0" rIns="0" bIns="0" rtlCol="0" anchor="ctr"/>
           <a:lstStyle/>
           <a:p>
-            <a:pPr indent="0" marL="0">
+            <a:pPr marL="0" indent="0">
               <a:buNone/>
             </a:pPr>
             <a:r>
@@ -17769,6 +18902,13 @@
             <a:prstDash val="solid"/>
           </a:ln>
         </p:spPr>
+        <p:txBody>
+          <a:bodyPr/>
+          <a:lstStyle/>
+          <a:p>
+            <a:endParaRPr lang="en-US"/>
+          </a:p>
+        </p:txBody>
       </p:sp>
       <p:sp>
         <p:nvSpPr>
@@ -17791,11 +18931,11 @@
           <a:bodyPr wrap="square" lIns="0" tIns="0" rIns="0" bIns="0" rtlCol="0" anchor="ctr"/>
           <a:lstStyle/>
           <a:p>
-            <a:pPr indent="0" marL="0">
+            <a:pPr marL="0" indent="0">
               <a:buNone/>
             </a:pPr>
             <a:r>
-              <a:rPr lang="en-US" sz="1000" b="1" spc="200" kern="0" dirty="0">
+              <a:rPr lang="en-US" sz="1000" b="1" kern="0" spc="200" dirty="0">
                 <a:solidFill>
                   <a:srgbClr val="F5C26B"/>
                 </a:solidFill>
@@ -17830,7 +18970,7 @@
             <a:pPr marL="342900" indent="-342900">
               <a:buSzPct val="100000"/>
               <a:buFont typeface="+mj-lt"/>
-              <a:buAutoNum type="arabicPeriod" startAt="1"/>
+              <a:buAutoNum type="arabicPeriod"/>
             </a:pPr>
             <a:r>
               <a:rPr lang="en-US" sz="1000" dirty="0">
@@ -17846,7 +18986,7 @@
             <a:pPr marL="342900" indent="-342900">
               <a:buSzPct val="100000"/>
               <a:buFont typeface="+mj-lt"/>
-              <a:buAutoNum type="arabicPeriod" startAt="1"/>
+              <a:buAutoNum type="arabicPeriod"/>
             </a:pPr>
             <a:r>
               <a:rPr lang="en-US" sz="1000" dirty="0">
@@ -17862,7 +19002,7 @@
             <a:pPr marL="342900" indent="-342900">
               <a:buSzPct val="100000"/>
               <a:buFont typeface="+mj-lt"/>
-              <a:buAutoNum type="arabicPeriod" startAt="1"/>
+              <a:buAutoNum type="arabicPeriod"/>
             </a:pPr>
             <a:r>
               <a:rPr lang="en-US" sz="1000" dirty="0">
@@ -17925,6 +19065,13 @@
             <a:prstDash val="solid"/>
           </a:ln>
         </p:spPr>
+        <p:txBody>
+          <a:bodyPr/>
+          <a:lstStyle/>
+          <a:p>
+            <a:endParaRPr lang="en-US"/>
+          </a:p>
+        </p:txBody>
       </p:sp>
       <p:sp>
         <p:nvSpPr>
@@ -17950,6 +19097,13 @@
             <a:prstDash val="solid"/>
           </a:ln>
         </p:spPr>
+        <p:txBody>
+          <a:bodyPr/>
+          <a:lstStyle/>
+          <a:p>
+            <a:endParaRPr lang="en-US"/>
+          </a:p>
+        </p:txBody>
       </p:sp>
       <p:sp>
         <p:nvSpPr>
@@ -17975,6 +19129,13 @@
             <a:prstDash val="solid"/>
           </a:ln>
         </p:spPr>
+        <p:txBody>
+          <a:bodyPr/>
+          <a:lstStyle/>
+          <a:p>
+            <a:endParaRPr lang="en-US"/>
+          </a:p>
+        </p:txBody>
       </p:sp>
       <p:sp>
         <p:nvSpPr>
@@ -18002,6 +19163,13 @@
             <a:prstDash val="solid"/>
           </a:ln>
         </p:spPr>
+        <p:txBody>
+          <a:bodyPr/>
+          <a:lstStyle/>
+          <a:p>
+            <a:endParaRPr lang="en-US"/>
+          </a:p>
+        </p:txBody>
       </p:sp>
       <p:sp>
         <p:nvSpPr>
@@ -18029,6 +19197,13 @@
             <a:prstDash val="solid"/>
           </a:ln>
         </p:spPr>
+        <p:txBody>
+          <a:bodyPr/>
+          <a:lstStyle/>
+          <a:p>
+            <a:endParaRPr lang="en-US"/>
+          </a:p>
+        </p:txBody>
       </p:sp>
       <p:sp>
         <p:nvSpPr>
@@ -18054,6 +19229,13 @@
             <a:prstDash val="solid"/>
           </a:ln>
         </p:spPr>
+        <p:txBody>
+          <a:bodyPr/>
+          <a:lstStyle/>
+          <a:p>
+            <a:endParaRPr lang="en-US"/>
+          </a:p>
+        </p:txBody>
       </p:sp>
       <p:sp>
         <p:nvSpPr>
@@ -18076,7 +19258,7 @@
           <a:bodyPr wrap="square" lIns="0" tIns="0" rIns="0" bIns="0" rtlCol="0" anchor="ctr"/>
           <a:lstStyle/>
           <a:p>
-            <a:pPr algn="ctr" indent="0" marL="0">
+            <a:pPr marL="0" indent="0" algn="ctr">
               <a:buNone/>
             </a:pPr>
             <a:r>
@@ -18112,11 +19294,11 @@
           <a:bodyPr wrap="square" lIns="0" tIns="0" rIns="0" bIns="0" rtlCol="0" anchor="ctr"/>
           <a:lstStyle/>
           <a:p>
-            <a:pPr indent="0" marL="0">
+            <a:pPr marL="0" indent="0">
               <a:buNone/>
             </a:pPr>
             <a:r>
-              <a:rPr lang="en-US" sz="1000" b="1" spc="200" kern="0" dirty="0">
+              <a:rPr lang="en-US" sz="1000" b="1" kern="0" spc="200" dirty="0">
                 <a:solidFill>
                   <a:srgbClr val="F5C26B"/>
                 </a:solidFill>
@@ -18148,7 +19330,7 @@
           <a:bodyPr wrap="square" lIns="0" tIns="0" rIns="0" bIns="0" rtlCol="0" anchor="ctr"/>
           <a:lstStyle/>
           <a:p>
-            <a:pPr indent="0" marL="0">
+            <a:pPr marL="0" indent="0">
               <a:buNone/>
             </a:pPr>
             <a:r>
@@ -18187,7 +19369,7 @@
           <a:bodyPr wrap="square" lIns="0" tIns="0" rIns="0" bIns="0" rtlCol="0" anchor="ctr"/>
           <a:lstStyle/>
           <a:p>
-            <a:pPr indent="0" marL="0">
+            <a:pPr marL="0" indent="0">
               <a:buNone/>
             </a:pPr>
             <a:r>
@@ -18228,6 +19410,13 @@
             <a:prstDash val="solid"/>
           </a:ln>
         </p:spPr>
+        <p:txBody>
+          <a:bodyPr/>
+          <a:lstStyle/>
+          <a:p>
+            <a:endParaRPr lang="en-US"/>
+          </a:p>
+        </p:txBody>
       </p:sp>
       <p:sp>
         <p:nvSpPr>
@@ -18250,7 +19439,7 @@
           <a:bodyPr wrap="square" lIns="0" tIns="0" rIns="0" bIns="0" rtlCol="0" anchor="ctr"/>
           <a:lstStyle/>
           <a:p>
-            <a:pPr indent="0" marL="0">
+            <a:pPr marL="0" indent="0">
               <a:buNone/>
             </a:pPr>
             <a:r>
@@ -18358,6 +19547,13 @@
             <a:prstDash val="solid"/>
           </a:ln>
         </p:spPr>
+        <p:txBody>
+          <a:bodyPr/>
+          <a:lstStyle/>
+          <a:p>
+            <a:endParaRPr lang="en-US"/>
+          </a:p>
+        </p:txBody>
       </p:sp>
       <p:sp>
         <p:nvSpPr>
@@ -18380,11 +19576,11 @@
           <a:bodyPr wrap="square" lIns="0" tIns="0" rIns="0" bIns="0" rtlCol="0" anchor="ctr"/>
           <a:lstStyle/>
           <a:p>
-            <a:pPr indent="0" marL="0">
+            <a:pPr marL="0" indent="0">
               <a:buNone/>
             </a:pPr>
             <a:r>
-              <a:rPr lang="en-US" sz="1000" b="1" spc="200" kern="0" dirty="0">
+              <a:rPr lang="en-US" sz="1000" b="1" kern="0" spc="200" dirty="0">
                 <a:solidFill>
                   <a:srgbClr val="F5C26B"/>
                 </a:solidFill>
@@ -18419,7 +19615,7 @@
             <a:pPr marL="342900" indent="-342900">
               <a:buSzPct val="100000"/>
               <a:buFont typeface="+mj-lt"/>
-              <a:buAutoNum type="arabicPeriod" startAt="1"/>
+              <a:buAutoNum type="arabicPeriod"/>
             </a:pPr>
             <a:r>
               <a:rPr lang="en-US" sz="1000" dirty="0">
@@ -18435,7 +19631,7 @@
             <a:pPr marL="342900" indent="-342900">
               <a:buSzPct val="100000"/>
               <a:buFont typeface="+mj-lt"/>
-              <a:buAutoNum type="arabicPeriod" startAt="1"/>
+              <a:buAutoNum type="arabicPeriod"/>
             </a:pPr>
             <a:r>
               <a:rPr lang="en-US" sz="1000" dirty="0">
@@ -18451,7 +19647,7 @@
             <a:pPr marL="342900" indent="-342900">
               <a:buSzPct val="100000"/>
               <a:buFont typeface="+mj-lt"/>
-              <a:buAutoNum type="arabicPeriod" startAt="1"/>
+              <a:buAutoNum type="arabicPeriod"/>
             </a:pPr>
             <a:r>
               <a:rPr lang="en-US" sz="1000" dirty="0">
@@ -18514,6 +19710,13 @@
             <a:prstDash val="solid"/>
           </a:ln>
         </p:spPr>
+        <p:txBody>
+          <a:bodyPr/>
+          <a:lstStyle/>
+          <a:p>
+            <a:endParaRPr lang="en-US"/>
+          </a:p>
+        </p:txBody>
       </p:sp>
       <p:sp>
         <p:nvSpPr>
@@ -18539,6 +19742,13 @@
             <a:prstDash val="solid"/>
           </a:ln>
         </p:spPr>
+        <p:txBody>
+          <a:bodyPr/>
+          <a:lstStyle/>
+          <a:p>
+            <a:endParaRPr lang="en-US"/>
+          </a:p>
+        </p:txBody>
       </p:sp>
       <p:sp>
         <p:nvSpPr>
@@ -18564,6 +19774,13 @@
             <a:prstDash val="solid"/>
           </a:ln>
         </p:spPr>
+        <p:txBody>
+          <a:bodyPr/>
+          <a:lstStyle/>
+          <a:p>
+            <a:endParaRPr lang="en-US"/>
+          </a:p>
+        </p:txBody>
       </p:sp>
       <p:sp>
         <p:nvSpPr>
@@ -18591,6 +19808,13 @@
             <a:prstDash val="solid"/>
           </a:ln>
         </p:spPr>
+        <p:txBody>
+          <a:bodyPr/>
+          <a:lstStyle/>
+          <a:p>
+            <a:endParaRPr lang="en-US"/>
+          </a:p>
+        </p:txBody>
       </p:sp>
       <p:sp>
         <p:nvSpPr>
@@ -18618,6 +19842,13 @@
             <a:prstDash val="solid"/>
           </a:ln>
         </p:spPr>
+        <p:txBody>
+          <a:bodyPr/>
+          <a:lstStyle/>
+          <a:p>
+            <a:endParaRPr lang="en-US"/>
+          </a:p>
+        </p:txBody>
       </p:sp>
       <p:sp>
         <p:nvSpPr>
@@ -18643,6 +19874,13 @@
             <a:prstDash val="solid"/>
           </a:ln>
         </p:spPr>
+        <p:txBody>
+          <a:bodyPr/>
+          <a:lstStyle/>
+          <a:p>
+            <a:endParaRPr lang="en-US"/>
+          </a:p>
+        </p:txBody>
       </p:sp>
       <p:sp>
         <p:nvSpPr>
@@ -18665,7 +19903,7 @@
           <a:bodyPr wrap="square" lIns="0" tIns="0" rIns="0" bIns="0" rtlCol="0" anchor="ctr"/>
           <a:lstStyle/>
           <a:p>
-            <a:pPr algn="ctr" indent="0" marL="0">
+            <a:pPr marL="0" indent="0" algn="ctr">
               <a:buNone/>
             </a:pPr>
             <a:r>
@@ -18701,11 +19939,11 @@
           <a:bodyPr wrap="square" lIns="0" tIns="0" rIns="0" bIns="0" rtlCol="0" anchor="ctr"/>
           <a:lstStyle/>
           <a:p>
-            <a:pPr indent="0" marL="0">
+            <a:pPr marL="0" indent="0">
               <a:buNone/>
             </a:pPr>
             <a:r>
-              <a:rPr lang="en-US" sz="1000" b="1" spc="200" kern="0" dirty="0">
+              <a:rPr lang="en-US" sz="1000" b="1" kern="0" spc="200" dirty="0">
                 <a:solidFill>
                   <a:srgbClr val="F5C26B"/>
                 </a:solidFill>
@@ -18737,7 +19975,7 @@
           <a:bodyPr wrap="square" lIns="0" tIns="0" rIns="0" bIns="0" rtlCol="0" anchor="ctr"/>
           <a:lstStyle/>
           <a:p>
-            <a:pPr indent="0" marL="0">
+            <a:pPr marL="0" indent="0">
               <a:buNone/>
             </a:pPr>
             <a:r>
@@ -18776,7 +20014,7 @@
           <a:bodyPr wrap="square" lIns="0" tIns="0" rIns="0" bIns="0" rtlCol="0" anchor="ctr"/>
           <a:lstStyle/>
           <a:p>
-            <a:pPr indent="0" marL="0">
+            <a:pPr marL="0" indent="0">
               <a:buNone/>
             </a:pPr>
             <a:r>
@@ -18817,6 +20055,13 @@
             <a:prstDash val="solid"/>
           </a:ln>
         </p:spPr>
+        <p:txBody>
+          <a:bodyPr/>
+          <a:lstStyle/>
+          <a:p>
+            <a:endParaRPr lang="en-US"/>
+          </a:p>
+        </p:txBody>
       </p:sp>
       <p:sp>
         <p:nvSpPr>
@@ -18839,7 +20084,7 @@
           <a:bodyPr wrap="square" lIns="0" tIns="0" rIns="0" bIns="0" rtlCol="0" anchor="ctr"/>
           <a:lstStyle/>
           <a:p>
-            <a:pPr indent="0" marL="0">
+            <a:pPr marL="0" indent="0">
               <a:buNone/>
             </a:pPr>
             <a:r>
@@ -18947,6 +20192,13 @@
             <a:prstDash val="solid"/>
           </a:ln>
         </p:spPr>
+        <p:txBody>
+          <a:bodyPr/>
+          <a:lstStyle/>
+          <a:p>
+            <a:endParaRPr lang="en-US"/>
+          </a:p>
+        </p:txBody>
       </p:sp>
       <p:sp>
         <p:nvSpPr>
@@ -18969,11 +20221,11 @@
           <a:bodyPr wrap="square" lIns="0" tIns="0" rIns="0" bIns="0" rtlCol="0" anchor="ctr"/>
           <a:lstStyle/>
           <a:p>
-            <a:pPr indent="0" marL="0">
+            <a:pPr marL="0" indent="0">
               <a:buNone/>
             </a:pPr>
             <a:r>
-              <a:rPr lang="en-US" sz="1000" b="1" spc="200" kern="0" dirty="0">
+              <a:rPr lang="en-US" sz="1000" b="1" kern="0" spc="200" dirty="0">
                 <a:solidFill>
                   <a:srgbClr val="F5C26B"/>
                 </a:solidFill>
@@ -19008,7 +20260,7 @@
             <a:pPr marL="342900" indent="-342900">
               <a:buSzPct val="100000"/>
               <a:buFont typeface="+mj-lt"/>
-              <a:buAutoNum type="arabicPeriod" startAt="1"/>
+              <a:buAutoNum type="arabicPeriod"/>
             </a:pPr>
             <a:r>
               <a:rPr lang="en-US" sz="1000" dirty="0">
@@ -19024,7 +20276,7 @@
             <a:pPr marL="342900" indent="-342900">
               <a:buSzPct val="100000"/>
               <a:buFont typeface="+mj-lt"/>
-              <a:buAutoNum type="arabicPeriod" startAt="1"/>
+              <a:buAutoNum type="arabicPeriod"/>
             </a:pPr>
             <a:r>
               <a:rPr lang="en-US" sz="1000" dirty="0">
@@ -19040,7 +20292,7 @@
             <a:pPr marL="342900" indent="-342900">
               <a:buSzPct val="100000"/>
               <a:buFont typeface="+mj-lt"/>
-              <a:buAutoNum type="arabicPeriod" startAt="1"/>
+              <a:buAutoNum type="arabicPeriod"/>
             </a:pPr>
             <a:r>
               <a:rPr lang="en-US" sz="1000" dirty="0">
@@ -19355,4 +20607,319 @@
     </a:ext>
   </a:extLst>
 </a:theme>
+</file>
+
+<file path=ppt/theme/theme2.xml><?xml version="1.0" encoding="utf-8"?>
+<a:theme xmlns:a="http://schemas.openxmlformats.org/drawingml/2006/main" name="Office Theme">
+  <a:themeElements>
+    <a:clrScheme name="Office">
+      <a:dk1>
+        <a:sysClr val="windowText" lastClr="000000"/>
+      </a:dk1>
+      <a:lt1>
+        <a:sysClr val="window" lastClr="FFFFFF"/>
+      </a:lt1>
+      <a:dk2>
+        <a:srgbClr val="0E2841"/>
+      </a:dk2>
+      <a:lt2>
+        <a:srgbClr val="E8E8E8"/>
+      </a:lt2>
+      <a:accent1>
+        <a:srgbClr val="156082"/>
+      </a:accent1>
+      <a:accent2>
+        <a:srgbClr val="E97132"/>
+      </a:accent2>
+      <a:accent3>
+        <a:srgbClr val="196B24"/>
+      </a:accent3>
+      <a:accent4>
+        <a:srgbClr val="0F9ED5"/>
+      </a:accent4>
+      <a:accent5>
+        <a:srgbClr val="A02B93"/>
+      </a:accent5>
+      <a:accent6>
+        <a:srgbClr val="4EA72E"/>
+      </a:accent6>
+      <a:hlink>
+        <a:srgbClr val="467886"/>
+      </a:hlink>
+      <a:folHlink>
+        <a:srgbClr val="96607D"/>
+      </a:folHlink>
+    </a:clrScheme>
+    <a:fontScheme name="Office">
+      <a:majorFont>
+        <a:latin typeface="Aptos Display" panose="02110004020202020204"/>
+        <a:ea typeface=""/>
+        <a:cs typeface=""/>
+        <a:font script="Jpan" typeface="游ゴシック Light"/>
+        <a:font script="Hang" typeface="맑은 고딕"/>
+        <a:font script="Hans" typeface="等线 Light"/>
+        <a:font script="Hant" typeface="新細明體"/>
+        <a:font script="Arab" typeface="Times New Roman"/>
+        <a:font script="Hebr" typeface="Times New Roman"/>
+        <a:font script="Thai" typeface="Angsana New"/>
+        <a:font script="Ethi" typeface="Nyala"/>
+        <a:font script="Beng" typeface="Vrinda"/>
+        <a:font script="Gujr" typeface="Shruti"/>
+        <a:font script="Khmr" typeface="MoolBoran"/>
+        <a:font script="Knda" typeface="Tunga"/>
+        <a:font script="Guru" typeface="Raavi"/>
+        <a:font script="Cans" typeface="Euphemia"/>
+        <a:font script="Cher" typeface="Plantagenet Cherokee"/>
+        <a:font script="Yiii" typeface="Microsoft Yi Baiti"/>
+        <a:font script="Tibt" typeface="Microsoft Himalaya"/>
+        <a:font script="Thaa" typeface="MV Boli"/>
+        <a:font script="Deva" typeface="Mangal"/>
+        <a:font script="Telu" typeface="Gautami"/>
+        <a:font script="Taml" typeface="Latha"/>
+        <a:font script="Syrc" typeface="Estrangelo Edessa"/>
+        <a:font script="Orya" typeface="Kalinga"/>
+        <a:font script="Mlym" typeface="Kartika"/>
+        <a:font script="Laoo" typeface="DokChampa"/>
+        <a:font script="Sinh" typeface="Iskoola Pota"/>
+        <a:font script="Mong" typeface="Mongolian Baiti"/>
+        <a:font script="Viet" typeface="Times New Roman"/>
+        <a:font script="Uigh" typeface="Microsoft Uighur"/>
+        <a:font script="Geor" typeface="Sylfaen"/>
+        <a:font script="Armn" typeface="Arial"/>
+        <a:font script="Bugi" typeface="Leelawadee UI"/>
+        <a:font script="Bopo" typeface="Microsoft JhengHei"/>
+        <a:font script="Java" typeface="Javanese Text"/>
+        <a:font script="Lisu" typeface="Segoe UI"/>
+        <a:font script="Mymr" typeface="Myanmar Text"/>
+        <a:font script="Nkoo" typeface="Ebrima"/>
+        <a:font script="Olck" typeface="Nirmala UI"/>
+        <a:font script="Osma" typeface="Ebrima"/>
+        <a:font script="Phag" typeface="Phagspa"/>
+        <a:font script="Syrn" typeface="Estrangelo Edessa"/>
+        <a:font script="Syrj" typeface="Estrangelo Edessa"/>
+        <a:font script="Syre" typeface="Estrangelo Edessa"/>
+        <a:font script="Sora" typeface="Nirmala UI"/>
+        <a:font script="Tale" typeface="Microsoft Tai Le"/>
+        <a:font script="Talu" typeface="Microsoft New Tai Lue"/>
+        <a:font script="Tfng" typeface="Ebrima"/>
+      </a:majorFont>
+      <a:minorFont>
+        <a:latin typeface="Aptos" panose="02110004020202020204"/>
+        <a:ea typeface=""/>
+        <a:cs typeface=""/>
+        <a:font script="Jpan" typeface="游ゴシック"/>
+        <a:font script="Hang" typeface="맑은 고딕"/>
+        <a:font script="Hans" typeface="等线"/>
+        <a:font script="Hant" typeface="新細明體"/>
+        <a:font script="Arab" typeface="Arial"/>
+        <a:font script="Hebr" typeface="Arial"/>
+        <a:font script="Thai" typeface="Cordia New"/>
+        <a:font script="Ethi" typeface="Nyala"/>
+        <a:font script="Beng" typeface="Vrinda"/>
+        <a:font script="Gujr" typeface="Shruti"/>
+        <a:font script="Khmr" typeface="DaunPenh"/>
+        <a:font script="Knda" typeface="Tunga"/>
+        <a:font script="Guru" typeface="Raavi"/>
+        <a:font script="Cans" typeface="Euphemia"/>
+        <a:font script="Cher" typeface="Plantagenet Cherokee"/>
+        <a:font script="Yiii" typeface="Microsoft Yi Baiti"/>
+        <a:font script="Tibt" typeface="Microsoft Himalaya"/>
+        <a:font script="Thaa" typeface="MV Boli"/>
+        <a:font script="Deva" typeface="Mangal"/>
+        <a:font script="Telu" typeface="Gautami"/>
+        <a:font script="Taml" typeface="Latha"/>
+        <a:font script="Syrc" typeface="Estrangelo Edessa"/>
+        <a:font script="Orya" typeface="Kalinga"/>
+        <a:font script="Mlym" typeface="Kartika"/>
+        <a:font script="Laoo" typeface="DokChampa"/>
+        <a:font script="Sinh" typeface="Iskoola Pota"/>
+        <a:font script="Mong" typeface="Mongolian Baiti"/>
+        <a:font script="Viet" typeface="Arial"/>
+        <a:font script="Uigh" typeface="Microsoft Uighur"/>
+        <a:font script="Geor" typeface="Sylfaen"/>
+        <a:font script="Armn" typeface="Arial"/>
+        <a:font script="Bugi" typeface="Leelawadee UI"/>
+        <a:font script="Bopo" typeface="Microsoft JhengHei"/>
+        <a:font script="Java" typeface="Javanese Text"/>
+        <a:font script="Lisu" typeface="Segoe UI"/>
+        <a:font script="Mymr" typeface="Myanmar Text"/>
+        <a:font script="Nkoo" typeface="Ebrima"/>
+        <a:font script="Olck" typeface="Nirmala UI"/>
+        <a:font script="Osma" typeface="Ebrima"/>
+        <a:font script="Phag" typeface="Phagspa"/>
+        <a:font script="Syrn" typeface="Estrangelo Edessa"/>
+        <a:font script="Syrj" typeface="Estrangelo Edessa"/>
+        <a:font script="Syre" typeface="Estrangelo Edessa"/>
+        <a:font script="Sora" typeface="Nirmala UI"/>
+        <a:font script="Tale" typeface="Microsoft Tai Le"/>
+        <a:font script="Talu" typeface="Microsoft New Tai Lue"/>
+        <a:font script="Tfng" typeface="Ebrima"/>
+      </a:minorFont>
+    </a:fontScheme>
+    <a:fmtScheme name="Office">
+      <a:fillStyleLst>
+        <a:solidFill>
+          <a:schemeClr val="phClr"/>
+        </a:solidFill>
+        <a:gradFill rotWithShape="1">
+          <a:gsLst>
+            <a:gs pos="0">
+              <a:schemeClr val="phClr">
+                <a:lumMod val="110000"/>
+                <a:satMod val="105000"/>
+                <a:tint val="67000"/>
+              </a:schemeClr>
+            </a:gs>
+            <a:gs pos="50000">
+              <a:schemeClr val="phClr">
+                <a:lumMod val="105000"/>
+                <a:satMod val="103000"/>
+                <a:tint val="73000"/>
+              </a:schemeClr>
+            </a:gs>
+            <a:gs pos="100000">
+              <a:schemeClr val="phClr">
+                <a:lumMod val="105000"/>
+                <a:satMod val="109000"/>
+                <a:tint val="81000"/>
+              </a:schemeClr>
+            </a:gs>
+          </a:gsLst>
+          <a:lin ang="5400000" scaled="0"/>
+        </a:gradFill>
+        <a:gradFill rotWithShape="1">
+          <a:gsLst>
+            <a:gs pos="0">
+              <a:schemeClr val="phClr">
+                <a:satMod val="103000"/>
+                <a:lumMod val="102000"/>
+                <a:tint val="94000"/>
+              </a:schemeClr>
+            </a:gs>
+            <a:gs pos="50000">
+              <a:schemeClr val="phClr">
+                <a:satMod val="110000"/>
+                <a:lumMod val="100000"/>
+                <a:shade val="100000"/>
+              </a:schemeClr>
+            </a:gs>
+            <a:gs pos="100000">
+              <a:schemeClr val="phClr">
+                <a:lumMod val="99000"/>
+                <a:satMod val="120000"/>
+                <a:shade val="78000"/>
+              </a:schemeClr>
+            </a:gs>
+          </a:gsLst>
+          <a:lin ang="5400000" scaled="0"/>
+        </a:gradFill>
+      </a:fillStyleLst>
+      <a:lnStyleLst>
+        <a:ln w="12700" cap="flat" cmpd="sng" algn="ctr">
+          <a:solidFill>
+            <a:schemeClr val="phClr"/>
+          </a:solidFill>
+          <a:prstDash val="solid"/>
+          <a:miter lim="800000"/>
+        </a:ln>
+        <a:ln w="19050" cap="flat" cmpd="sng" algn="ctr">
+          <a:solidFill>
+            <a:schemeClr val="phClr"/>
+          </a:solidFill>
+          <a:prstDash val="solid"/>
+          <a:miter lim="800000"/>
+        </a:ln>
+        <a:ln w="25400" cap="flat" cmpd="sng" algn="ctr">
+          <a:solidFill>
+            <a:schemeClr val="phClr"/>
+          </a:solidFill>
+          <a:prstDash val="solid"/>
+          <a:miter lim="800000"/>
+        </a:ln>
+      </a:lnStyleLst>
+      <a:effectStyleLst>
+        <a:effectStyle>
+          <a:effectLst/>
+        </a:effectStyle>
+        <a:effectStyle>
+          <a:effectLst/>
+        </a:effectStyle>
+        <a:effectStyle>
+          <a:effectLst>
+            <a:outerShdw blurRad="57150" dist="19050" dir="5400000" algn="ctr" rotWithShape="0">
+              <a:srgbClr val="000000">
+                <a:alpha val="63000"/>
+              </a:srgbClr>
+            </a:outerShdw>
+          </a:effectLst>
+        </a:effectStyle>
+      </a:effectStyleLst>
+      <a:bgFillStyleLst>
+        <a:solidFill>
+          <a:schemeClr val="phClr"/>
+        </a:solidFill>
+        <a:solidFill>
+          <a:schemeClr val="phClr">
+            <a:tint val="95000"/>
+            <a:satMod val="170000"/>
+          </a:schemeClr>
+        </a:solidFill>
+        <a:gradFill rotWithShape="1">
+          <a:gsLst>
+            <a:gs pos="0">
+              <a:schemeClr val="phClr">
+                <a:tint val="93000"/>
+                <a:satMod val="150000"/>
+                <a:shade val="98000"/>
+                <a:lumMod val="102000"/>
+              </a:schemeClr>
+            </a:gs>
+            <a:gs pos="50000">
+              <a:schemeClr val="phClr">
+                <a:tint val="98000"/>
+                <a:satMod val="130000"/>
+                <a:shade val="90000"/>
+                <a:lumMod val="103000"/>
+              </a:schemeClr>
+            </a:gs>
+            <a:gs pos="100000">
+              <a:schemeClr val="phClr">
+                <a:shade val="63000"/>
+                <a:satMod val="120000"/>
+              </a:schemeClr>
+            </a:gs>
+          </a:gsLst>
+          <a:lin ang="5400000" scaled="0"/>
+        </a:gradFill>
+      </a:bgFillStyleLst>
+    </a:fmtScheme>
+  </a:themeElements>
+  <a:objectDefaults>
+    <a:lnDef>
+      <a:spPr/>
+      <a:bodyPr/>
+      <a:lstStyle/>
+      <a:style>
+        <a:lnRef idx="2">
+          <a:schemeClr val="accent1"/>
+        </a:lnRef>
+        <a:fillRef idx="0">
+          <a:schemeClr val="accent1"/>
+        </a:fillRef>
+        <a:effectRef idx="1">
+          <a:schemeClr val="accent1"/>
+        </a:effectRef>
+        <a:fontRef idx="minor">
+          <a:schemeClr val="tx1"/>
+        </a:fontRef>
+      </a:style>
+    </a:lnDef>
+  </a:objectDefaults>
+  <a:extraClrSchemeLst/>
+  <a:extLst>
+    <a:ext uri="{05A4C25C-085E-4340-85A3-A5531E510DB2}">
+      <thm15:themeFamily xmlns:thm15="http://schemas.microsoft.com/office/thememl/2012/main" name="Office Theme" id="{2E142A2C-CD16-42D6-873A-C26D2A0506FA}" vid="{1BDDFF52-6CD6-40A5-AB3C-68EB2F1E4D0A}"/>
+    </a:ext>
+  </a:extLst>
+</a:theme>
 </file>